--- a/app/static/club_resources/2/slides_layouts.pptx
+++ b/app/static/club_resources/2/slides_layouts.pptx
@@ -1,11 +1,11 @@
 
 <file path=ppt/presentation.xml><?xml version="1.0" encoding="utf-8"?>
-<p:presentation xmlns:a="http://schemas.openxmlformats.org/drawingml/2006/main" xmlns:r="http://schemas.openxmlformats.org/officeDocument/2006/relationships" xmlns:p="http://schemas.openxmlformats.org/presentationml/2006/main" saveSubsetFonts="1" autoCompressPictures="0">
+<p:presentation xmlns:a="http://schemas.openxmlformats.org/drawingml/2006/main" xmlns:r="http://schemas.openxmlformats.org/officeDocument/2006/relationships" xmlns:p="http://schemas.openxmlformats.org/presentationml/2006/main" autoCompressPictures="0">
   <p:sldMasterIdLst>
-    <p:sldMasterId id="2147483671" r:id="rId4"/>
+    <p:sldMasterId id="2147483648" r:id="rId1"/>
   </p:sldMasterIdLst>
   <p:notesMasterIdLst>
-    <p:notesMasterId r:id="rId5"/>
+    <p:notesMasterId r:id="rId3"/>
   </p:notesMasterIdLst>
   <p:sldSz cx="12192000" cy="6858000"/>
   <p:notesSz cx="6858000" cy="9144000"/>
@@ -104,14 +104,6 @@
       </a:defRPr>
     </a:lvl9pPr>
   </p:defaultTextStyle>
-  <p:extLst>
-    <p:ext uri="{EFAFB233-063F-42B5-8137-9DF3F51BA10A}">
-      <p15:sldGuideLst xmlns:p15="http://schemas.microsoft.com/office/powerpoint/2012/main"/>
-    </p:ext>
-    <p:ext uri="{2D200454-40CA-4A62-9FC3-DE9A4176ACB9}">
-      <p15:notesGuideLst xmlns:p15="http://schemas.microsoft.com/office/powerpoint/2012/main"/>
-    </p:ext>
-  </p:extLst>
 </p:presentation>
 </file>
 
@@ -203,7 +195,6 @@
           <a:p>
             <a:fld id="{F16ACEEB-96A6-BE4B-AD4A-D8B0035CB14C}" type="datetimeFigureOut">
               <a:rPr lang="en-US" smtClean="0"/>
-              <a:t>4/14/26</a:t>
             </a:fld>
             <a:endParaRPr lang="en-US"/>
           </a:p>
@@ -270,6 +261,7 @@
               <a:rPr lang="en-US"/>
               <a:t>Click to edit Master text styles</a:t>
             </a:r>
+            <a:endParaRPr lang="en-US"/>
           </a:p>
           <a:p>
             <a:pPr lvl="1"/>
@@ -277,6 +269,7 @@
               <a:rPr lang="en-US"/>
               <a:t>Second level</a:t>
             </a:r>
+            <a:endParaRPr lang="en-US"/>
           </a:p>
           <a:p>
             <a:pPr lvl="2"/>
@@ -284,6 +277,7 @@
               <a:rPr lang="en-US"/>
               <a:t>Third level</a:t>
             </a:r>
+            <a:endParaRPr lang="en-US"/>
           </a:p>
           <a:p>
             <a:pPr lvl="3"/>
@@ -291,6 +285,7 @@
               <a:rPr lang="en-US"/>
               <a:t>Fourth level</a:t>
             </a:r>
+            <a:endParaRPr lang="en-US"/>
           </a:p>
           <a:p>
             <a:pPr lvl="4"/>
@@ -298,6 +293,7 @@
               <a:rPr lang="en-US"/>
               <a:t>Fifth level</a:t>
             </a:r>
+            <a:endParaRPr lang="en-US"/>
           </a:p>
         </p:txBody>
       </p:sp>
@@ -361,18 +357,12 @@
           <a:p>
             <a:fld id="{B6847FC4-CAF1-6741-875A-C83F3721E6B6}" type="slidenum">
               <a:rPr lang="en-US" smtClean="0"/>
-              <a:t>‹#›</a:t>
             </a:fld>
             <a:endParaRPr lang="en-US"/>
           </a:p>
         </p:txBody>
       </p:sp>
     </p:spTree>
-    <p:extLst>
-      <p:ext uri="{BB962C8B-B14F-4D97-AF65-F5344CB8AC3E}">
-        <p14:creationId xmlns:p14="http://schemas.microsoft.com/office/powerpoint/2010/main" val="366087090"/>
-      </p:ext>
-    </p:extLst>
   </p:cSld>
   <p:clrMap bg1="lt1" tx1="dk1" bg2="lt2" tx2="dk2" accent1="accent1" accent2="accent2" accent3="accent3" accent4="accent4" accent5="accent5" accent6="accent6" hlink="hlink" folHlink="folHlink"/>
   <p:notesStyle>
@@ -471,7 +461,7 @@
 </file>
 
 <file path=ppt/slideLayouts/slideLayout1.xml><?xml version="1.0" encoding="utf-8"?>
-<p:sldLayout xmlns:a="http://schemas.openxmlformats.org/drawingml/2006/main" xmlns:r="http://schemas.openxmlformats.org/officeDocument/2006/relationships" xmlns:p="http://schemas.openxmlformats.org/presentationml/2006/main" showMasterSp="0" preserve="1" userDrawn="1">
+<p:sldLayout xmlns:a="http://schemas.openxmlformats.org/drawingml/2006/main" xmlns:r="http://schemas.openxmlformats.org/officeDocument/2006/relationships" xmlns:p="http://schemas.openxmlformats.org/presentationml/2006/main" preserve="1" showMasterSp="0" userDrawn="1">
   <p:cSld name="Title Slide">
     <p:spTree>
       <p:nvGrpSpPr>
@@ -489,13 +479,7 @@
       </p:grpSpPr>
       <p:sp>
         <p:nvSpPr>
-          <p:cNvPr id="9" name="Rectangle 8">
-            <a:extLst>
-              <a:ext uri="{FF2B5EF4-FFF2-40B4-BE49-F238E27FC236}">
-                <a16:creationId xmlns:a16="http://schemas.microsoft.com/office/drawing/2014/main" id="{7A007AC1-DD37-6E42-98C3-86C02FBCC8E2}"/>
-              </a:ext>
-            </a:extLst>
-          </p:cNvPr>
+          <p:cNvPr id="9" name="Rectangle 8"/>
           <p:cNvSpPr/>
           <p:nvPr userDrawn="1"/>
         </p:nvSpPr>
@@ -553,18 +537,12 @@
       </p:sp>
       <p:sp>
         <p:nvSpPr>
-          <p:cNvPr id="2" name="Title 1">
-            <a:extLst>
-              <a:ext uri="{FF2B5EF4-FFF2-40B4-BE49-F238E27FC236}">
-                <a16:creationId xmlns:a16="http://schemas.microsoft.com/office/drawing/2014/main" id="{F774E2BD-0C58-E64B-AB95-36840E71CE6C}"/>
-              </a:ext>
-            </a:extLst>
-          </p:cNvPr>
+          <p:cNvPr id="2" name="Title 1"/>
           <p:cNvSpPr>
             <a:spLocks noGrp="1"/>
           </p:cNvSpPr>
           <p:nvPr>
-            <p:ph type="ctrTitle"/>
+            <p:ph type="ctrTitle" hasCustomPrompt="1"/>
           </p:nvPr>
         </p:nvSpPr>
         <p:spPr>
@@ -594,23 +572,18 @@
               <a:rPr lang="en-US" dirty="0"/>
               <a:t>Click to edit Master title</a:t>
             </a:r>
-          </a:p>
-        </p:txBody>
-      </p:sp>
-      <p:sp>
-        <p:nvSpPr>
-          <p:cNvPr id="3" name="Subtitle 2">
-            <a:extLst>
-              <a:ext uri="{FF2B5EF4-FFF2-40B4-BE49-F238E27FC236}">
-                <a16:creationId xmlns:a16="http://schemas.microsoft.com/office/drawing/2014/main" id="{36E65A1A-B737-B943-8F8E-C68DC1ACD7AA}"/>
-              </a:ext>
-            </a:extLst>
-          </p:cNvPr>
+            <a:endParaRPr lang="en-US" dirty="0"/>
+          </a:p>
+        </p:txBody>
+      </p:sp>
+      <p:sp>
+        <p:nvSpPr>
+          <p:cNvPr id="3" name="Subtitle 2"/>
           <p:cNvSpPr>
             <a:spLocks noGrp="1"/>
           </p:cNvSpPr>
           <p:nvPr>
-            <p:ph type="subTitle" idx="1"/>
+            <p:ph type="subTitle" idx="1" hasCustomPrompt="1"/>
           </p:nvPr>
         </p:nvSpPr>
         <p:spPr>
@@ -667,18 +640,13 @@
               <a:rPr lang="en-US" dirty="0"/>
               <a:t>Click to edit Master subtitle</a:t>
             </a:r>
+            <a:endParaRPr lang="en-US" dirty="0"/>
           </a:p>
         </p:txBody>
       </p:sp>
       <p:cxnSp>
         <p:nvCxnSpPr>
-          <p:cNvPr id="19" name="Straight Connector 18">
-            <a:extLst>
-              <a:ext uri="{FF2B5EF4-FFF2-40B4-BE49-F238E27FC236}">
-                <a16:creationId xmlns:a16="http://schemas.microsoft.com/office/drawing/2014/main" id="{0D89A3AF-4EDC-4043-804E-E87D504FBF6B}"/>
-              </a:ext>
-            </a:extLst>
-          </p:cNvPr>
+          <p:cNvPr id="19" name="Straight Connector 18"/>
           <p:cNvCxnSpPr/>
           <p:nvPr userDrawn="1"/>
         </p:nvCxnSpPr>
@@ -713,13 +681,7 @@
       </p:cxnSp>
       <p:pic>
         <p:nvPicPr>
-          <p:cNvPr id="7" name="tmlogo">
-            <a:extLst>
-              <a:ext uri="{FF2B5EF4-FFF2-40B4-BE49-F238E27FC236}">
-                <a16:creationId xmlns:a16="http://schemas.microsoft.com/office/drawing/2014/main" id="{3E054381-415C-962C-7497-F345C880C04B}"/>
-              </a:ext>
-            </a:extLst>
-          </p:cNvPr>
+          <p:cNvPr id="7" name="tmlogo"/>
           <p:cNvPicPr>
             <a:picLocks noChangeAspect="1"/>
           </p:cNvPicPr>
@@ -742,11 +704,6 @@
         </p:spPr>
       </p:pic>
     </p:spTree>
-    <p:extLst>
-      <p:ext uri="{BB962C8B-B14F-4D97-AF65-F5344CB8AC3E}">
-        <p14:creationId xmlns:p14="http://schemas.microsoft.com/office/powerpoint/2010/main" val="296451487"/>
-      </p:ext>
-    </p:extLst>
   </p:cSld>
   <p:clrMapOvr>
     <a:masterClrMapping/>
@@ -773,13 +730,7 @@
       </p:grpSpPr>
       <p:sp>
         <p:nvSpPr>
-          <p:cNvPr id="3" name="Slide Number Placeholder 2">
-            <a:extLst>
-              <a:ext uri="{FF2B5EF4-FFF2-40B4-BE49-F238E27FC236}">
-                <a16:creationId xmlns:a16="http://schemas.microsoft.com/office/drawing/2014/main" id="{13E3B808-8450-C749-BE34-83F343354452}"/>
-              </a:ext>
-            </a:extLst>
-          </p:cNvPr>
+          <p:cNvPr id="3" name="Slide Number Placeholder 2"/>
           <p:cNvSpPr>
             <a:spLocks noGrp="1"/>
           </p:cNvSpPr>
@@ -794,7 +745,6 @@
           <a:p>
             <a:fld id="{B15CCACC-6213-F14B-B40D-407BFF938B14}" type="slidenum">
               <a:rPr lang="en-US" smtClean="0"/>
-              <a:t>‹#›</a:t>
             </a:fld>
             <a:endParaRPr lang="en-US"/>
           </a:p>
@@ -802,26 +752,14 @@
       </p:sp>
       <p:pic>
         <p:nvPicPr>
-          <p:cNvPr id="4" name="Picture 3" descr="A group of people sitting around a table&#10;&#10;AI-generated content may be incorrect.">
-            <a:extLst>
-              <a:ext uri="{FF2B5EF4-FFF2-40B4-BE49-F238E27FC236}">
-                <a16:creationId xmlns:a16="http://schemas.microsoft.com/office/drawing/2014/main" id="{C3D3F518-1F97-60C8-E4C8-F133183C2822}"/>
-              </a:ext>
-            </a:extLst>
-          </p:cNvPr>
+          <p:cNvPr id="4" name="Picture 3" descr="A group of people sitting around a table&#10;&#10;AI-generated content may be incorrect."/>
           <p:cNvPicPr>
             <a:picLocks noChangeAspect="1"/>
           </p:cNvPicPr>
           <p:nvPr userDrawn="1"/>
         </p:nvPicPr>
         <p:blipFill>
-          <a:blip r:embed="rId2" cstate="email">
-            <a:extLst>
-              <a:ext uri="{28A0092B-C50C-407E-A947-70E740481C1C}">
-                <a14:useLocalDpi xmlns:a14="http://schemas.microsoft.com/office/drawing/2010/main"/>
-              </a:ext>
-            </a:extLst>
-          </a:blip>
+          <a:blip r:embed="rId2" cstate="email"/>
           <a:srcRect/>
           <a:stretch>
             <a:fillRect/>
@@ -839,13 +777,7 @@
       </p:pic>
       <p:sp>
         <p:nvSpPr>
-          <p:cNvPr id="6" name="TextBox 5">
-            <a:extLst>
-              <a:ext uri="{FF2B5EF4-FFF2-40B4-BE49-F238E27FC236}">
-                <a16:creationId xmlns:a16="http://schemas.microsoft.com/office/drawing/2014/main" id="{7BBA6905-5FA3-E9EA-5389-246217F1E1B1}"/>
-              </a:ext>
-            </a:extLst>
-          </p:cNvPr>
+          <p:cNvPr id="6" name="TextBox 5"/>
           <p:cNvSpPr txBox="1"/>
           <p:nvPr userDrawn="1"/>
         </p:nvSpPr>
@@ -866,7 +798,7 @@
           <a:lstStyle/>
           <a:p>
             <a:r>
-              <a:rPr lang="en-CN" sz="9600" b="1" dirty="0">
+              <a:rPr lang="en-US" sz="9600" b="1" dirty="0">
                 <a:ln>
                   <a:solidFill>
                     <a:schemeClr val="bg1">
@@ -879,15 +811,21 @@
               </a:rPr>
               <a:t>EVALUATIONS</a:t>
             </a:r>
+            <a:endParaRPr lang="en-US" sz="9600" b="1" dirty="0">
+              <a:ln>
+                <a:solidFill>
+                  <a:schemeClr val="bg1">
+                    <a:lumMod val="20000"/>
+                    <a:lumOff val="80000"/>
+                  </a:schemeClr>
+                </a:solidFill>
+              </a:ln>
+              <a:latin typeface="Gotham Office" panose="02000000000000000000" pitchFamily="2" charset="0"/>
+            </a:endParaRPr>
           </a:p>
         </p:txBody>
       </p:sp>
     </p:spTree>
-    <p:extLst>
-      <p:ext uri="{BB962C8B-B14F-4D97-AF65-F5344CB8AC3E}">
-        <p14:creationId xmlns:p14="http://schemas.microsoft.com/office/powerpoint/2010/main" val="2722515006"/>
-      </p:ext>
-    </p:extLst>
   </p:cSld>
   <p:clrMapOvr>
     <a:masterClrMapping/>
@@ -914,13 +852,7 @@
       </p:grpSpPr>
       <p:sp>
         <p:nvSpPr>
-          <p:cNvPr id="3" name="Slide Number Placeholder 2">
-            <a:extLst>
-              <a:ext uri="{FF2B5EF4-FFF2-40B4-BE49-F238E27FC236}">
-                <a16:creationId xmlns:a16="http://schemas.microsoft.com/office/drawing/2014/main" id="{13E3B808-8450-C749-BE34-83F343354452}"/>
-              </a:ext>
-            </a:extLst>
-          </p:cNvPr>
+          <p:cNvPr id="3" name="Slide Number Placeholder 2"/>
           <p:cNvSpPr>
             <a:spLocks noGrp="1"/>
           </p:cNvSpPr>
@@ -935,7 +867,6 @@
           <a:p>
             <a:fld id="{B15CCACC-6213-F14B-B40D-407BFF938B14}" type="slidenum">
               <a:rPr lang="en-US" smtClean="0"/>
-              <a:t>‹#›</a:t>
             </a:fld>
             <a:endParaRPr lang="en-US"/>
           </a:p>
@@ -943,26 +874,14 @@
       </p:sp>
       <p:pic>
         <p:nvPicPr>
-          <p:cNvPr id="2" name="Picture 1" descr="A person with curly hair and a fist in her mouth&#10;&#10;AI-generated content may be incorrect.">
-            <a:extLst>
-              <a:ext uri="{FF2B5EF4-FFF2-40B4-BE49-F238E27FC236}">
-                <a16:creationId xmlns:a16="http://schemas.microsoft.com/office/drawing/2014/main" id="{F5B1BEAC-EFB2-6DB2-F638-D5CC13FFFFEF}"/>
-              </a:ext>
-            </a:extLst>
-          </p:cNvPr>
+          <p:cNvPr id="2" name="Picture 1" descr="A person with curly hair and a fist in her mouth&#10;&#10;AI-generated content may be incorrect."/>
           <p:cNvPicPr>
             <a:picLocks noChangeAspect="1"/>
           </p:cNvPicPr>
           <p:nvPr userDrawn="1"/>
         </p:nvPicPr>
         <p:blipFill>
-          <a:blip r:embed="rId2" cstate="email">
-            <a:extLst>
-              <a:ext uri="{28A0092B-C50C-407E-A947-70E740481C1C}">
-                <a14:useLocalDpi xmlns:a14="http://schemas.microsoft.com/office/drawing/2010/main"/>
-              </a:ext>
-            </a:extLst>
-          </a:blip>
+          <a:blip r:embed="rId2" cstate="email"/>
           <a:srcRect/>
           <a:stretch>
             <a:fillRect/>
@@ -980,13 +899,7 @@
       </p:pic>
       <p:sp>
         <p:nvSpPr>
-          <p:cNvPr id="5" name="TextBox 4">
-            <a:extLst>
-              <a:ext uri="{FF2B5EF4-FFF2-40B4-BE49-F238E27FC236}">
-                <a16:creationId xmlns:a16="http://schemas.microsoft.com/office/drawing/2014/main" id="{BDDD3EB7-A546-9173-9D0C-5A9ABE58241F}"/>
-              </a:ext>
-            </a:extLst>
-          </p:cNvPr>
+          <p:cNvPr id="5" name="TextBox 4"/>
           <p:cNvSpPr txBox="1"/>
           <p:nvPr userDrawn="1"/>
         </p:nvSpPr>
@@ -1012,7 +925,7 @@
               </a:rPr>
               <a:t>VOTING</a:t>
             </a:r>
-            <a:endParaRPr lang="en-CN" sz="9600" b="1" dirty="0">
+            <a:endParaRPr lang="en-US" sz="9600" b="1" dirty="0">
               <a:latin typeface="Gotham Office" panose="02000000000000000000" pitchFamily="2" charset="0"/>
             </a:endParaRPr>
           </a:p>
@@ -1020,13 +933,7 @@
       </p:sp>
       <p:pic>
         <p:nvPicPr>
-          <p:cNvPr id="7" name="Picture 6">
-            <a:extLst>
-              <a:ext uri="{FF2B5EF4-FFF2-40B4-BE49-F238E27FC236}">
-                <a16:creationId xmlns:a16="http://schemas.microsoft.com/office/drawing/2014/main" id="{0E6C94BE-DAF8-93DD-DA52-F30036E06673}"/>
-              </a:ext>
-            </a:extLst>
-          </p:cNvPr>
+          <p:cNvPr id="7" name="Picture 6"/>
           <p:cNvPicPr>
             <a:picLocks noChangeAspect="1"/>
           </p:cNvPicPr>
@@ -1049,11 +956,6 @@
         </p:spPr>
       </p:pic>
     </p:spTree>
-    <p:extLst>
-      <p:ext uri="{BB962C8B-B14F-4D97-AF65-F5344CB8AC3E}">
-        <p14:creationId xmlns:p14="http://schemas.microsoft.com/office/powerpoint/2010/main" val="329858651"/>
-      </p:ext>
-    </p:extLst>
   </p:cSld>
   <p:clrMapOvr>
     <a:masterClrMapping/>
@@ -1062,113 +964,6 @@
 </file>
 
 <file path=ppt/slideLayouts/slideLayout12.xml><?xml version="1.0" encoding="utf-8"?>
-<p:sldLayout xmlns:a="http://schemas.openxmlformats.org/drawingml/2006/main" xmlns:r="http://schemas.openxmlformats.org/officeDocument/2006/relationships" xmlns:p="http://schemas.openxmlformats.org/presentationml/2006/main" showMasterSp="0" preserve="1" userDrawn="1">
-  <p:cSld name="1_Custom - With Title">
-    <p:spTree>
-      <p:nvGrpSpPr>
-        <p:cNvPr id="1" name=""/>
-        <p:cNvGrpSpPr/>
-        <p:nvPr/>
-      </p:nvGrpSpPr>
-      <p:grpSpPr>
-        <a:xfrm>
-          <a:off x="0" y="0"/>
-          <a:ext cx="0" cy="0"/>
-          <a:chOff x="0" y="0"/>
-          <a:chExt cx="0" cy="0"/>
-        </a:xfrm>
-      </p:grpSpPr>
-      <p:cxnSp>
-        <p:nvCxnSpPr>
-          <p:cNvPr id="4" name="Straight Connector 3"/>
-          <p:cNvCxnSpPr/>
-          <p:nvPr userDrawn="1"/>
-        </p:nvCxnSpPr>
-        <p:spPr>
-          <a:xfrm>
-            <a:off x="406400" y="1256580"/>
-            <a:ext cx="711200" cy="0"/>
-          </a:xfrm>
-          <a:prstGeom prst="line">
-            <a:avLst/>
-          </a:prstGeom>
-          <a:ln w="28575">
-            <a:solidFill>
-              <a:srgbClr val="800000"/>
-            </a:solidFill>
-          </a:ln>
-        </p:spPr>
-        <p:style>
-          <a:lnRef idx="1">
-            <a:schemeClr val="accent1"/>
-          </a:lnRef>
-          <a:fillRef idx="0">
-            <a:schemeClr val="accent1"/>
-          </a:fillRef>
-          <a:effectRef idx="0">
-            <a:schemeClr val="accent1"/>
-          </a:effectRef>
-          <a:fontRef idx="minor">
-            <a:schemeClr val="tx1"/>
-          </a:fontRef>
-        </p:style>
-      </p:cxnSp>
-      <p:pic>
-        <p:nvPicPr>
-          <p:cNvPr id="5" name="Picture 4"/>
-          <p:cNvPicPr>
-            <a:picLocks/>
-          </p:cNvPicPr>
-          <p:nvPr userDrawn="1"/>
-        </p:nvPicPr>
-        <p:blipFill>
-          <a:blip r:embed="rId2" cstate="email">
-            <a:extLst>
-              <a:ext uri="{28A0092B-C50C-407E-A947-70E740481C1C}">
-                <a14:useLocalDpi xmlns:a14="http://schemas.microsoft.com/office/drawing/2010/main"/>
-              </a:ext>
-            </a:extLst>
-          </a:blip>
-          <a:stretch>
-            <a:fillRect/>
-          </a:stretch>
-        </p:blipFill>
-        <p:spPr>
-          <a:xfrm>
-            <a:off x="10210800" y="114301"/>
-            <a:ext cx="1801368" cy="411480"/>
-          </a:xfrm>
-          <a:prstGeom prst="rect">
-            <a:avLst/>
-          </a:prstGeom>
-        </p:spPr>
-      </p:pic>
-    </p:spTree>
-    <p:extLst>
-      <p:ext uri="{BB962C8B-B14F-4D97-AF65-F5344CB8AC3E}">
-        <p14:creationId xmlns:p14="http://schemas.microsoft.com/office/powerpoint/2010/main" val="1843235587"/>
-      </p:ext>
-    </p:extLst>
-  </p:cSld>
-  <p:clrMapOvr>
-    <a:masterClrMapping/>
-  </p:clrMapOvr>
-  <mc:AlternateContent xmlns:mc="http://schemas.openxmlformats.org/markup-compatibility/2006" xmlns:p14="http://schemas.microsoft.com/office/powerpoint/2010/main">
-    <mc:Choice Requires="p14">
-      <p:transition p14:dur="100">
-        <p:cut/>
-      </p:transition>
-    </mc:Choice>
-    <mc:Fallback xmlns="">
-      <p:transition>
-        <p:cut/>
-      </p:transition>
-    </mc:Fallback>
-  </mc:AlternateContent>
-</p:sldLayout>
-</file>
-
-<file path=ppt/slideLayouts/slideLayout13.xml><?xml version="1.0" encoding="utf-8"?>
 <p:sldLayout xmlns:a="http://schemas.openxmlformats.org/drawingml/2006/main" xmlns:r="http://schemas.openxmlformats.org/officeDocument/2006/relationships" xmlns:p="http://schemas.openxmlformats.org/presentationml/2006/main" preserve="1" userDrawn="1">
   <p:cSld name="Title and Content">
     <p:spTree>
@@ -1187,18 +982,12 @@
       </p:grpSpPr>
       <p:sp>
         <p:nvSpPr>
-          <p:cNvPr id="2" name="Title 1">
-            <a:extLst>
-              <a:ext uri="{FF2B5EF4-FFF2-40B4-BE49-F238E27FC236}">
-                <a16:creationId xmlns:a16="http://schemas.microsoft.com/office/drawing/2014/main" id="{64C3AE9D-042A-DD42-9A11-F79F2844C85D}"/>
-              </a:ext>
-            </a:extLst>
-          </p:cNvPr>
+          <p:cNvPr id="2" name="Title 1"/>
           <p:cNvSpPr>
             <a:spLocks noGrp="1"/>
           </p:cNvSpPr>
           <p:nvPr>
-            <p:ph type="title"/>
+            <p:ph type="title" hasCustomPrompt="1"/>
           </p:nvPr>
         </p:nvSpPr>
         <p:spPr>
@@ -1226,18 +1015,13 @@
               <a:rPr lang="en-US" dirty="0"/>
               <a:t>Click to edit Master title</a:t>
             </a:r>
-          </a:p>
-        </p:txBody>
-      </p:sp>
-      <p:sp>
-        <p:nvSpPr>
-          <p:cNvPr id="3" name="Content Placeholder 2">
-            <a:extLst>
-              <a:ext uri="{FF2B5EF4-FFF2-40B4-BE49-F238E27FC236}">
-                <a16:creationId xmlns:a16="http://schemas.microsoft.com/office/drawing/2014/main" id="{F0B19004-5E21-B147-B0EB-1A69AD8C296D}"/>
-              </a:ext>
-            </a:extLst>
-          </p:cNvPr>
+            <a:endParaRPr lang="en-US" dirty="0"/>
+          </a:p>
+        </p:txBody>
+      </p:sp>
+      <p:sp>
+        <p:nvSpPr>
+          <p:cNvPr id="3" name="Content Placeholder 2"/>
           <p:cNvSpPr>
             <a:spLocks noGrp="1"/>
           </p:cNvSpPr>
@@ -1263,6 +1047,7 @@
               <a:rPr lang="en-US" dirty="0"/>
               <a:t>Level One Bullet</a:t>
             </a:r>
+            <a:endParaRPr lang="en-US" dirty="0"/>
           </a:p>
           <a:p>
             <a:pPr lvl="1"/>
@@ -1270,6 +1055,7 @@
               <a:rPr lang="en-US" dirty="0"/>
               <a:t>Level Two Bullet</a:t>
             </a:r>
+            <a:endParaRPr lang="en-US" dirty="0"/>
           </a:p>
           <a:p>
             <a:pPr lvl="2"/>
@@ -1277,6 +1063,7 @@
               <a:rPr lang="en-US" dirty="0"/>
               <a:t>Level Three Bullet</a:t>
             </a:r>
+            <a:endParaRPr lang="en-US" dirty="0"/>
           </a:p>
           <a:p>
             <a:pPr lvl="3"/>
@@ -1284,18 +1071,13 @@
               <a:rPr lang="en-US" dirty="0"/>
               <a:t>Level Four Bullet</a:t>
             </a:r>
-          </a:p>
-        </p:txBody>
-      </p:sp>
-      <p:sp>
-        <p:nvSpPr>
-          <p:cNvPr id="7" name="Slide Number Placeholder 6">
-            <a:extLst>
-              <a:ext uri="{FF2B5EF4-FFF2-40B4-BE49-F238E27FC236}">
-                <a16:creationId xmlns:a16="http://schemas.microsoft.com/office/drawing/2014/main" id="{19ABB276-9101-0D4D-A13B-A773BD15A610}"/>
-              </a:ext>
-            </a:extLst>
-          </p:cNvPr>
+            <a:endParaRPr lang="en-US" dirty="0"/>
+          </a:p>
+        </p:txBody>
+      </p:sp>
+      <p:sp>
+        <p:nvSpPr>
+          <p:cNvPr id="7" name="Slide Number Placeholder 6"/>
           <p:cNvSpPr>
             <a:spLocks noGrp="1"/>
           </p:cNvSpPr>
@@ -1310,18 +1092,12 @@
           <a:p>
             <a:fld id="{B15CCACC-6213-F14B-B40D-407BFF938B14}" type="slidenum">
               <a:rPr lang="en-US" smtClean="0"/>
-              <a:t>‹#›</a:t>
             </a:fld>
             <a:endParaRPr lang="en-US"/>
           </a:p>
         </p:txBody>
       </p:sp>
     </p:spTree>
-    <p:extLst>
-      <p:ext uri="{BB962C8B-B14F-4D97-AF65-F5344CB8AC3E}">
-        <p14:creationId xmlns:p14="http://schemas.microsoft.com/office/powerpoint/2010/main" val="162556024"/>
-      </p:ext>
-    </p:extLst>
   </p:cSld>
   <p:clrMapOvr>
     <a:masterClrMapping/>
@@ -1329,7 +1105,7 @@
 </p:sldLayout>
 </file>
 
-<file path=ppt/slideLayouts/slideLayout14.xml><?xml version="1.0" encoding="utf-8"?>
+<file path=ppt/slideLayouts/slideLayout13.xml><?xml version="1.0" encoding="utf-8"?>
 <p:sldLayout xmlns:a="http://schemas.openxmlformats.org/drawingml/2006/main" xmlns:r="http://schemas.openxmlformats.org/officeDocument/2006/relationships" xmlns:p="http://schemas.openxmlformats.org/presentationml/2006/main" preserve="1" userDrawn="1">
   <p:cSld name="Title and Two Content">
     <p:spTree>
@@ -1348,18 +1124,12 @@
       </p:grpSpPr>
       <p:sp>
         <p:nvSpPr>
-          <p:cNvPr id="2" name="Title 1">
-            <a:extLst>
-              <a:ext uri="{FF2B5EF4-FFF2-40B4-BE49-F238E27FC236}">
-                <a16:creationId xmlns:a16="http://schemas.microsoft.com/office/drawing/2014/main" id="{BAF2DB36-0E37-3E4F-846E-FFE754041574}"/>
-              </a:ext>
-            </a:extLst>
-          </p:cNvPr>
+          <p:cNvPr id="2" name="Title 1"/>
           <p:cNvSpPr>
             <a:spLocks noGrp="1"/>
           </p:cNvSpPr>
           <p:nvPr>
-            <p:ph type="title"/>
+            <p:ph type="title" hasCustomPrompt="1"/>
           </p:nvPr>
         </p:nvSpPr>
         <p:spPr>
@@ -1379,18 +1149,13 @@
               <a:rPr lang="en-US" dirty="0"/>
               <a:t>Click to edit Master title</a:t>
             </a:r>
-          </a:p>
-        </p:txBody>
-      </p:sp>
-      <p:sp>
-        <p:nvSpPr>
-          <p:cNvPr id="3" name="Content Placeholder 2">
-            <a:extLst>
-              <a:ext uri="{FF2B5EF4-FFF2-40B4-BE49-F238E27FC236}">
-                <a16:creationId xmlns:a16="http://schemas.microsoft.com/office/drawing/2014/main" id="{FC3CB7B1-BD73-384F-B626-099E8AB1C163}"/>
-              </a:ext>
-            </a:extLst>
-          </p:cNvPr>
+            <a:endParaRPr lang="en-US" dirty="0"/>
+          </a:p>
+        </p:txBody>
+      </p:sp>
+      <p:sp>
+        <p:nvSpPr>
+          <p:cNvPr id="3" name="Content Placeholder 2"/>
           <p:cNvSpPr>
             <a:spLocks noGrp="1"/>
           </p:cNvSpPr>
@@ -1416,6 +1181,7 @@
               <a:rPr lang="en-US" dirty="0"/>
               <a:t>Level One Bullet</a:t>
             </a:r>
+            <a:endParaRPr lang="en-US" dirty="0"/>
           </a:p>
           <a:p>
             <a:pPr lvl="1"/>
@@ -1423,6 +1189,7 @@
               <a:rPr lang="en-US" dirty="0"/>
               <a:t>Level Two Bullet</a:t>
             </a:r>
+            <a:endParaRPr lang="en-US" dirty="0"/>
           </a:p>
           <a:p>
             <a:pPr lvl="2"/>
@@ -1430,6 +1197,7 @@
               <a:rPr lang="en-US" dirty="0"/>
               <a:t>Level Three Bullet</a:t>
             </a:r>
+            <a:endParaRPr lang="en-US" dirty="0"/>
           </a:p>
           <a:p>
             <a:pPr lvl="3"/>
@@ -1437,18 +1205,13 @@
               <a:rPr lang="en-US" dirty="0"/>
               <a:t>Level Four Bullet</a:t>
             </a:r>
-          </a:p>
-        </p:txBody>
-      </p:sp>
-      <p:sp>
-        <p:nvSpPr>
-          <p:cNvPr id="4" name="Content Placeholder 3">
-            <a:extLst>
-              <a:ext uri="{FF2B5EF4-FFF2-40B4-BE49-F238E27FC236}">
-                <a16:creationId xmlns:a16="http://schemas.microsoft.com/office/drawing/2014/main" id="{437BAA05-1B10-1D4A-BBC2-304E5EEDACA0}"/>
-              </a:ext>
-            </a:extLst>
-          </p:cNvPr>
+            <a:endParaRPr lang="en-US" dirty="0"/>
+          </a:p>
+        </p:txBody>
+      </p:sp>
+      <p:sp>
+        <p:nvSpPr>
+          <p:cNvPr id="4" name="Content Placeholder 3"/>
           <p:cNvSpPr>
             <a:spLocks noGrp="1"/>
           </p:cNvSpPr>
@@ -1474,6 +1237,7 @@
               <a:rPr lang="en-US" dirty="0"/>
               <a:t>Level One Bullet</a:t>
             </a:r>
+            <a:endParaRPr lang="en-US" dirty="0"/>
           </a:p>
           <a:p>
             <a:pPr lvl="1"/>
@@ -1481,6 +1245,7 @@
               <a:rPr lang="en-US" dirty="0"/>
               <a:t>Level Two Bullet</a:t>
             </a:r>
+            <a:endParaRPr lang="en-US" dirty="0"/>
           </a:p>
           <a:p>
             <a:pPr lvl="2"/>
@@ -1488,6 +1253,7 @@
               <a:rPr lang="en-US" dirty="0"/>
               <a:t>Level Three Bullet</a:t>
             </a:r>
+            <a:endParaRPr lang="en-US" dirty="0"/>
           </a:p>
           <a:p>
             <a:pPr lvl="3"/>
@@ -1495,18 +1261,13 @@
               <a:rPr lang="en-US" dirty="0"/>
               <a:t>Level Four Bullet</a:t>
             </a:r>
-          </a:p>
-        </p:txBody>
-      </p:sp>
-      <p:sp>
-        <p:nvSpPr>
-          <p:cNvPr id="8" name="Slide Number Placeholder 7">
-            <a:extLst>
-              <a:ext uri="{FF2B5EF4-FFF2-40B4-BE49-F238E27FC236}">
-                <a16:creationId xmlns:a16="http://schemas.microsoft.com/office/drawing/2014/main" id="{30DD411A-1AC0-4C4B-B7F9-D6B8D5E7DF62}"/>
-              </a:ext>
-            </a:extLst>
-          </p:cNvPr>
+            <a:endParaRPr lang="en-US" dirty="0"/>
+          </a:p>
+        </p:txBody>
+      </p:sp>
+      <p:sp>
+        <p:nvSpPr>
+          <p:cNvPr id="8" name="Slide Number Placeholder 7"/>
           <p:cNvSpPr>
             <a:spLocks noGrp="1"/>
           </p:cNvSpPr>
@@ -1521,18 +1282,12 @@
           <a:p>
             <a:fld id="{B15CCACC-6213-F14B-B40D-407BFF938B14}" type="slidenum">
               <a:rPr lang="en-US" smtClean="0"/>
-              <a:t>‹#›</a:t>
             </a:fld>
             <a:endParaRPr lang="en-US"/>
           </a:p>
         </p:txBody>
       </p:sp>
     </p:spTree>
-    <p:extLst>
-      <p:ext uri="{BB962C8B-B14F-4D97-AF65-F5344CB8AC3E}">
-        <p14:creationId xmlns:p14="http://schemas.microsoft.com/office/powerpoint/2010/main" val="3099008871"/>
-      </p:ext>
-    </p:extLst>
   </p:cSld>
   <p:clrMapOvr>
     <a:masterClrMapping/>
@@ -1540,7 +1295,7 @@
 </p:sldLayout>
 </file>
 
-<file path=ppt/slideLayouts/slideLayout15.xml><?xml version="1.0" encoding="utf-8"?>
+<file path=ppt/slideLayouts/slideLayout14.xml><?xml version="1.0" encoding="utf-8"?>
 <p:sldLayout xmlns:a="http://schemas.openxmlformats.org/drawingml/2006/main" xmlns:r="http://schemas.openxmlformats.org/officeDocument/2006/relationships" xmlns:p="http://schemas.openxmlformats.org/presentationml/2006/main" type="twoTxTwoObj" preserve="1">
   <p:cSld name="Title and Content Comparison">
     <p:spTree>
@@ -1559,18 +1314,12 @@
       </p:grpSpPr>
       <p:sp>
         <p:nvSpPr>
-          <p:cNvPr id="2" name="Title 1">
-            <a:extLst>
-              <a:ext uri="{FF2B5EF4-FFF2-40B4-BE49-F238E27FC236}">
-                <a16:creationId xmlns:a16="http://schemas.microsoft.com/office/drawing/2014/main" id="{E1546EA6-B167-1647-B82D-DC3F21AF8E50}"/>
-              </a:ext>
-            </a:extLst>
-          </p:cNvPr>
+          <p:cNvPr id="2" name="Title 1"/>
           <p:cNvSpPr>
             <a:spLocks noGrp="1"/>
           </p:cNvSpPr>
           <p:nvPr>
-            <p:ph type="title"/>
+            <p:ph type="title" hasCustomPrompt="1"/>
           </p:nvPr>
         </p:nvSpPr>
         <p:spPr>
@@ -1590,18 +1339,13 @@
               <a:rPr lang="en-US" dirty="0"/>
               <a:t>Click to edit Master title</a:t>
             </a:r>
-          </a:p>
-        </p:txBody>
-      </p:sp>
-      <p:sp>
-        <p:nvSpPr>
-          <p:cNvPr id="3" name="Text Placeholder 2">
-            <a:extLst>
-              <a:ext uri="{FF2B5EF4-FFF2-40B4-BE49-F238E27FC236}">
-                <a16:creationId xmlns:a16="http://schemas.microsoft.com/office/drawing/2014/main" id="{C5525187-523C-DC4E-B373-33ABFAF3AC58}"/>
-              </a:ext>
-            </a:extLst>
-          </p:cNvPr>
+            <a:endParaRPr lang="en-US" dirty="0"/>
+          </a:p>
+        </p:txBody>
+      </p:sp>
+      <p:sp>
+        <p:nvSpPr>
+          <p:cNvPr id="3" name="Text Placeholder 2"/>
           <p:cNvSpPr>
             <a:spLocks noGrp="1"/>
           </p:cNvSpPr>
@@ -1666,18 +1410,13 @@
               <a:rPr lang="en-US" dirty="0"/>
               <a:t>Click to edit text</a:t>
             </a:r>
-          </a:p>
-        </p:txBody>
-      </p:sp>
-      <p:sp>
-        <p:nvSpPr>
-          <p:cNvPr id="4" name="Content Placeholder 3">
-            <a:extLst>
-              <a:ext uri="{FF2B5EF4-FFF2-40B4-BE49-F238E27FC236}">
-                <a16:creationId xmlns:a16="http://schemas.microsoft.com/office/drawing/2014/main" id="{A15F897F-8F77-C642-9F94-C50E3197BAFC}"/>
-              </a:ext>
-            </a:extLst>
-          </p:cNvPr>
+            <a:endParaRPr lang="en-US" dirty="0"/>
+          </a:p>
+        </p:txBody>
+      </p:sp>
+      <p:sp>
+        <p:nvSpPr>
+          <p:cNvPr id="4" name="Content Placeholder 3"/>
           <p:cNvSpPr>
             <a:spLocks noGrp="1"/>
           </p:cNvSpPr>
@@ -1703,6 +1442,7 @@
               <a:rPr lang="en-US" dirty="0"/>
               <a:t>Level One Bullet</a:t>
             </a:r>
+            <a:endParaRPr lang="en-US" dirty="0"/>
           </a:p>
           <a:p>
             <a:pPr lvl="1"/>
@@ -1710,6 +1450,7 @@
               <a:rPr lang="en-US" dirty="0"/>
               <a:t>Level Two Bullet</a:t>
             </a:r>
+            <a:endParaRPr lang="en-US" dirty="0"/>
           </a:p>
           <a:p>
             <a:pPr lvl="2"/>
@@ -1717,6 +1458,7 @@
               <a:rPr lang="en-US" dirty="0"/>
               <a:t>Level Three Bullet</a:t>
             </a:r>
+            <a:endParaRPr lang="en-US" dirty="0"/>
           </a:p>
           <a:p>
             <a:pPr lvl="3"/>
@@ -1724,18 +1466,13 @@
               <a:rPr lang="en-US" dirty="0"/>
               <a:t>Level Four Bullet</a:t>
             </a:r>
-          </a:p>
-        </p:txBody>
-      </p:sp>
-      <p:sp>
-        <p:nvSpPr>
-          <p:cNvPr id="5" name="Text Placeholder 4">
-            <a:extLst>
-              <a:ext uri="{FF2B5EF4-FFF2-40B4-BE49-F238E27FC236}">
-                <a16:creationId xmlns:a16="http://schemas.microsoft.com/office/drawing/2014/main" id="{F100E7DB-782E-2C45-8167-CDD0EA86BAD2}"/>
-              </a:ext>
-            </a:extLst>
-          </p:cNvPr>
+            <a:endParaRPr lang="en-US" dirty="0"/>
+          </a:p>
+        </p:txBody>
+      </p:sp>
+      <p:sp>
+        <p:nvSpPr>
+          <p:cNvPr id="5" name="Text Placeholder 4"/>
           <p:cNvSpPr>
             <a:spLocks noGrp="1"/>
           </p:cNvSpPr>
@@ -1800,18 +1537,13 @@
               <a:rPr lang="en-US" dirty="0"/>
               <a:t>Click to edit text</a:t>
             </a:r>
-          </a:p>
-        </p:txBody>
-      </p:sp>
-      <p:sp>
-        <p:nvSpPr>
-          <p:cNvPr id="6" name="Content Placeholder 5">
-            <a:extLst>
-              <a:ext uri="{FF2B5EF4-FFF2-40B4-BE49-F238E27FC236}">
-                <a16:creationId xmlns:a16="http://schemas.microsoft.com/office/drawing/2014/main" id="{B8B53DB2-837A-1E41-952E-52B252EFBAD9}"/>
-              </a:ext>
-            </a:extLst>
-          </p:cNvPr>
+            <a:endParaRPr lang="en-US" dirty="0"/>
+          </a:p>
+        </p:txBody>
+      </p:sp>
+      <p:sp>
+        <p:nvSpPr>
+          <p:cNvPr id="6" name="Content Placeholder 5"/>
           <p:cNvSpPr>
             <a:spLocks noGrp="1"/>
           </p:cNvSpPr>
@@ -1837,6 +1569,7 @@
               <a:rPr lang="en-US" dirty="0"/>
               <a:t>Level One Bullet</a:t>
             </a:r>
+            <a:endParaRPr lang="en-US" dirty="0"/>
           </a:p>
           <a:p>
             <a:pPr lvl="1"/>
@@ -1844,6 +1577,7 @@
               <a:rPr lang="en-US" dirty="0"/>
               <a:t>Level Two Bullet</a:t>
             </a:r>
+            <a:endParaRPr lang="en-US" dirty="0"/>
           </a:p>
           <a:p>
             <a:pPr lvl="2"/>
@@ -1851,6 +1585,7 @@
               <a:rPr lang="en-US" dirty="0"/>
               <a:t>Level Three Bullet</a:t>
             </a:r>
+            <a:endParaRPr lang="en-US" dirty="0"/>
           </a:p>
           <a:p>
             <a:pPr lvl="3"/>
@@ -1858,18 +1593,13 @@
               <a:rPr lang="en-US" dirty="0"/>
               <a:t>Level Four Bullet</a:t>
             </a:r>
-          </a:p>
-        </p:txBody>
-      </p:sp>
-      <p:sp>
-        <p:nvSpPr>
-          <p:cNvPr id="10" name="Slide Number Placeholder 9">
-            <a:extLst>
-              <a:ext uri="{FF2B5EF4-FFF2-40B4-BE49-F238E27FC236}">
-                <a16:creationId xmlns:a16="http://schemas.microsoft.com/office/drawing/2014/main" id="{DAC63D21-C33D-9E4F-9EDB-EE6548FFC555}"/>
-              </a:ext>
-            </a:extLst>
-          </p:cNvPr>
+            <a:endParaRPr lang="en-US" dirty="0"/>
+          </a:p>
+        </p:txBody>
+      </p:sp>
+      <p:sp>
+        <p:nvSpPr>
+          <p:cNvPr id="10" name="Slide Number Placeholder 9"/>
           <p:cNvSpPr>
             <a:spLocks noGrp="1"/>
           </p:cNvSpPr>
@@ -1884,18 +1614,12 @@
           <a:p>
             <a:fld id="{B15CCACC-6213-F14B-B40D-407BFF938B14}" type="slidenum">
               <a:rPr lang="en-US" smtClean="0"/>
-              <a:t>‹#›</a:t>
             </a:fld>
             <a:endParaRPr lang="en-US"/>
           </a:p>
         </p:txBody>
       </p:sp>
     </p:spTree>
-    <p:extLst>
-      <p:ext uri="{BB962C8B-B14F-4D97-AF65-F5344CB8AC3E}">
-        <p14:creationId xmlns:p14="http://schemas.microsoft.com/office/powerpoint/2010/main" val="4231670481"/>
-      </p:ext>
-    </p:extLst>
   </p:cSld>
   <p:clrMapOvr>
     <a:masterClrMapping/>
@@ -1903,7 +1627,7 @@
 </p:sldLayout>
 </file>
 
-<file path=ppt/slideLayouts/slideLayout16.xml><?xml version="1.0" encoding="utf-8"?>
+<file path=ppt/slideLayouts/slideLayout15.xml><?xml version="1.0" encoding="utf-8"?>
 <p:sldLayout xmlns:a="http://schemas.openxmlformats.org/drawingml/2006/main" xmlns:r="http://schemas.openxmlformats.org/officeDocument/2006/relationships" xmlns:p="http://schemas.openxmlformats.org/presentationml/2006/main" type="titleOnly" preserve="1">
   <p:cSld name="Title Only">
     <p:spTree>
@@ -1922,18 +1646,12 @@
       </p:grpSpPr>
       <p:sp>
         <p:nvSpPr>
-          <p:cNvPr id="2" name="Title 1">
-            <a:extLst>
-              <a:ext uri="{FF2B5EF4-FFF2-40B4-BE49-F238E27FC236}">
-                <a16:creationId xmlns:a16="http://schemas.microsoft.com/office/drawing/2014/main" id="{CD699B51-C150-AD4E-BEE5-623B0A131E39}"/>
-              </a:ext>
-            </a:extLst>
-          </p:cNvPr>
+          <p:cNvPr id="2" name="Title 1"/>
           <p:cNvSpPr>
             <a:spLocks noGrp="1"/>
           </p:cNvSpPr>
           <p:nvPr>
-            <p:ph type="title"/>
+            <p:ph type="title" hasCustomPrompt="1"/>
           </p:nvPr>
         </p:nvSpPr>
         <p:spPr>
@@ -1953,18 +1671,13 @@
               <a:rPr lang="en-US" dirty="0"/>
               <a:t>Click to edit Master title</a:t>
             </a:r>
-          </a:p>
-        </p:txBody>
-      </p:sp>
-      <p:sp>
-        <p:nvSpPr>
-          <p:cNvPr id="6" name="Slide Number Placeholder 5">
-            <a:extLst>
-              <a:ext uri="{FF2B5EF4-FFF2-40B4-BE49-F238E27FC236}">
-                <a16:creationId xmlns:a16="http://schemas.microsoft.com/office/drawing/2014/main" id="{7B303C40-DDF3-1B4D-8096-0CB457987799}"/>
-              </a:ext>
-            </a:extLst>
-          </p:cNvPr>
+            <a:endParaRPr lang="en-US" dirty="0"/>
+          </a:p>
+        </p:txBody>
+      </p:sp>
+      <p:sp>
+        <p:nvSpPr>
+          <p:cNvPr id="6" name="Slide Number Placeholder 5"/>
           <p:cNvSpPr>
             <a:spLocks noGrp="1"/>
           </p:cNvSpPr>
@@ -1979,18 +1692,12 @@
           <a:p>
             <a:fld id="{B15CCACC-6213-F14B-B40D-407BFF938B14}" type="slidenum">
               <a:rPr lang="en-US" smtClean="0"/>
-              <a:t>‹#›</a:t>
             </a:fld>
             <a:endParaRPr lang="en-US"/>
           </a:p>
         </p:txBody>
       </p:sp>
     </p:spTree>
-    <p:extLst>
-      <p:ext uri="{BB962C8B-B14F-4D97-AF65-F5344CB8AC3E}">
-        <p14:creationId xmlns:p14="http://schemas.microsoft.com/office/powerpoint/2010/main" val="7308197"/>
-      </p:ext>
-    </p:extLst>
   </p:cSld>
   <p:clrMapOvr>
     <a:masterClrMapping/>
@@ -1998,7 +1705,7 @@
 </p:sldLayout>
 </file>
 
-<file path=ppt/slideLayouts/slideLayout17.xml><?xml version="1.0" encoding="utf-8"?>
+<file path=ppt/slideLayouts/slideLayout16.xml><?xml version="1.0" encoding="utf-8"?>
 <p:sldLayout xmlns:a="http://schemas.openxmlformats.org/drawingml/2006/main" xmlns:r="http://schemas.openxmlformats.org/officeDocument/2006/relationships" xmlns:p="http://schemas.openxmlformats.org/presentationml/2006/main" preserve="1" userDrawn="1">
   <p:cSld name="Title and Three Content">
     <p:spTree>
@@ -2017,18 +1724,12 @@
       </p:grpSpPr>
       <p:sp>
         <p:nvSpPr>
-          <p:cNvPr id="2" name="Title 1">
-            <a:extLst>
-              <a:ext uri="{FF2B5EF4-FFF2-40B4-BE49-F238E27FC236}">
-                <a16:creationId xmlns:a16="http://schemas.microsoft.com/office/drawing/2014/main" id="{CD699B51-C150-AD4E-BEE5-623B0A131E39}"/>
-              </a:ext>
-            </a:extLst>
-          </p:cNvPr>
+          <p:cNvPr id="2" name="Title 1"/>
           <p:cNvSpPr>
             <a:spLocks noGrp="1"/>
           </p:cNvSpPr>
           <p:nvPr>
-            <p:ph type="title"/>
+            <p:ph type="title" hasCustomPrompt="1"/>
           </p:nvPr>
         </p:nvSpPr>
         <p:spPr>
@@ -2048,18 +1749,13 @@
               <a:rPr lang="en-US" dirty="0"/>
               <a:t>Click to edit Master title</a:t>
             </a:r>
-          </a:p>
-        </p:txBody>
-      </p:sp>
-      <p:sp>
-        <p:nvSpPr>
-          <p:cNvPr id="6" name="Slide Number Placeholder 5">
-            <a:extLst>
-              <a:ext uri="{FF2B5EF4-FFF2-40B4-BE49-F238E27FC236}">
-                <a16:creationId xmlns:a16="http://schemas.microsoft.com/office/drawing/2014/main" id="{7B303C40-DDF3-1B4D-8096-0CB457987799}"/>
-              </a:ext>
-            </a:extLst>
-          </p:cNvPr>
+            <a:endParaRPr lang="en-US" dirty="0"/>
+          </a:p>
+        </p:txBody>
+      </p:sp>
+      <p:sp>
+        <p:nvSpPr>
+          <p:cNvPr id="6" name="Slide Number Placeholder 5"/>
           <p:cNvSpPr>
             <a:spLocks noGrp="1"/>
           </p:cNvSpPr>
@@ -2074,7 +1770,6 @@
           <a:p>
             <a:fld id="{B15CCACC-6213-F14B-B40D-407BFF938B14}" type="slidenum">
               <a:rPr lang="en-US" smtClean="0"/>
-              <a:t>‹#›</a:t>
             </a:fld>
             <a:endParaRPr lang="en-US"/>
           </a:p>
@@ -2082,13 +1777,7 @@
       </p:sp>
       <p:sp>
         <p:nvSpPr>
-          <p:cNvPr id="4" name="Text Placeholder 5">
-            <a:extLst>
-              <a:ext uri="{FF2B5EF4-FFF2-40B4-BE49-F238E27FC236}">
-                <a16:creationId xmlns:a16="http://schemas.microsoft.com/office/drawing/2014/main" id="{41311304-9C98-8B49-B434-134184A09B3F}"/>
-              </a:ext>
-            </a:extLst>
-          </p:cNvPr>
+          <p:cNvPr id="4" name="Text Placeholder 5"/>
           <p:cNvSpPr>
             <a:spLocks noGrp="1"/>
           </p:cNvSpPr>
@@ -2137,7 +1826,6 @@
               <a:buSzTx/>
               <a:buFontTx/>
               <a:buNone/>
-              <a:tabLst/>
               <a:defRPr sz="1800">
                 <a:solidFill>
                   <a:schemeClr val="tx1"/>
@@ -2161,7 +1849,6 @@
               <a:buSzTx/>
               <a:buFontTx/>
               <a:buNone/>
-              <a:tabLst/>
               <a:defRPr/>
             </a:pPr>
             <a:r>
@@ -2173,6 +1860,12 @@
               </a:rPr>
               <a:t>body body body body body body body body body body body body body body body body body body body body body body body body</a:t>
             </a:r>
+            <a:endParaRPr lang="en-US" b="0" i="0" dirty="0">
+              <a:solidFill>
+                <a:srgbClr val="595959"/>
+              </a:solidFill>
+              <a:latin typeface="Myriad Pro" panose="020B0503030403020204" pitchFamily="34" charset="0"/>
+            </a:endParaRPr>
           </a:p>
           <a:p>
             <a:pPr marL="0" marR="0" lvl="0" indent="0" algn="ctr" defTabSz="914400" rtl="0" eaLnBrk="1" fontAlgn="base" latinLnBrk="0" hangingPunct="1">
@@ -2189,7 +1882,6 @@
               <a:buSzTx/>
               <a:buFontTx/>
               <a:buNone/>
-              <a:tabLst/>
               <a:defRPr/>
             </a:pPr>
             <a:r>
@@ -2207,13 +1899,7 @@
       </p:sp>
       <p:sp>
         <p:nvSpPr>
-          <p:cNvPr id="5" name="Text Placeholder 5">
-            <a:extLst>
-              <a:ext uri="{FF2B5EF4-FFF2-40B4-BE49-F238E27FC236}">
-                <a16:creationId xmlns:a16="http://schemas.microsoft.com/office/drawing/2014/main" id="{60320AC0-0FC1-8C47-8026-8DEF53359BF8}"/>
-              </a:ext>
-            </a:extLst>
-          </p:cNvPr>
+          <p:cNvPr id="5" name="Text Placeholder 5"/>
           <p:cNvSpPr>
             <a:spLocks noGrp="1"/>
           </p:cNvSpPr>
@@ -2262,7 +1948,6 @@
               <a:buSzTx/>
               <a:buFontTx/>
               <a:buNone/>
-              <a:tabLst/>
               <a:defRPr sz="1800">
                 <a:ln>
                   <a:noFill/>
@@ -2289,7 +1974,6 @@
               <a:buSzTx/>
               <a:buFontTx/>
               <a:buNone/>
-              <a:tabLst/>
               <a:defRPr/>
             </a:pPr>
             <a:r>
@@ -2301,6 +1985,12 @@
               </a:rPr>
               <a:t>body body body body body body body body body body body body body body body body body body body body body body body body</a:t>
             </a:r>
+            <a:endParaRPr lang="en-US" b="0" i="0" dirty="0">
+              <a:solidFill>
+                <a:srgbClr val="595959"/>
+              </a:solidFill>
+              <a:latin typeface="Myriad Pro" panose="020B0503030403020204" pitchFamily="34" charset="0"/>
+            </a:endParaRPr>
           </a:p>
           <a:p>
             <a:pPr marL="0" marR="0" lvl="0" indent="0" algn="ctr" defTabSz="914400" rtl="0" eaLnBrk="1" fontAlgn="base" latinLnBrk="0" hangingPunct="1">
@@ -2317,7 +2007,6 @@
               <a:buSzTx/>
               <a:buFontTx/>
               <a:buNone/>
-              <a:tabLst/>
               <a:defRPr/>
             </a:pPr>
             <a:r>
@@ -2335,13 +2024,7 @@
       </p:sp>
       <p:sp>
         <p:nvSpPr>
-          <p:cNvPr id="7" name="Text Placeholder 5">
-            <a:extLst>
-              <a:ext uri="{FF2B5EF4-FFF2-40B4-BE49-F238E27FC236}">
-                <a16:creationId xmlns:a16="http://schemas.microsoft.com/office/drawing/2014/main" id="{6B3F4821-83A2-084E-87B9-80099BFD857A}"/>
-              </a:ext>
-            </a:extLst>
-          </p:cNvPr>
+          <p:cNvPr id="7" name="Text Placeholder 5"/>
           <p:cNvSpPr>
             <a:spLocks noGrp="1"/>
           </p:cNvSpPr>
@@ -2390,7 +2073,6 @@
               <a:buSzTx/>
               <a:buFontTx/>
               <a:buNone/>
-              <a:tabLst/>
               <a:defRPr sz="1800">
                 <a:solidFill>
                   <a:schemeClr val="tx1"/>
@@ -2414,7 +2096,6 @@
               <a:buSzTx/>
               <a:buFontTx/>
               <a:buNone/>
-              <a:tabLst/>
               <a:defRPr/>
             </a:pPr>
             <a:r>
@@ -2426,6 +2107,12 @@
               </a:rPr>
               <a:t>body body body body body body body body body body body body body body body body body body body body body body body body</a:t>
             </a:r>
+            <a:endParaRPr lang="en-US" b="0" i="0" dirty="0">
+              <a:solidFill>
+                <a:srgbClr val="595959"/>
+              </a:solidFill>
+              <a:latin typeface="Myriad Pro" panose="020B0503030403020204" pitchFamily="34" charset="0"/>
+            </a:endParaRPr>
           </a:p>
           <a:p>
             <a:pPr marL="0" marR="0" lvl="0" indent="0" algn="ctr" defTabSz="914400" rtl="0" eaLnBrk="1" fontAlgn="base" latinLnBrk="0" hangingPunct="1">
@@ -2442,7 +2129,6 @@
               <a:buSzTx/>
               <a:buFontTx/>
               <a:buNone/>
-              <a:tabLst/>
               <a:defRPr/>
             </a:pPr>
             <a:r>
@@ -2460,13 +2146,7 @@
       </p:sp>
       <p:sp>
         <p:nvSpPr>
-          <p:cNvPr id="8" name="Text Placeholder 13">
-            <a:extLst>
-              <a:ext uri="{FF2B5EF4-FFF2-40B4-BE49-F238E27FC236}">
-                <a16:creationId xmlns:a16="http://schemas.microsoft.com/office/drawing/2014/main" id="{AD38DF34-14F9-5F41-8070-1BD3DEF20C9B}"/>
-              </a:ext>
-            </a:extLst>
-          </p:cNvPr>
+          <p:cNvPr id="8" name="Text Placeholder 13"/>
           <p:cNvSpPr>
             <a:spLocks noGrp="1"/>
           </p:cNvSpPr>
@@ -2505,18 +2185,13 @@
               <a:rPr lang="en-US" dirty="0"/>
               <a:t>Subhead</a:t>
             </a:r>
-          </a:p>
-        </p:txBody>
-      </p:sp>
-      <p:sp>
-        <p:nvSpPr>
-          <p:cNvPr id="9" name="Text Placeholder 13">
-            <a:extLst>
-              <a:ext uri="{FF2B5EF4-FFF2-40B4-BE49-F238E27FC236}">
-                <a16:creationId xmlns:a16="http://schemas.microsoft.com/office/drawing/2014/main" id="{D5DF8844-5287-1E4A-BF7D-DE2C1E03B26E}"/>
-              </a:ext>
-            </a:extLst>
-          </p:cNvPr>
+            <a:endParaRPr lang="en-US" dirty="0"/>
+          </a:p>
+        </p:txBody>
+      </p:sp>
+      <p:sp>
+        <p:nvSpPr>
+          <p:cNvPr id="9" name="Text Placeholder 13"/>
           <p:cNvSpPr>
             <a:spLocks noGrp="1"/>
           </p:cNvSpPr>
@@ -2552,18 +2227,13 @@
               <a:rPr lang="en-US" dirty="0"/>
               <a:t>Subhead</a:t>
             </a:r>
-          </a:p>
-        </p:txBody>
-      </p:sp>
-      <p:sp>
-        <p:nvSpPr>
-          <p:cNvPr id="10" name="Text Placeholder 13">
-            <a:extLst>
-              <a:ext uri="{FF2B5EF4-FFF2-40B4-BE49-F238E27FC236}">
-                <a16:creationId xmlns:a16="http://schemas.microsoft.com/office/drawing/2014/main" id="{73E7AE11-2C77-954A-BEF0-800001182DAE}"/>
-              </a:ext>
-            </a:extLst>
-          </p:cNvPr>
+            <a:endParaRPr lang="en-US" dirty="0"/>
+          </a:p>
+        </p:txBody>
+      </p:sp>
+      <p:sp>
+        <p:nvSpPr>
+          <p:cNvPr id="10" name="Text Placeholder 13"/>
           <p:cNvSpPr>
             <a:spLocks noGrp="1"/>
           </p:cNvSpPr>
@@ -2599,15 +2269,11 @@
               <a:rPr lang="en-US" dirty="0"/>
               <a:t>Subhead</a:t>
             </a:r>
+            <a:endParaRPr lang="en-US" dirty="0"/>
           </a:p>
         </p:txBody>
       </p:sp>
     </p:spTree>
-    <p:extLst>
-      <p:ext uri="{BB962C8B-B14F-4D97-AF65-F5344CB8AC3E}">
-        <p14:creationId xmlns:p14="http://schemas.microsoft.com/office/powerpoint/2010/main" val="856762547"/>
-      </p:ext>
-    </p:extLst>
   </p:cSld>
   <p:clrMapOvr>
     <a:masterClrMapping/>
@@ -2615,7 +2281,7 @@
 </p:sldLayout>
 </file>
 
-<file path=ppt/slideLayouts/slideLayout18.xml><?xml version="1.0" encoding="utf-8"?>
+<file path=ppt/slideLayouts/slideLayout17.xml><?xml version="1.0" encoding="utf-8"?>
 <p:sldLayout xmlns:a="http://schemas.openxmlformats.org/drawingml/2006/main" xmlns:r="http://schemas.openxmlformats.org/officeDocument/2006/relationships" xmlns:p="http://schemas.openxmlformats.org/presentationml/2006/main" preserve="1" userDrawn="1">
   <p:cSld name="Title and 3 Images">
     <p:spTree>
@@ -2634,18 +2300,12 @@
       </p:grpSpPr>
       <p:sp>
         <p:nvSpPr>
-          <p:cNvPr id="2" name="Title 1">
-            <a:extLst>
-              <a:ext uri="{FF2B5EF4-FFF2-40B4-BE49-F238E27FC236}">
-                <a16:creationId xmlns:a16="http://schemas.microsoft.com/office/drawing/2014/main" id="{CD699B51-C150-AD4E-BEE5-623B0A131E39}"/>
-              </a:ext>
-            </a:extLst>
-          </p:cNvPr>
+          <p:cNvPr id="2" name="Title 1"/>
           <p:cNvSpPr>
             <a:spLocks noGrp="1"/>
           </p:cNvSpPr>
           <p:nvPr>
-            <p:ph type="title"/>
+            <p:ph type="title" hasCustomPrompt="1"/>
           </p:nvPr>
         </p:nvSpPr>
         <p:spPr>
@@ -2665,18 +2325,13 @@
               <a:rPr lang="en-US" dirty="0"/>
               <a:t>Click to edit Master title</a:t>
             </a:r>
-          </a:p>
-        </p:txBody>
-      </p:sp>
-      <p:sp>
-        <p:nvSpPr>
-          <p:cNvPr id="28" name="Picture Placeholder 14">
-            <a:extLst>
-              <a:ext uri="{FF2B5EF4-FFF2-40B4-BE49-F238E27FC236}">
-                <a16:creationId xmlns:a16="http://schemas.microsoft.com/office/drawing/2014/main" id="{4779427A-781D-EA42-927E-C82F77CBE2D4}"/>
-              </a:ext>
-            </a:extLst>
-          </p:cNvPr>
+            <a:endParaRPr lang="en-US" dirty="0"/>
+          </a:p>
+        </p:txBody>
+      </p:sp>
+      <p:sp>
+        <p:nvSpPr>
+          <p:cNvPr id="28" name="Picture Placeholder 14"/>
           <p:cNvSpPr>
             <a:spLocks noGrp="1"/>
           </p:cNvSpPr>
@@ -2711,18 +2366,13 @@
               <a:rPr lang="en-US" dirty="0"/>
               <a:t>Click to add picture</a:t>
             </a:r>
-          </a:p>
-        </p:txBody>
-      </p:sp>
-      <p:sp>
-        <p:nvSpPr>
-          <p:cNvPr id="29" name="Text Placeholder 5">
-            <a:extLst>
-              <a:ext uri="{FF2B5EF4-FFF2-40B4-BE49-F238E27FC236}">
-                <a16:creationId xmlns:a16="http://schemas.microsoft.com/office/drawing/2014/main" id="{52CCDFF2-698A-B84A-9762-F0746F91F672}"/>
-              </a:ext>
-            </a:extLst>
-          </p:cNvPr>
+            <a:endParaRPr lang="en-US" dirty="0"/>
+          </a:p>
+        </p:txBody>
+      </p:sp>
+      <p:sp>
+        <p:nvSpPr>
+          <p:cNvPr id="29" name="Text Placeholder 5"/>
           <p:cNvSpPr>
             <a:spLocks noGrp="1"/>
           </p:cNvSpPr>
@@ -2770,7 +2420,6 @@
               <a:buSzTx/>
               <a:buFontTx/>
               <a:buNone/>
-              <a:tabLst/>
               <a:defRPr sz="1800">
                 <a:solidFill>
                   <a:schemeClr val="tx1"/>
@@ -2794,7 +2443,6 @@
               <a:buSzTx/>
               <a:buFontTx/>
               <a:buNone/>
-              <a:tabLst/>
               <a:defRPr/>
             </a:pPr>
             <a:r>
@@ -2812,13 +2460,7 @@
       </p:sp>
       <p:sp>
         <p:nvSpPr>
-          <p:cNvPr id="34" name="Text Placeholder 4">
-            <a:extLst>
-              <a:ext uri="{FF2B5EF4-FFF2-40B4-BE49-F238E27FC236}">
-                <a16:creationId xmlns:a16="http://schemas.microsoft.com/office/drawing/2014/main" id="{4DD02BB8-6D7A-2046-9515-B3821248853B}"/>
-              </a:ext>
-            </a:extLst>
-          </p:cNvPr>
+          <p:cNvPr id="34" name="Text Placeholder 4"/>
           <p:cNvSpPr>
             <a:spLocks noGrp="1"/>
           </p:cNvSpPr>
@@ -2892,18 +2534,13 @@
               <a:rPr lang="en-US" dirty="0"/>
               <a:t>Click to enter first and last name</a:t>
             </a:r>
-          </a:p>
-        </p:txBody>
-      </p:sp>
-      <p:sp>
-        <p:nvSpPr>
-          <p:cNvPr id="37" name="Picture Placeholder 14">
-            <a:extLst>
-              <a:ext uri="{FF2B5EF4-FFF2-40B4-BE49-F238E27FC236}">
-                <a16:creationId xmlns:a16="http://schemas.microsoft.com/office/drawing/2014/main" id="{9E49D0A7-C905-EA43-9A2D-DB9AF470A359}"/>
-              </a:ext>
-            </a:extLst>
-          </p:cNvPr>
+            <a:endParaRPr lang="en-US" dirty="0"/>
+          </a:p>
+        </p:txBody>
+      </p:sp>
+      <p:sp>
+        <p:nvSpPr>
+          <p:cNvPr id="37" name="Picture Placeholder 14"/>
           <p:cNvSpPr>
             <a:spLocks noGrp="1"/>
           </p:cNvSpPr>
@@ -2938,18 +2575,13 @@
               <a:rPr lang="en-US" dirty="0"/>
               <a:t>Click to add picture</a:t>
             </a:r>
-          </a:p>
-        </p:txBody>
-      </p:sp>
-      <p:sp>
-        <p:nvSpPr>
-          <p:cNvPr id="38" name="Text Placeholder 5">
-            <a:extLst>
-              <a:ext uri="{FF2B5EF4-FFF2-40B4-BE49-F238E27FC236}">
-                <a16:creationId xmlns:a16="http://schemas.microsoft.com/office/drawing/2014/main" id="{408DC2C2-0C1A-0549-8DFD-B5846E86F5DB}"/>
-              </a:ext>
-            </a:extLst>
-          </p:cNvPr>
+            <a:endParaRPr lang="en-US" dirty="0"/>
+          </a:p>
+        </p:txBody>
+      </p:sp>
+      <p:sp>
+        <p:nvSpPr>
+          <p:cNvPr id="38" name="Text Placeholder 5"/>
           <p:cNvSpPr>
             <a:spLocks noGrp="1"/>
           </p:cNvSpPr>
@@ -2997,7 +2629,6 @@
               <a:buSzTx/>
               <a:buFontTx/>
               <a:buNone/>
-              <a:tabLst/>
               <a:defRPr sz="1800">
                 <a:solidFill>
                   <a:srgbClr val="F5F5F5"/>
@@ -3021,7 +2652,6 @@
               <a:buSzTx/>
               <a:buFontTx/>
               <a:buNone/>
-              <a:tabLst/>
               <a:defRPr/>
             </a:pPr>
             <a:r>
@@ -3039,13 +2669,7 @@
       </p:sp>
       <p:sp>
         <p:nvSpPr>
-          <p:cNvPr id="39" name="Text Placeholder 4">
-            <a:extLst>
-              <a:ext uri="{FF2B5EF4-FFF2-40B4-BE49-F238E27FC236}">
-                <a16:creationId xmlns:a16="http://schemas.microsoft.com/office/drawing/2014/main" id="{157D76DD-6800-C546-A701-88D8621EFDF3}"/>
-              </a:ext>
-            </a:extLst>
-          </p:cNvPr>
+          <p:cNvPr id="39" name="Text Placeholder 4"/>
           <p:cNvSpPr>
             <a:spLocks noGrp="1"/>
           </p:cNvSpPr>
@@ -3119,18 +2743,13 @@
               <a:rPr lang="en-US" dirty="0"/>
               <a:t>Click to enter first and last name</a:t>
             </a:r>
-          </a:p>
-        </p:txBody>
-      </p:sp>
-      <p:sp>
-        <p:nvSpPr>
-          <p:cNvPr id="40" name="Picture Placeholder 14">
-            <a:extLst>
-              <a:ext uri="{FF2B5EF4-FFF2-40B4-BE49-F238E27FC236}">
-                <a16:creationId xmlns:a16="http://schemas.microsoft.com/office/drawing/2014/main" id="{206F4037-ACDA-D545-AE97-19BCD24A558A}"/>
-              </a:ext>
-            </a:extLst>
-          </p:cNvPr>
+            <a:endParaRPr lang="en-US" dirty="0"/>
+          </a:p>
+        </p:txBody>
+      </p:sp>
+      <p:sp>
+        <p:nvSpPr>
+          <p:cNvPr id="40" name="Picture Placeholder 14"/>
           <p:cNvSpPr>
             <a:spLocks noGrp="1"/>
           </p:cNvSpPr>
@@ -3165,18 +2784,13 @@
               <a:rPr lang="en-US" dirty="0"/>
               <a:t>Click to add picture</a:t>
             </a:r>
-          </a:p>
-        </p:txBody>
-      </p:sp>
-      <p:sp>
-        <p:nvSpPr>
-          <p:cNvPr id="41" name="Text Placeholder 5">
-            <a:extLst>
-              <a:ext uri="{FF2B5EF4-FFF2-40B4-BE49-F238E27FC236}">
-                <a16:creationId xmlns:a16="http://schemas.microsoft.com/office/drawing/2014/main" id="{7ED6EB13-4202-404D-8380-863765DE4E56}"/>
-              </a:ext>
-            </a:extLst>
-          </p:cNvPr>
+            <a:endParaRPr lang="en-US" dirty="0"/>
+          </a:p>
+        </p:txBody>
+      </p:sp>
+      <p:sp>
+        <p:nvSpPr>
+          <p:cNvPr id="41" name="Text Placeholder 5"/>
           <p:cNvSpPr>
             <a:spLocks noGrp="1"/>
           </p:cNvSpPr>
@@ -3224,7 +2838,6 @@
               <a:buSzTx/>
               <a:buFontTx/>
               <a:buNone/>
-              <a:tabLst/>
               <a:defRPr sz="1800">
                 <a:solidFill>
                   <a:schemeClr val="tx1"/>
@@ -3248,7 +2861,6 @@
               <a:buSzTx/>
               <a:buFontTx/>
               <a:buNone/>
-              <a:tabLst/>
               <a:defRPr/>
             </a:pPr>
             <a:r>
@@ -3266,13 +2878,7 @@
       </p:sp>
       <p:sp>
         <p:nvSpPr>
-          <p:cNvPr id="42" name="Text Placeholder 4">
-            <a:extLst>
-              <a:ext uri="{FF2B5EF4-FFF2-40B4-BE49-F238E27FC236}">
-                <a16:creationId xmlns:a16="http://schemas.microsoft.com/office/drawing/2014/main" id="{BDA54CC0-1DB6-1C4B-A1E7-741749ED3F40}"/>
-              </a:ext>
-            </a:extLst>
-          </p:cNvPr>
+          <p:cNvPr id="42" name="Text Placeholder 4"/>
           <p:cNvSpPr>
             <a:spLocks noGrp="1"/>
           </p:cNvSpPr>
@@ -3346,18 +2952,13 @@
               <a:rPr lang="en-US" dirty="0"/>
               <a:t>Click to enter first and last name</a:t>
             </a:r>
-          </a:p>
-        </p:txBody>
-      </p:sp>
-      <p:sp>
-        <p:nvSpPr>
-          <p:cNvPr id="12" name="Slide Number Placeholder 14">
-            <a:extLst>
-              <a:ext uri="{FF2B5EF4-FFF2-40B4-BE49-F238E27FC236}">
-                <a16:creationId xmlns:a16="http://schemas.microsoft.com/office/drawing/2014/main" id="{6A30D6AC-E7B5-0C42-8FD4-4E98826C8CD7}"/>
-              </a:ext>
-            </a:extLst>
-          </p:cNvPr>
+            <a:endParaRPr lang="en-US" dirty="0"/>
+          </a:p>
+        </p:txBody>
+      </p:sp>
+      <p:sp>
+        <p:nvSpPr>
+          <p:cNvPr id="12" name="Slide Number Placeholder 14"/>
           <p:cNvSpPr>
             <a:spLocks noGrp="1"/>
           </p:cNvSpPr>
@@ -3388,19 +2989,12 @@
           <a:p>
             <a:fld id="{B15CCACC-6213-F14B-B40D-407BFF938B14}" type="slidenum">
               <a:rPr lang="en-US" smtClean="0"/>
-              <a:pPr/>
-              <a:t>‹#›</a:t>
             </a:fld>
             <a:endParaRPr lang="en-US" dirty="0"/>
           </a:p>
         </p:txBody>
       </p:sp>
     </p:spTree>
-    <p:extLst>
-      <p:ext uri="{BB962C8B-B14F-4D97-AF65-F5344CB8AC3E}">
-        <p14:creationId xmlns:p14="http://schemas.microsoft.com/office/powerpoint/2010/main" val="1117541955"/>
-      </p:ext>
-    </p:extLst>
   </p:cSld>
   <p:clrMapOvr>
     <a:masterClrMapping/>
@@ -3408,8 +3002,8 @@
 </p:sldLayout>
 </file>
 
-<file path=ppt/slideLayouts/slideLayout19.xml><?xml version="1.0" encoding="utf-8"?>
-<p:sldLayout xmlns:a="http://schemas.openxmlformats.org/drawingml/2006/main" xmlns:r="http://schemas.openxmlformats.org/officeDocument/2006/relationships" xmlns:p="http://schemas.openxmlformats.org/presentationml/2006/main" showMasterSp="0" preserve="1" userDrawn="1">
+<file path=ppt/slideLayouts/slideLayout18.xml><?xml version="1.0" encoding="utf-8"?>
+<p:sldLayout xmlns:a="http://schemas.openxmlformats.org/drawingml/2006/main" xmlns:r="http://schemas.openxmlformats.org/officeDocument/2006/relationships" xmlns:p="http://schemas.openxmlformats.org/presentationml/2006/main" preserve="1" showMasterSp="0" userDrawn="1">
   <p:cSld name="Image and Text">
     <p:spTree>
       <p:nvGrpSpPr>
@@ -3427,13 +3021,7 @@
       </p:grpSpPr>
       <p:sp>
         <p:nvSpPr>
-          <p:cNvPr id="10" name="Rectangle 9">
-            <a:extLst>
-              <a:ext uri="{FF2B5EF4-FFF2-40B4-BE49-F238E27FC236}">
-                <a16:creationId xmlns:a16="http://schemas.microsoft.com/office/drawing/2014/main" id="{9A017C5F-3EE2-C848-A0FF-9B4B43B3F6D2}"/>
-              </a:ext>
-            </a:extLst>
-          </p:cNvPr>
+          <p:cNvPr id="10" name="Rectangle 9"/>
           <p:cNvSpPr/>
           <p:nvPr userDrawn="1"/>
         </p:nvSpPr>
@@ -3491,13 +3079,7 @@
       </p:sp>
       <p:sp>
         <p:nvSpPr>
-          <p:cNvPr id="14" name="Rounded Rectangle 13">
-            <a:extLst>
-              <a:ext uri="{FF2B5EF4-FFF2-40B4-BE49-F238E27FC236}">
-                <a16:creationId xmlns:a16="http://schemas.microsoft.com/office/drawing/2014/main" id="{5F759B73-2926-1243-8C54-9F81CC4FEE3B}"/>
-              </a:ext>
-            </a:extLst>
-          </p:cNvPr>
+          <p:cNvPr id="14" name="Rounded Rectangle 13"/>
           <p:cNvSpPr/>
           <p:nvPr userDrawn="1"/>
         </p:nvSpPr>
@@ -3544,13 +3126,7 @@
       </p:sp>
       <p:sp>
         <p:nvSpPr>
-          <p:cNvPr id="15" name="Rectangle 14">
-            <a:extLst>
-              <a:ext uri="{FF2B5EF4-FFF2-40B4-BE49-F238E27FC236}">
-                <a16:creationId xmlns:a16="http://schemas.microsoft.com/office/drawing/2014/main" id="{11195FD5-F90D-6E48-BA95-14C70423FB2C}"/>
-              </a:ext>
-            </a:extLst>
-          </p:cNvPr>
+          <p:cNvPr id="15" name="Rectangle 14"/>
           <p:cNvSpPr/>
           <p:nvPr userDrawn="1"/>
         </p:nvSpPr>
@@ -3598,13 +3174,7 @@
       </p:sp>
       <p:sp>
         <p:nvSpPr>
-          <p:cNvPr id="16" name="Picture Placeholder 14">
-            <a:extLst>
-              <a:ext uri="{FF2B5EF4-FFF2-40B4-BE49-F238E27FC236}">
-                <a16:creationId xmlns:a16="http://schemas.microsoft.com/office/drawing/2014/main" id="{855AF2D4-8C7C-2849-A0D6-D449E513C6D0}"/>
-              </a:ext>
-            </a:extLst>
-          </p:cNvPr>
+          <p:cNvPr id="16" name="Picture Placeholder 14"/>
           <p:cNvSpPr>
             <a:spLocks noGrp="1"/>
           </p:cNvSpPr>
@@ -3639,18 +3209,13 @@
               <a:rPr lang="en-US" dirty="0"/>
               <a:t>Click icon to add picture</a:t>
             </a:r>
-          </a:p>
-        </p:txBody>
-      </p:sp>
-      <p:sp>
-        <p:nvSpPr>
-          <p:cNvPr id="17" name="Text Placeholder 22">
-            <a:extLst>
-              <a:ext uri="{FF2B5EF4-FFF2-40B4-BE49-F238E27FC236}">
-                <a16:creationId xmlns:a16="http://schemas.microsoft.com/office/drawing/2014/main" id="{6041B4C2-28F5-0E43-84A3-1E98A479E820}"/>
-              </a:ext>
-            </a:extLst>
-          </p:cNvPr>
+            <a:endParaRPr lang="en-US" dirty="0"/>
+          </a:p>
+        </p:txBody>
+      </p:sp>
+      <p:sp>
+        <p:nvSpPr>
+          <p:cNvPr id="17" name="Text Placeholder 22"/>
           <p:cNvSpPr>
             <a:spLocks noGrp="1"/>
           </p:cNvSpPr>
@@ -3734,18 +3299,13 @@
               <a:rPr lang="en-US" dirty="0"/>
               <a:t>First &amp; Last Name</a:t>
             </a:r>
-          </a:p>
-        </p:txBody>
-      </p:sp>
-      <p:sp>
-        <p:nvSpPr>
-          <p:cNvPr id="18" name="Text Placeholder 22">
-            <a:extLst>
-              <a:ext uri="{FF2B5EF4-FFF2-40B4-BE49-F238E27FC236}">
-                <a16:creationId xmlns:a16="http://schemas.microsoft.com/office/drawing/2014/main" id="{0AD2906D-80B8-9F47-ACC6-2080574562EE}"/>
-              </a:ext>
-            </a:extLst>
-          </p:cNvPr>
+            <a:endParaRPr lang="en-US" dirty="0"/>
+          </a:p>
+        </p:txBody>
+      </p:sp>
+      <p:sp>
+        <p:nvSpPr>
+          <p:cNvPr id="18" name="Text Placeholder 22"/>
           <p:cNvSpPr>
             <a:spLocks noGrp="1"/>
           </p:cNvSpPr>
@@ -3829,18 +3389,13 @@
               <a:rPr lang="en-US" dirty="0"/>
               <a:t>Title</a:t>
             </a:r>
-          </a:p>
-        </p:txBody>
-      </p:sp>
-      <p:sp>
-        <p:nvSpPr>
-          <p:cNvPr id="20" name="Rectangle 19">
-            <a:extLst>
-              <a:ext uri="{FF2B5EF4-FFF2-40B4-BE49-F238E27FC236}">
-                <a16:creationId xmlns:a16="http://schemas.microsoft.com/office/drawing/2014/main" id="{2E958830-11F8-214C-8249-594F82B018E7}"/>
-              </a:ext>
-            </a:extLst>
-          </p:cNvPr>
+            <a:endParaRPr lang="en-US" dirty="0"/>
+          </a:p>
+        </p:txBody>
+      </p:sp>
+      <p:sp>
+        <p:nvSpPr>
+          <p:cNvPr id="20" name="Rectangle 19"/>
           <p:cNvSpPr/>
           <p:nvPr userDrawn="1"/>
         </p:nvSpPr>
@@ -3886,13 +3441,7 @@
       </p:sp>
       <p:sp>
         <p:nvSpPr>
-          <p:cNvPr id="21" name="Slide Number Placeholder 14">
-            <a:extLst>
-              <a:ext uri="{FF2B5EF4-FFF2-40B4-BE49-F238E27FC236}">
-                <a16:creationId xmlns:a16="http://schemas.microsoft.com/office/drawing/2014/main" id="{DD7E7516-B2D4-0A47-850C-7EAA5B5E5ED7}"/>
-              </a:ext>
-            </a:extLst>
-          </p:cNvPr>
+          <p:cNvPr id="21" name="Slide Number Placeholder 14"/>
           <p:cNvSpPr>
             <a:spLocks noGrp="1"/>
           </p:cNvSpPr>
@@ -3923,8 +3472,6 @@
           <a:p>
             <a:fld id="{B15CCACC-6213-F14B-B40D-407BFF938B14}" type="slidenum">
               <a:rPr lang="en-US" smtClean="0"/>
-              <a:pPr/>
-              <a:t>‹#›</a:t>
             </a:fld>
             <a:endParaRPr lang="en-US" dirty="0"/>
           </a:p>
@@ -3932,26 +3479,14 @@
       </p:sp>
       <p:pic>
         <p:nvPicPr>
-          <p:cNvPr id="22" name="Picture 21">
-            <a:extLst>
-              <a:ext uri="{FF2B5EF4-FFF2-40B4-BE49-F238E27FC236}">
-                <a16:creationId xmlns:a16="http://schemas.microsoft.com/office/drawing/2014/main" id="{34FE3127-0010-5D49-9D39-446C6CC1D46F}"/>
-              </a:ext>
-            </a:extLst>
-          </p:cNvPr>
+          <p:cNvPr id="22" name="Picture 21"/>
           <p:cNvPicPr>
             <a:picLocks noChangeAspect="1"/>
           </p:cNvPicPr>
           <p:nvPr userDrawn="1"/>
         </p:nvPicPr>
         <p:blipFill>
-          <a:blip r:embed="rId2" cstate="screen">
-            <a:extLst>
-              <a:ext uri="{28A0092B-C50C-407E-A947-70E740481C1C}">
-                <a14:useLocalDpi xmlns:a14="http://schemas.microsoft.com/office/drawing/2010/main"/>
-              </a:ext>
-            </a:extLst>
-          </a:blip>
+          <a:blip r:embed="rId2" cstate="screen"/>
           <a:stretch>
             <a:fillRect/>
           </a:stretch>
@@ -3967,11 +3502,6 @@
         </p:spPr>
       </p:pic>
     </p:spTree>
-    <p:extLst>
-      <p:ext uri="{BB962C8B-B14F-4D97-AF65-F5344CB8AC3E}">
-        <p14:creationId xmlns:p14="http://schemas.microsoft.com/office/powerpoint/2010/main" val="1114764925"/>
-      </p:ext>
-    </p:extLst>
   </p:cSld>
   <p:clrMapOvr>
     <a:masterClrMapping/>
@@ -3979,9 +3509,9 @@
 </p:sldLayout>
 </file>
 
-<file path=ppt/slideLayouts/slideLayout2.xml><?xml version="1.0" encoding="utf-8"?>
-<p:sldLayout xmlns:a="http://schemas.openxmlformats.org/drawingml/2006/main" xmlns:r="http://schemas.openxmlformats.org/officeDocument/2006/relationships" xmlns:p="http://schemas.openxmlformats.org/presentationml/2006/main" showMasterSp="0" preserve="1" userDrawn="1">
-  <p:cSld name="Role Taker Slide">
+<file path=ppt/slideLayouts/slideLayout19.xml><?xml version="1.0" encoding="utf-8"?>
+<p:sldLayout xmlns:a="http://schemas.openxmlformats.org/drawingml/2006/main" xmlns:r="http://schemas.openxmlformats.org/officeDocument/2006/relationships" xmlns:p="http://schemas.openxmlformats.org/presentationml/2006/main" type="blank" preserve="1" showMasterSp="0">
+  <p:cSld name="1_Blank">
     <p:spTree>
       <p:nvGrpSpPr>
         <p:cNvPr id="1" name=""/>
@@ -3998,19 +3528,13 @@
       </p:grpSpPr>
       <p:sp>
         <p:nvSpPr>
-          <p:cNvPr id="11" name="Rectangle 10">
-            <a:extLst>
-              <a:ext uri="{FF2B5EF4-FFF2-40B4-BE49-F238E27FC236}">
-                <a16:creationId xmlns:a16="http://schemas.microsoft.com/office/drawing/2014/main" id="{45619CAB-6643-C445-9D1E-B586B7DBC1C9}"/>
-              </a:ext>
-            </a:extLst>
-          </p:cNvPr>
+          <p:cNvPr id="11" name="Rectangle 10"/>
           <p:cNvSpPr/>
           <p:nvPr userDrawn="1"/>
         </p:nvSpPr>
         <p:spPr>
           <a:xfrm rot="10800000">
-            <a:off x="0" y="27698"/>
+            <a:off x="0" y="0"/>
             <a:ext cx="12192000" cy="6858000"/>
           </a:xfrm>
           <a:prstGeom prst="rect">
@@ -4062,13 +3586,7 @@
       </p:sp>
       <p:sp>
         <p:nvSpPr>
-          <p:cNvPr id="8" name="Rectangle 7">
-            <a:extLst>
-              <a:ext uri="{FF2B5EF4-FFF2-40B4-BE49-F238E27FC236}">
-                <a16:creationId xmlns:a16="http://schemas.microsoft.com/office/drawing/2014/main" id="{3C2420E5-B19B-524A-8BC9-508D147EF32B}"/>
-              </a:ext>
-            </a:extLst>
-          </p:cNvPr>
+          <p:cNvPr id="5" name="Rectangle 4"/>
           <p:cNvSpPr/>
           <p:nvPr userDrawn="1"/>
         </p:nvSpPr>
@@ -4114,26 +3632,14 @@
       </p:sp>
       <p:pic>
         <p:nvPicPr>
-          <p:cNvPr id="10" name="Picture 9">
-            <a:extLst>
-              <a:ext uri="{FF2B5EF4-FFF2-40B4-BE49-F238E27FC236}">
-                <a16:creationId xmlns:a16="http://schemas.microsoft.com/office/drawing/2014/main" id="{AC9AF70D-6371-A340-A1FF-58A02DD84AB9}"/>
-              </a:ext>
-            </a:extLst>
-          </p:cNvPr>
+          <p:cNvPr id="10" name="Picture 9"/>
           <p:cNvPicPr>
             <a:picLocks noChangeAspect="1"/>
           </p:cNvPicPr>
           <p:nvPr userDrawn="1"/>
         </p:nvPicPr>
         <p:blipFill>
-          <a:blip r:embed="rId2" cstate="screen">
-            <a:extLst>
-              <a:ext uri="{28A0092B-C50C-407E-A947-70E740481C1C}">
-                <a14:useLocalDpi xmlns:a14="http://schemas.microsoft.com/office/drawing/2010/main"/>
-              </a:ext>
-            </a:extLst>
-          </a:blip>
+          <a:blip r:embed="rId2" cstate="screen"/>
           <a:stretch>
             <a:fillRect/>
           </a:stretch>
@@ -4150,260 +3656,43 @@
       </p:pic>
       <p:sp>
         <p:nvSpPr>
-          <p:cNvPr id="12" name="title">
-            <a:extLst>
-              <a:ext uri="{FF2B5EF4-FFF2-40B4-BE49-F238E27FC236}">
-                <a16:creationId xmlns:a16="http://schemas.microsoft.com/office/drawing/2014/main" id="{6548366F-DD1B-E444-8E3B-E95A563D0EB1}"/>
-              </a:ext>
-            </a:extLst>
-          </p:cNvPr>
+          <p:cNvPr id="7" name="Slide Number Placeholder 14"/>
           <p:cNvSpPr>
             <a:spLocks noGrp="1"/>
           </p:cNvSpPr>
           <p:nvPr>
-            <p:ph type="ctrTitle" hasCustomPrompt="1"/>
-          </p:nvPr>
-        </p:nvSpPr>
-        <p:spPr>
-          <a:xfrm>
-            <a:off x="4229100" y="2359916"/>
-            <a:ext cx="6438900" cy="731520"/>
-          </a:xfrm>
-          <a:prstGeom prst="rect">
-            <a:avLst/>
-          </a:prstGeom>
-        </p:spPr>
-        <p:txBody>
-          <a:bodyPr anchor="b">
-            <a:noAutofit/>
-          </a:bodyPr>
+            <p:ph type="sldNum" sz="quarter" idx="4"/>
+          </p:nvPr>
+        </p:nvSpPr>
+        <p:spPr>
+          <a:xfrm>
+            <a:off x="9067800" y="6356350"/>
+            <a:ext cx="2743200" cy="365125"/>
+          </a:xfrm>
+          <a:prstGeom prst="rect">
+            <a:avLst/>
+          </a:prstGeom>
+        </p:spPr>
+        <p:txBody>
+          <a:bodyPr vert="horz" lIns="91440" tIns="45720" rIns="91440" bIns="45720" rtlCol="0" anchor="ctr"/>
           <a:lstStyle>
-            <a:lvl1pPr algn="ctr">
-              <a:defRPr sz="3600">
+            <a:lvl1pPr algn="r">
+              <a:defRPr sz="1800" b="1">
                 <a:solidFill>
-                  <a:srgbClr val="F2DF74"/>
+                  <a:schemeClr val="bg1"/>
                 </a:solidFill>
               </a:defRPr>
             </a:lvl1pPr>
           </a:lstStyle>
           <a:p>
-            <a:r>
-              <a:rPr lang="en-US" dirty="0"/>
-              <a:t>Click to edit Section title</a:t>
-            </a:r>
-          </a:p>
-        </p:txBody>
-      </p:sp>
-      <p:sp>
-        <p:nvSpPr>
-          <p:cNvPr id="13" name="subtitle">
-            <a:extLst>
-              <a:ext uri="{FF2B5EF4-FFF2-40B4-BE49-F238E27FC236}">
-                <a16:creationId xmlns:a16="http://schemas.microsoft.com/office/drawing/2014/main" id="{FEDBFCD6-6E1D-B541-A1AF-99FEDC0C7A97}"/>
-              </a:ext>
-            </a:extLst>
-          </p:cNvPr>
-          <p:cNvSpPr>
-            <a:spLocks noGrp="1"/>
-          </p:cNvSpPr>
-          <p:nvPr>
-            <p:ph type="subTitle" idx="1" hasCustomPrompt="1"/>
-          </p:nvPr>
-        </p:nvSpPr>
-        <p:spPr>
-          <a:xfrm>
-            <a:off x="4229100" y="3358503"/>
-            <a:ext cx="6438900" cy="914400"/>
-          </a:xfrm>
-          <a:prstGeom prst="rect">
-            <a:avLst/>
-          </a:prstGeom>
-        </p:spPr>
-        <p:txBody>
-          <a:bodyPr>
-            <a:normAutofit/>
-          </a:bodyPr>
-          <a:lstStyle>
-            <a:lvl1pPr marL="0" indent="0" algn="ctr">
-              <a:buNone/>
-              <a:defRPr sz="2100"/>
-            </a:lvl1pPr>
-            <a:lvl2pPr marL="457200" indent="0" algn="ctr">
-              <a:buNone/>
-              <a:defRPr sz="2000"/>
-            </a:lvl2pPr>
-            <a:lvl3pPr marL="914400" indent="0" algn="ctr">
-              <a:buNone/>
-              <a:defRPr sz="1800"/>
-            </a:lvl3pPr>
-            <a:lvl4pPr marL="1371600" indent="0" algn="ctr">
-              <a:buNone/>
-              <a:defRPr sz="1600"/>
-            </a:lvl4pPr>
-            <a:lvl5pPr marL="1828800" indent="0" algn="ctr">
-              <a:buNone/>
-              <a:defRPr sz="1600"/>
-            </a:lvl5pPr>
-            <a:lvl6pPr marL="2286000" indent="0" algn="ctr">
-              <a:buNone/>
-              <a:defRPr sz="1600"/>
-            </a:lvl6pPr>
-            <a:lvl7pPr marL="2743200" indent="0" algn="ctr">
-              <a:buNone/>
-              <a:defRPr sz="1600"/>
-            </a:lvl7pPr>
-            <a:lvl8pPr marL="3200400" indent="0" algn="ctr">
-              <a:buNone/>
-              <a:defRPr sz="1600"/>
-            </a:lvl8pPr>
-            <a:lvl9pPr marL="3657600" indent="0" algn="ctr">
-              <a:buNone/>
-              <a:defRPr sz="1600"/>
-            </a:lvl9pPr>
-          </a:lstStyle>
-          <a:p>
-            <a:r>
-              <a:rPr lang="en-US" dirty="0"/>
-              <a:t>Click to edit Section subtitle</a:t>
-            </a:r>
-          </a:p>
-        </p:txBody>
-      </p:sp>
-      <p:sp>
-        <p:nvSpPr>
-          <p:cNvPr id="3" name="duration_background">
-            <a:extLst>
-              <a:ext uri="{FF2B5EF4-FFF2-40B4-BE49-F238E27FC236}">
-                <a16:creationId xmlns:a16="http://schemas.microsoft.com/office/drawing/2014/main" id="{E331BF4E-C971-46DE-7500-2FC1AB672787}"/>
-              </a:ext>
-            </a:extLst>
-          </p:cNvPr>
-          <p:cNvSpPr/>
-          <p:nvPr userDrawn="1"/>
-        </p:nvSpPr>
-        <p:spPr>
-          <a:xfrm>
-            <a:off x="350378" y="384561"/>
-            <a:ext cx="1521151" cy="418744"/>
-          </a:xfrm>
-          <a:prstGeom prst="roundRect">
-            <a:avLst/>
-          </a:prstGeom>
-          <a:solidFill>
-            <a:srgbClr val="C00000"/>
-          </a:solidFill>
-        </p:spPr>
-        <p:style>
-          <a:lnRef idx="2">
-            <a:schemeClr val="accent1">
-              <a:shade val="15000"/>
-            </a:schemeClr>
-          </a:lnRef>
-          <a:fillRef idx="1">
-            <a:schemeClr val="accent1"/>
-          </a:fillRef>
-          <a:effectRef idx="0">
-            <a:schemeClr val="accent1"/>
-          </a:effectRef>
-          <a:fontRef idx="minor">
-            <a:schemeClr val="lt1"/>
-          </a:fontRef>
-        </p:style>
-        <p:txBody>
-          <a:bodyPr rtlCol="0" anchor="ctr"/>
-          <a:lstStyle/>
-          <a:p>
-            <a:pPr algn="ctr"/>
-            <a:endParaRPr lang="en-US"/>
-          </a:p>
-        </p:txBody>
-      </p:sp>
-      <p:sp>
-        <p:nvSpPr>
-          <p:cNvPr id="5" name="duration">
-            <a:extLst>
-              <a:ext uri="{FF2B5EF4-FFF2-40B4-BE49-F238E27FC236}">
-                <a16:creationId xmlns:a16="http://schemas.microsoft.com/office/drawing/2014/main" id="{BE7FFFED-B39C-9159-1ADD-632D548A0F73}"/>
-              </a:ext>
-            </a:extLst>
-          </p:cNvPr>
-          <p:cNvSpPr>
-            <a:spLocks noGrp="1"/>
-          </p:cNvSpPr>
-          <p:nvPr>
-            <p:ph type="body" sz="quarter" idx="10" hasCustomPrompt="1"/>
-          </p:nvPr>
-        </p:nvSpPr>
-        <p:spPr>
-          <a:xfrm>
-            <a:off x="409096" y="460843"/>
-            <a:ext cx="1403713" cy="273080"/>
-          </a:xfrm>
-        </p:spPr>
-        <p:txBody>
-          <a:bodyPr/>
-          <a:lstStyle>
-            <a:lvl1pPr algn="ctr">
-              <a:buNone/>
-              <a:defRPr sz="1200"/>
-            </a:lvl1pPr>
-          </a:lstStyle>
-          <a:p>
-            <a:pPr lvl="0"/>
-            <a:r>
-              <a:rPr lang="en-CN" dirty="0"/>
-              <a:t>Duration</a:t>
-            </a:r>
-          </a:p>
-        </p:txBody>
-      </p:sp>
-      <p:sp>
-        <p:nvSpPr>
-          <p:cNvPr id="14" name="Picture Placeholder 13">
-            <a:extLst>
-              <a:ext uri="{FF2B5EF4-FFF2-40B4-BE49-F238E27FC236}">
-                <a16:creationId xmlns:a16="http://schemas.microsoft.com/office/drawing/2014/main" id="{6166F0DC-87E3-F8EE-EAF9-16720CDDF6C1}"/>
-              </a:ext>
-            </a:extLst>
-          </p:cNvPr>
-          <p:cNvSpPr>
-            <a:spLocks noGrp="1"/>
-          </p:cNvSpPr>
-          <p:nvPr>
-            <p:ph type="pic" sz="quarter" idx="11"/>
-          </p:nvPr>
-        </p:nvSpPr>
-        <p:spPr>
-          <a:xfrm>
-            <a:off x="1014275" y="2216426"/>
-            <a:ext cx="2295455" cy="2284870"/>
-          </a:xfrm>
-          <a:prstGeom prst="ellipse">
-            <a:avLst/>
-          </a:prstGeom>
-          <a:solidFill>
-            <a:schemeClr val="tx1"/>
-          </a:solidFill>
-          <a:ln w="57150">
-            <a:solidFill>
-              <a:srgbClr val="C00000"/>
-            </a:solidFill>
-          </a:ln>
-        </p:spPr>
-        <p:txBody>
-          <a:bodyPr/>
-          <a:lstStyle/>
-          <a:p>
-            <a:endParaRPr lang="en-CN"/>
+            <a:fld id="{B15CCACC-6213-F14B-B40D-407BFF938B14}" type="slidenum">
+              <a:rPr lang="en-US" smtClean="0"/>
+            </a:fld>
+            <a:endParaRPr lang="en-US" dirty="0"/>
           </a:p>
         </p:txBody>
       </p:sp>
     </p:spTree>
-    <p:extLst>
-      <p:ext uri="{BB962C8B-B14F-4D97-AF65-F5344CB8AC3E}">
-        <p14:creationId xmlns:p14="http://schemas.microsoft.com/office/powerpoint/2010/main" val="2555325022"/>
-      </p:ext>
-    </p:extLst>
   </p:cSld>
   <p:clrMapOvr>
     <a:masterClrMapping/>
@@ -4411,9 +3700,9 @@
 </p:sldLayout>
 </file>
 
-<file path=ppt/slideLayouts/slideLayout20.xml><?xml version="1.0" encoding="utf-8"?>
-<p:sldLayout xmlns:a="http://schemas.openxmlformats.org/drawingml/2006/main" xmlns:r="http://schemas.openxmlformats.org/officeDocument/2006/relationships" xmlns:p="http://schemas.openxmlformats.org/presentationml/2006/main" showMasterSp="0" type="blank" preserve="1">
-  <p:cSld name="1_Blank">
+<file path=ppt/slideLayouts/slideLayout2.xml><?xml version="1.0" encoding="utf-8"?>
+<p:sldLayout xmlns:a="http://schemas.openxmlformats.org/drawingml/2006/main" xmlns:r="http://schemas.openxmlformats.org/officeDocument/2006/relationships" xmlns:p="http://schemas.openxmlformats.org/presentationml/2006/main" preserve="1" showMasterSp="0" userDrawn="1">
+  <p:cSld name="Role Taker Slide">
     <p:spTree>
       <p:nvGrpSpPr>
         <p:cNvPr id="1" name=""/>
@@ -4430,19 +3719,13 @@
       </p:grpSpPr>
       <p:sp>
         <p:nvSpPr>
-          <p:cNvPr id="11" name="Rectangle 10">
-            <a:extLst>
-              <a:ext uri="{FF2B5EF4-FFF2-40B4-BE49-F238E27FC236}">
-                <a16:creationId xmlns:a16="http://schemas.microsoft.com/office/drawing/2014/main" id="{0647D00C-4F35-FA44-AE6D-560B94E5574F}"/>
-              </a:ext>
-            </a:extLst>
-          </p:cNvPr>
+          <p:cNvPr id="11" name="Rectangle 10"/>
           <p:cNvSpPr/>
           <p:nvPr userDrawn="1"/>
         </p:nvSpPr>
         <p:spPr>
           <a:xfrm rot="10800000">
-            <a:off x="0" y="0"/>
+            <a:off x="0" y="27698"/>
             <a:ext cx="12192000" cy="6858000"/>
           </a:xfrm>
           <a:prstGeom prst="rect">
@@ -4494,13 +3777,7 @@
       </p:sp>
       <p:sp>
         <p:nvSpPr>
-          <p:cNvPr id="5" name="Rectangle 4">
-            <a:extLst>
-              <a:ext uri="{FF2B5EF4-FFF2-40B4-BE49-F238E27FC236}">
-                <a16:creationId xmlns:a16="http://schemas.microsoft.com/office/drawing/2014/main" id="{452A27FD-DCD3-3544-B54F-6CE33927D8BA}"/>
-              </a:ext>
-            </a:extLst>
-          </p:cNvPr>
+          <p:cNvPr id="8" name="Rectangle 7"/>
           <p:cNvSpPr/>
           <p:nvPr userDrawn="1"/>
         </p:nvSpPr>
@@ -4546,26 +3823,14 @@
       </p:sp>
       <p:pic>
         <p:nvPicPr>
-          <p:cNvPr id="10" name="Picture 9">
-            <a:extLst>
-              <a:ext uri="{FF2B5EF4-FFF2-40B4-BE49-F238E27FC236}">
-                <a16:creationId xmlns:a16="http://schemas.microsoft.com/office/drawing/2014/main" id="{73E94052-9097-0040-96BB-ABD151D68A18}"/>
-              </a:ext>
-            </a:extLst>
-          </p:cNvPr>
+          <p:cNvPr id="10" name="Picture 9"/>
           <p:cNvPicPr>
             <a:picLocks noChangeAspect="1"/>
           </p:cNvPicPr>
           <p:nvPr userDrawn="1"/>
         </p:nvPicPr>
         <p:blipFill>
-          <a:blip r:embed="rId2" cstate="screen">
-            <a:extLst>
-              <a:ext uri="{28A0092B-C50C-407E-A947-70E740481C1C}">
-                <a14:useLocalDpi xmlns:a14="http://schemas.microsoft.com/office/drawing/2010/main"/>
-              </a:ext>
-            </a:extLst>
-          </a:blip>
+          <a:blip r:embed="rId2" cstate="screen"/>
           <a:stretch>
             <a:fillRect/>
           </a:stretch>
@@ -4582,56 +3847,228 @@
       </p:pic>
       <p:sp>
         <p:nvSpPr>
-          <p:cNvPr id="7" name="Slide Number Placeholder 14">
-            <a:extLst>
-              <a:ext uri="{FF2B5EF4-FFF2-40B4-BE49-F238E27FC236}">
-                <a16:creationId xmlns:a16="http://schemas.microsoft.com/office/drawing/2014/main" id="{A72D2038-C774-8A44-AC4D-D48CC95AF000}"/>
-              </a:ext>
-            </a:extLst>
-          </p:cNvPr>
+          <p:cNvPr id="12" name="title"/>
           <p:cNvSpPr>
             <a:spLocks noGrp="1"/>
           </p:cNvSpPr>
           <p:nvPr>
-            <p:ph type="sldNum" sz="quarter" idx="4"/>
-          </p:nvPr>
-        </p:nvSpPr>
-        <p:spPr>
-          <a:xfrm>
-            <a:off x="9067800" y="6356350"/>
-            <a:ext cx="2743200" cy="365125"/>
-          </a:xfrm>
-          <a:prstGeom prst="rect">
-            <a:avLst/>
-          </a:prstGeom>
-        </p:spPr>
-        <p:txBody>
-          <a:bodyPr vert="horz" lIns="91440" tIns="45720" rIns="91440" bIns="45720" rtlCol="0" anchor="ctr"/>
+            <p:ph type="ctrTitle" hasCustomPrompt="1"/>
+          </p:nvPr>
+        </p:nvSpPr>
+        <p:spPr>
+          <a:xfrm>
+            <a:off x="4229100" y="2359916"/>
+            <a:ext cx="6438900" cy="731520"/>
+          </a:xfrm>
+          <a:prstGeom prst="rect">
+            <a:avLst/>
+          </a:prstGeom>
+        </p:spPr>
+        <p:txBody>
+          <a:bodyPr anchor="b">
+            <a:noAutofit/>
+          </a:bodyPr>
           <a:lstStyle>
-            <a:lvl1pPr algn="r">
-              <a:defRPr sz="1800" b="1">
+            <a:lvl1pPr algn="ctr">
+              <a:defRPr sz="4000">
                 <a:solidFill>
-                  <a:schemeClr val="bg1"/>
+                  <a:srgbClr val="F2DF74"/>
                 </a:solidFill>
               </a:defRPr>
             </a:lvl1pPr>
           </a:lstStyle>
           <a:p>
-            <a:fld id="{B15CCACC-6213-F14B-B40D-407BFF938B14}" type="slidenum">
-              <a:rPr lang="en-US" smtClean="0"/>
-              <a:pPr/>
-              <a:t>‹#›</a:t>
-            </a:fld>
+            <a:r>
+              <a:rPr lang="en-US" dirty="0"/>
+              <a:t>Click to edit Section title</a:t>
+            </a:r>
             <a:endParaRPr lang="en-US" dirty="0"/>
           </a:p>
         </p:txBody>
       </p:sp>
+      <p:sp>
+        <p:nvSpPr>
+          <p:cNvPr id="13" name="subtitle"/>
+          <p:cNvSpPr>
+            <a:spLocks noGrp="1"/>
+          </p:cNvSpPr>
+          <p:nvPr>
+            <p:ph type="subTitle" idx="1" hasCustomPrompt="1"/>
+          </p:nvPr>
+        </p:nvSpPr>
+        <p:spPr>
+          <a:xfrm>
+            <a:off x="4229100" y="3358503"/>
+            <a:ext cx="6438900" cy="914400"/>
+          </a:xfrm>
+          <a:prstGeom prst="rect">
+            <a:avLst/>
+          </a:prstGeom>
+        </p:spPr>
+        <p:txBody>
+          <a:bodyPr>
+            <a:normAutofit/>
+          </a:bodyPr>
+          <a:lstStyle>
+            <a:lvl1pPr marL="0" indent="0" algn="ctr">
+              <a:buNone/>
+              <a:defRPr sz="2800"/>
+            </a:lvl1pPr>
+            <a:lvl2pPr marL="457200" indent="0" algn="ctr">
+              <a:buNone/>
+              <a:defRPr sz="2000"/>
+            </a:lvl2pPr>
+            <a:lvl3pPr marL="914400" indent="0" algn="ctr">
+              <a:buNone/>
+              <a:defRPr sz="1800"/>
+            </a:lvl3pPr>
+            <a:lvl4pPr marL="1371600" indent="0" algn="ctr">
+              <a:buNone/>
+              <a:defRPr sz="1600"/>
+            </a:lvl4pPr>
+            <a:lvl5pPr marL="1828800" indent="0" algn="ctr">
+              <a:buNone/>
+              <a:defRPr sz="1600"/>
+            </a:lvl5pPr>
+            <a:lvl6pPr marL="2286000" indent="0" algn="ctr">
+              <a:buNone/>
+              <a:defRPr sz="1600"/>
+            </a:lvl6pPr>
+            <a:lvl7pPr marL="2743200" indent="0" algn="ctr">
+              <a:buNone/>
+              <a:defRPr sz="1600"/>
+            </a:lvl7pPr>
+            <a:lvl8pPr marL="3200400" indent="0" algn="ctr">
+              <a:buNone/>
+              <a:defRPr sz="1600"/>
+            </a:lvl8pPr>
+            <a:lvl9pPr marL="3657600" indent="0" algn="ctr">
+              <a:buNone/>
+              <a:defRPr sz="1600"/>
+            </a:lvl9pPr>
+          </a:lstStyle>
+          <a:p>
+            <a:r>
+              <a:rPr lang="en-US" dirty="0"/>
+              <a:t>Click to edit Section subtitle</a:t>
+            </a:r>
+            <a:endParaRPr lang="en-US" dirty="0"/>
+          </a:p>
+        </p:txBody>
+      </p:sp>
+      <p:sp>
+        <p:nvSpPr>
+          <p:cNvPr id="3" name="duration_background"/>
+          <p:cNvSpPr/>
+          <p:nvPr userDrawn="1"/>
+        </p:nvSpPr>
+        <p:spPr>
+          <a:xfrm>
+            <a:off x="350378" y="384561"/>
+            <a:ext cx="1521151" cy="418744"/>
+          </a:xfrm>
+          <a:prstGeom prst="roundRect">
+            <a:avLst/>
+          </a:prstGeom>
+          <a:solidFill>
+            <a:srgbClr val="C00000"/>
+          </a:solidFill>
+        </p:spPr>
+        <p:style>
+          <a:lnRef idx="2">
+            <a:schemeClr val="accent1">
+              <a:shade val="15000"/>
+            </a:schemeClr>
+          </a:lnRef>
+          <a:fillRef idx="1">
+            <a:schemeClr val="accent1"/>
+          </a:fillRef>
+          <a:effectRef idx="0">
+            <a:schemeClr val="accent1"/>
+          </a:effectRef>
+          <a:fontRef idx="minor">
+            <a:schemeClr val="lt1"/>
+          </a:fontRef>
+        </p:style>
+        <p:txBody>
+          <a:bodyPr rtlCol="0" anchor="ctr"/>
+          <a:lstStyle/>
+          <a:p>
+            <a:pPr algn="ctr"/>
+            <a:endParaRPr lang="en-US"/>
+          </a:p>
+        </p:txBody>
+      </p:sp>
+      <p:sp>
+        <p:nvSpPr>
+          <p:cNvPr id="5" name="duration"/>
+          <p:cNvSpPr>
+            <a:spLocks noGrp="1"/>
+          </p:cNvSpPr>
+          <p:nvPr>
+            <p:ph type="body" sz="quarter" idx="10" hasCustomPrompt="1"/>
+          </p:nvPr>
+        </p:nvSpPr>
+        <p:spPr>
+          <a:xfrm>
+            <a:off x="409096" y="460843"/>
+            <a:ext cx="1403713" cy="273080"/>
+          </a:xfrm>
+        </p:spPr>
+        <p:txBody>
+          <a:bodyPr/>
+          <a:lstStyle>
+            <a:lvl1pPr algn="ctr">
+              <a:buNone/>
+              <a:defRPr sz="1200"/>
+            </a:lvl1pPr>
+          </a:lstStyle>
+          <a:p>
+            <a:pPr lvl="0"/>
+            <a:r>
+              <a:rPr lang="en-US" dirty="0"/>
+              <a:t>Duration</a:t>
+            </a:r>
+            <a:endParaRPr lang="en-US" dirty="0"/>
+          </a:p>
+        </p:txBody>
+      </p:sp>
+      <p:sp>
+        <p:nvSpPr>
+          <p:cNvPr id="14" name="Picture Placeholder 13"/>
+          <p:cNvSpPr>
+            <a:spLocks noGrp="1"/>
+          </p:cNvSpPr>
+          <p:nvPr>
+            <p:ph type="pic" sz="quarter" idx="11"/>
+          </p:nvPr>
+        </p:nvSpPr>
+        <p:spPr>
+          <a:xfrm>
+            <a:off x="1014275" y="2216426"/>
+            <a:ext cx="2295455" cy="2284870"/>
+          </a:xfrm>
+          <a:prstGeom prst="ellipse">
+            <a:avLst/>
+          </a:prstGeom>
+          <a:solidFill>
+            <a:schemeClr val="tx1"/>
+          </a:solidFill>
+          <a:ln w="57150">
+            <a:solidFill>
+              <a:srgbClr val="C00000"/>
+            </a:solidFill>
+          </a:ln>
+        </p:spPr>
+        <p:txBody>
+          <a:bodyPr/>
+          <a:lstStyle/>
+          <a:p>
+            <a:endParaRPr lang="en-US"/>
+          </a:p>
+        </p:txBody>
+      </p:sp>
     </p:spTree>
-    <p:extLst>
-      <p:ext uri="{BB962C8B-B14F-4D97-AF65-F5344CB8AC3E}">
-        <p14:creationId xmlns:p14="http://schemas.microsoft.com/office/powerpoint/2010/main" val="3112823732"/>
-      </p:ext>
-    </p:extLst>
   </p:cSld>
   <p:clrMapOvr>
     <a:masterClrMapping/>
@@ -4639,7 +4076,7 @@
 </p:sldLayout>
 </file>
 
-<file path=ppt/slideLayouts/slideLayout21.xml><?xml version="1.0" encoding="utf-8"?>
+<file path=ppt/slideLayouts/slideLayout20.xml><?xml version="1.0" encoding="utf-8"?>
 <p:sldLayout xmlns:a="http://schemas.openxmlformats.org/drawingml/2006/main" xmlns:r="http://schemas.openxmlformats.org/officeDocument/2006/relationships" xmlns:p="http://schemas.openxmlformats.org/presentationml/2006/main" preserve="1" userDrawn="1">
   <p:cSld name="Title and Text Left_Content Right">
     <p:spTree>
@@ -4658,18 +4095,12 @@
       </p:grpSpPr>
       <p:sp>
         <p:nvSpPr>
-          <p:cNvPr id="2" name="Title 1">
-            <a:extLst>
-              <a:ext uri="{FF2B5EF4-FFF2-40B4-BE49-F238E27FC236}">
-                <a16:creationId xmlns:a16="http://schemas.microsoft.com/office/drawing/2014/main" id="{4F9AD8F0-BA9C-2D49-BEF0-F0A72CC2C305}"/>
-              </a:ext>
-            </a:extLst>
-          </p:cNvPr>
+          <p:cNvPr id="2" name="Title 1"/>
           <p:cNvSpPr>
             <a:spLocks noGrp="1"/>
           </p:cNvSpPr>
           <p:nvPr>
-            <p:ph type="title"/>
+            <p:ph type="title" hasCustomPrompt="1"/>
           </p:nvPr>
         </p:nvSpPr>
         <p:spPr>
@@ -4695,18 +4126,13 @@
               <a:rPr lang="en-US" dirty="0"/>
               <a:t>Click to edit Master title</a:t>
             </a:r>
-          </a:p>
-        </p:txBody>
-      </p:sp>
-      <p:sp>
-        <p:nvSpPr>
-          <p:cNvPr id="4" name="Text Placeholder 3">
-            <a:extLst>
-              <a:ext uri="{FF2B5EF4-FFF2-40B4-BE49-F238E27FC236}">
-                <a16:creationId xmlns:a16="http://schemas.microsoft.com/office/drawing/2014/main" id="{AB2026E2-9833-424F-8180-005EEF86E250}"/>
-              </a:ext>
-            </a:extLst>
-          </p:cNvPr>
+            <a:endParaRPr lang="en-US" dirty="0"/>
+          </a:p>
+        </p:txBody>
+      </p:sp>
+      <p:sp>
+        <p:nvSpPr>
+          <p:cNvPr id="4" name="Text Placeholder 3"/>
           <p:cNvSpPr>
             <a:spLocks noGrp="1"/>
           </p:cNvSpPr>
@@ -4771,18 +4197,13 @@
               <a:rPr lang="en-US" dirty="0"/>
               <a:t>Click to edit Master text styles</a:t>
             </a:r>
-          </a:p>
-        </p:txBody>
-      </p:sp>
-      <p:sp>
-        <p:nvSpPr>
-          <p:cNvPr id="8" name="Slide Number Placeholder 7">
-            <a:extLst>
-              <a:ext uri="{FF2B5EF4-FFF2-40B4-BE49-F238E27FC236}">
-                <a16:creationId xmlns:a16="http://schemas.microsoft.com/office/drawing/2014/main" id="{DBD07C98-DEB2-9043-B3B7-E156746DEEA1}"/>
-              </a:ext>
-            </a:extLst>
-          </p:cNvPr>
+            <a:endParaRPr lang="en-US" dirty="0"/>
+          </a:p>
+        </p:txBody>
+      </p:sp>
+      <p:sp>
+        <p:nvSpPr>
+          <p:cNvPr id="8" name="Slide Number Placeholder 7"/>
           <p:cNvSpPr>
             <a:spLocks noGrp="1"/>
           </p:cNvSpPr>
@@ -4797,7 +4218,6 @@
           <a:p>
             <a:fld id="{B15CCACC-6213-F14B-B40D-407BFF938B14}" type="slidenum">
               <a:rPr lang="en-US" smtClean="0"/>
-              <a:t>‹#›</a:t>
             </a:fld>
             <a:endParaRPr lang="en-US"/>
           </a:p>
@@ -4805,13 +4225,7 @@
       </p:sp>
       <p:sp>
         <p:nvSpPr>
-          <p:cNvPr id="6" name="Picture Placeholder 4">
-            <a:extLst>
-              <a:ext uri="{FF2B5EF4-FFF2-40B4-BE49-F238E27FC236}">
-                <a16:creationId xmlns:a16="http://schemas.microsoft.com/office/drawing/2014/main" id="{73AA123F-7D5D-5743-842F-4FD61F2A7E5E}"/>
-              </a:ext>
-            </a:extLst>
-          </p:cNvPr>
+          <p:cNvPr id="6" name="Picture Placeholder 4"/>
           <p:cNvSpPr>
             <a:spLocks noGrp="1"/>
           </p:cNvSpPr>
@@ -4838,15 +4252,11 @@
               <a:rPr lang="en-US" dirty="0"/>
               <a:t>Click to Add Photo</a:t>
             </a:r>
+            <a:endParaRPr lang="en-US" dirty="0"/>
           </a:p>
         </p:txBody>
       </p:sp>
     </p:spTree>
-    <p:extLst>
-      <p:ext uri="{BB962C8B-B14F-4D97-AF65-F5344CB8AC3E}">
-        <p14:creationId xmlns:p14="http://schemas.microsoft.com/office/powerpoint/2010/main" val="936227731"/>
-      </p:ext>
-    </p:extLst>
   </p:cSld>
   <p:clrMapOvr>
     <a:masterClrMapping/>
@@ -4854,8 +4264,8 @@
 </p:sldLayout>
 </file>
 
-<file path=ppt/slideLayouts/slideLayout22.xml><?xml version="1.0" encoding="utf-8"?>
-<p:sldLayout xmlns:a="http://schemas.openxmlformats.org/drawingml/2006/main" xmlns:r="http://schemas.openxmlformats.org/officeDocument/2006/relationships" xmlns:p="http://schemas.openxmlformats.org/presentationml/2006/main" showMasterSp="0" preserve="1" userDrawn="1">
+<file path=ppt/slideLayouts/slideLayout21.xml><?xml version="1.0" encoding="utf-8"?>
+<p:sldLayout xmlns:a="http://schemas.openxmlformats.org/drawingml/2006/main" xmlns:r="http://schemas.openxmlformats.org/officeDocument/2006/relationships" xmlns:p="http://schemas.openxmlformats.org/presentationml/2006/main" preserve="1" showMasterSp="0" userDrawn="1">
   <p:cSld name="Title and Text Left Multiple_Content Right">
     <p:spTree>
       <p:nvGrpSpPr>
@@ -4873,13 +4283,7 @@
       </p:grpSpPr>
       <p:sp>
         <p:nvSpPr>
-          <p:cNvPr id="16" name="Rectangle 15">
-            <a:extLst>
-              <a:ext uri="{FF2B5EF4-FFF2-40B4-BE49-F238E27FC236}">
-                <a16:creationId xmlns:a16="http://schemas.microsoft.com/office/drawing/2014/main" id="{97CE9458-0EE3-A344-A0D4-7BB7BD029951}"/>
-              </a:ext>
-            </a:extLst>
-          </p:cNvPr>
+          <p:cNvPr id="16" name="Rectangle 15"/>
           <p:cNvSpPr/>
           <p:nvPr userDrawn="1"/>
         </p:nvSpPr>
@@ -4937,13 +4341,7 @@
       </p:sp>
       <p:sp>
         <p:nvSpPr>
-          <p:cNvPr id="2" name="Title 1">
-            <a:extLst>
-              <a:ext uri="{FF2B5EF4-FFF2-40B4-BE49-F238E27FC236}">
-                <a16:creationId xmlns:a16="http://schemas.microsoft.com/office/drawing/2014/main" id="{4F9AD8F0-BA9C-2D49-BEF0-F0A72CC2C305}"/>
-              </a:ext>
-            </a:extLst>
-          </p:cNvPr>
+          <p:cNvPr id="2" name="Title 1"/>
           <p:cNvSpPr>
             <a:spLocks noGrp="1"/>
           </p:cNvSpPr>
@@ -4978,18 +4376,13 @@
               <a:rPr lang="en-US" dirty="0"/>
               <a:t>Click to edit Master title multiple lines</a:t>
             </a:r>
-          </a:p>
-        </p:txBody>
-      </p:sp>
-      <p:sp>
-        <p:nvSpPr>
-          <p:cNvPr id="4" name="Text Placeholder 3">
-            <a:extLst>
-              <a:ext uri="{FF2B5EF4-FFF2-40B4-BE49-F238E27FC236}">
-                <a16:creationId xmlns:a16="http://schemas.microsoft.com/office/drawing/2014/main" id="{AB2026E2-9833-424F-8180-005EEF86E250}"/>
-              </a:ext>
-            </a:extLst>
-          </p:cNvPr>
+            <a:endParaRPr lang="en-US" dirty="0"/>
+          </a:p>
+        </p:txBody>
+      </p:sp>
+      <p:sp>
+        <p:nvSpPr>
+          <p:cNvPr id="4" name="Text Placeholder 3"/>
           <p:cNvSpPr>
             <a:spLocks noGrp="1"/>
           </p:cNvSpPr>
@@ -5054,18 +4447,13 @@
               <a:rPr lang="en-US" dirty="0"/>
               <a:t>Click to edit Master text styles</a:t>
             </a:r>
+            <a:endParaRPr lang="en-US" dirty="0"/>
           </a:p>
         </p:txBody>
       </p:sp>
       <p:cxnSp>
         <p:nvCxnSpPr>
-          <p:cNvPr id="14" name="Straight Connector 13">
-            <a:extLst>
-              <a:ext uri="{FF2B5EF4-FFF2-40B4-BE49-F238E27FC236}">
-                <a16:creationId xmlns:a16="http://schemas.microsoft.com/office/drawing/2014/main" id="{8AD59A93-E94D-0445-9D55-67EBAACB4771}"/>
-              </a:ext>
-            </a:extLst>
-          </p:cNvPr>
+          <p:cNvPr id="14" name="Straight Connector 13"/>
           <p:cNvCxnSpPr/>
           <p:nvPr userDrawn="1"/>
         </p:nvCxnSpPr>
@@ -5100,13 +4488,7 @@
       </p:cxnSp>
       <p:sp>
         <p:nvSpPr>
-          <p:cNvPr id="9" name="Rectangle 8">
-            <a:extLst>
-              <a:ext uri="{FF2B5EF4-FFF2-40B4-BE49-F238E27FC236}">
-                <a16:creationId xmlns:a16="http://schemas.microsoft.com/office/drawing/2014/main" id="{425C8691-7E6F-6449-8F4B-64C12952E9C9}"/>
-              </a:ext>
-            </a:extLst>
-          </p:cNvPr>
+          <p:cNvPr id="9" name="Rectangle 8"/>
           <p:cNvSpPr/>
           <p:nvPr userDrawn="1"/>
         </p:nvSpPr>
@@ -5152,26 +4534,14 @@
       </p:sp>
       <p:pic>
         <p:nvPicPr>
-          <p:cNvPr id="15" name="Picture 14">
-            <a:extLst>
-              <a:ext uri="{FF2B5EF4-FFF2-40B4-BE49-F238E27FC236}">
-                <a16:creationId xmlns:a16="http://schemas.microsoft.com/office/drawing/2014/main" id="{F6293283-D734-4F44-B3FC-723952F7D431}"/>
-              </a:ext>
-            </a:extLst>
-          </p:cNvPr>
+          <p:cNvPr id="15" name="Picture 14"/>
           <p:cNvPicPr>
             <a:picLocks noChangeAspect="1"/>
           </p:cNvPicPr>
           <p:nvPr userDrawn="1"/>
         </p:nvPicPr>
         <p:blipFill>
-          <a:blip r:embed="rId2" cstate="screen">
-            <a:extLst>
-              <a:ext uri="{28A0092B-C50C-407E-A947-70E740481C1C}">
-                <a14:useLocalDpi xmlns:a14="http://schemas.microsoft.com/office/drawing/2010/main"/>
-              </a:ext>
-            </a:extLst>
-          </a:blip>
+          <a:blip r:embed="rId2" cstate="screen"/>
           <a:stretch>
             <a:fillRect/>
           </a:stretch>
@@ -5188,13 +4558,7 @@
       </p:pic>
       <p:sp>
         <p:nvSpPr>
-          <p:cNvPr id="10" name="Picture Placeholder 4">
-            <a:extLst>
-              <a:ext uri="{FF2B5EF4-FFF2-40B4-BE49-F238E27FC236}">
-                <a16:creationId xmlns:a16="http://schemas.microsoft.com/office/drawing/2014/main" id="{EE5ACE5E-8C71-F84C-84A2-7ADD0A4CE855}"/>
-              </a:ext>
-            </a:extLst>
-          </p:cNvPr>
+          <p:cNvPr id="10" name="Picture Placeholder 4"/>
           <p:cNvSpPr>
             <a:spLocks noGrp="1"/>
           </p:cNvSpPr>
@@ -5221,18 +4585,13 @@
               <a:rPr lang="en-US" dirty="0"/>
               <a:t>Click to Add Photo</a:t>
             </a:r>
-          </a:p>
-        </p:txBody>
-      </p:sp>
-      <p:sp>
-        <p:nvSpPr>
-          <p:cNvPr id="11" name="Slide Number Placeholder 14">
-            <a:extLst>
-              <a:ext uri="{FF2B5EF4-FFF2-40B4-BE49-F238E27FC236}">
-                <a16:creationId xmlns:a16="http://schemas.microsoft.com/office/drawing/2014/main" id="{E7FF26C3-0AD4-B845-8559-0DB441415829}"/>
-              </a:ext>
-            </a:extLst>
-          </p:cNvPr>
+            <a:endParaRPr lang="en-US" dirty="0"/>
+          </a:p>
+        </p:txBody>
+      </p:sp>
+      <p:sp>
+        <p:nvSpPr>
+          <p:cNvPr id="11" name="Slide Number Placeholder 14"/>
           <p:cNvSpPr>
             <a:spLocks noGrp="1"/>
           </p:cNvSpPr>
@@ -5263,19 +4622,12 @@
           <a:p>
             <a:fld id="{B15CCACC-6213-F14B-B40D-407BFF938B14}" type="slidenum">
               <a:rPr lang="en-US" smtClean="0"/>
-              <a:pPr/>
-              <a:t>‹#›</a:t>
             </a:fld>
             <a:endParaRPr lang="en-US" dirty="0"/>
           </a:p>
         </p:txBody>
       </p:sp>
     </p:spTree>
-    <p:extLst>
-      <p:ext uri="{BB962C8B-B14F-4D97-AF65-F5344CB8AC3E}">
-        <p14:creationId xmlns:p14="http://schemas.microsoft.com/office/powerpoint/2010/main" val="3589431441"/>
-      </p:ext>
-    </p:extLst>
   </p:cSld>
   <p:clrMapOvr>
     <a:masterClrMapping/>
@@ -5283,7 +4635,7 @@
 </p:sldLayout>
 </file>
 
-<file path=ppt/slideLayouts/slideLayout23.xml><?xml version="1.0" encoding="utf-8"?>
+<file path=ppt/slideLayouts/slideLayout22.xml><?xml version="1.0" encoding="utf-8"?>
 <p:sldLayout xmlns:a="http://schemas.openxmlformats.org/drawingml/2006/main" xmlns:r="http://schemas.openxmlformats.org/officeDocument/2006/relationships" xmlns:p="http://schemas.openxmlformats.org/presentationml/2006/main" preserve="1" userDrawn="1">
   <p:cSld name="Title and Large Image">
     <p:spTree>
@@ -5302,13 +4654,7 @@
       </p:grpSpPr>
       <p:sp>
         <p:nvSpPr>
-          <p:cNvPr id="5" name="Picture Placeholder 4">
-            <a:extLst>
-              <a:ext uri="{FF2B5EF4-FFF2-40B4-BE49-F238E27FC236}">
-                <a16:creationId xmlns:a16="http://schemas.microsoft.com/office/drawing/2014/main" id="{2A518CE1-0D5F-1C42-9A3E-10D40306BD89}"/>
-              </a:ext>
-            </a:extLst>
-          </p:cNvPr>
+          <p:cNvPr id="5" name="Picture Placeholder 4"/>
           <p:cNvSpPr>
             <a:spLocks noGrp="1"/>
           </p:cNvSpPr>
@@ -5326,7 +4672,7 @@
           <a:bodyPr anchor="ctr"/>
           <a:lstStyle>
             <a:lvl1pPr marL="0" indent="0" algn="ctr">
-              <a:buFont typeface="Arial" panose="020B0604020202020204" pitchFamily="34" charset="0"/>
+              <a:buFont typeface="Arial" panose="020B0604020202090204" pitchFamily="34" charset="0"/>
               <a:buNone/>
               <a:defRPr/>
             </a:lvl1pPr>
@@ -5336,18 +4682,13 @@
               <a:rPr lang="en-US" dirty="0"/>
               <a:t>Insert image</a:t>
             </a:r>
-          </a:p>
-        </p:txBody>
-      </p:sp>
-      <p:sp>
-        <p:nvSpPr>
-          <p:cNvPr id="7" name="Rectangle 6">
-            <a:extLst>
-              <a:ext uri="{FF2B5EF4-FFF2-40B4-BE49-F238E27FC236}">
-                <a16:creationId xmlns:a16="http://schemas.microsoft.com/office/drawing/2014/main" id="{F2F793A9-ACD0-8144-BA76-AC9911BA49FB}"/>
-              </a:ext>
-            </a:extLst>
-          </p:cNvPr>
+            <a:endParaRPr lang="en-US" dirty="0"/>
+          </a:p>
+        </p:txBody>
+      </p:sp>
+      <p:sp>
+        <p:nvSpPr>
+          <p:cNvPr id="7" name="Rectangle 6"/>
           <p:cNvSpPr/>
           <p:nvPr userDrawn="1"/>
         </p:nvSpPr>
@@ -5393,13 +4734,7 @@
       </p:sp>
       <p:sp>
         <p:nvSpPr>
-          <p:cNvPr id="3" name="Slide Number Placeholder 2">
-            <a:extLst>
-              <a:ext uri="{FF2B5EF4-FFF2-40B4-BE49-F238E27FC236}">
-                <a16:creationId xmlns:a16="http://schemas.microsoft.com/office/drawing/2014/main" id="{13E3B808-8450-C749-BE34-83F343354452}"/>
-              </a:ext>
-            </a:extLst>
-          </p:cNvPr>
+          <p:cNvPr id="3" name="Slide Number Placeholder 2"/>
           <p:cNvSpPr>
             <a:spLocks noGrp="1"/>
           </p:cNvSpPr>
@@ -5414,7 +4749,6 @@
           <a:p>
             <a:fld id="{B15CCACC-6213-F14B-B40D-407BFF938B14}" type="slidenum">
               <a:rPr lang="en-US" smtClean="0"/>
-              <a:t>‹#›</a:t>
             </a:fld>
             <a:endParaRPr lang="en-US"/>
           </a:p>
@@ -5422,18 +4756,12 @@
       </p:sp>
       <p:sp>
         <p:nvSpPr>
-          <p:cNvPr id="2" name="Title 1">
-            <a:extLst>
-              <a:ext uri="{FF2B5EF4-FFF2-40B4-BE49-F238E27FC236}">
-                <a16:creationId xmlns:a16="http://schemas.microsoft.com/office/drawing/2014/main" id="{6349CBB3-A058-9248-905D-0684034A4364}"/>
-              </a:ext>
-            </a:extLst>
-          </p:cNvPr>
+          <p:cNvPr id="2" name="Title 1"/>
           <p:cNvSpPr>
             <a:spLocks noGrp="1"/>
           </p:cNvSpPr>
           <p:nvPr>
-            <p:ph type="title"/>
+            <p:ph type="title" hasCustomPrompt="1"/>
           </p:nvPr>
         </p:nvSpPr>
         <p:spPr/>
@@ -5445,18 +4773,13 @@
               <a:rPr lang="en-US" dirty="0"/>
               <a:t>Click to edit Master title</a:t>
             </a:r>
+            <a:endParaRPr lang="en-US" dirty="0"/>
           </a:p>
         </p:txBody>
       </p:sp>
       <p:cxnSp>
         <p:nvCxnSpPr>
-          <p:cNvPr id="10" name="Straight Connector 9">
-            <a:extLst>
-              <a:ext uri="{FF2B5EF4-FFF2-40B4-BE49-F238E27FC236}">
-                <a16:creationId xmlns:a16="http://schemas.microsoft.com/office/drawing/2014/main" id="{EA1FA9E0-A75C-1C46-AB6F-6A5E7D665B54}"/>
-              </a:ext>
-            </a:extLst>
-          </p:cNvPr>
+          <p:cNvPr id="10" name="Straight Connector 9"/>
           <p:cNvCxnSpPr/>
           <p:nvPr userDrawn="1"/>
         </p:nvCxnSpPr>
@@ -5490,11 +4813,6 @@
         </p:style>
       </p:cxnSp>
     </p:spTree>
-    <p:extLst>
-      <p:ext uri="{BB962C8B-B14F-4D97-AF65-F5344CB8AC3E}">
-        <p14:creationId xmlns:p14="http://schemas.microsoft.com/office/powerpoint/2010/main" val="3899144581"/>
-      </p:ext>
-    </p:extLst>
   </p:cSld>
   <p:clrMapOvr>
     <a:masterClrMapping/>
@@ -5502,8 +4820,8 @@
 </p:sldLayout>
 </file>
 
-<file path=ppt/slideLayouts/slideLayout24.xml><?xml version="1.0" encoding="utf-8"?>
-<p:sldLayout xmlns:a="http://schemas.openxmlformats.org/drawingml/2006/main" xmlns:r="http://schemas.openxmlformats.org/officeDocument/2006/relationships" xmlns:p="http://schemas.openxmlformats.org/presentationml/2006/main" showMasterSp="0" preserve="1" userDrawn="1">
+<file path=ppt/slideLayouts/slideLayout23.xml><?xml version="1.0" encoding="utf-8"?>
+<p:sldLayout xmlns:a="http://schemas.openxmlformats.org/drawingml/2006/main" xmlns:r="http://schemas.openxmlformats.org/officeDocument/2006/relationships" xmlns:p="http://schemas.openxmlformats.org/presentationml/2006/main" preserve="1" showMasterSp="0" userDrawn="1">
   <p:cSld name="1_Custom Layout">
     <p:spTree>
       <p:nvGrpSpPr>
@@ -5521,13 +4839,7 @@
       </p:grpSpPr>
       <p:sp>
         <p:nvSpPr>
-          <p:cNvPr id="7" name="Rectangle 6">
-            <a:extLst>
-              <a:ext uri="{FF2B5EF4-FFF2-40B4-BE49-F238E27FC236}">
-                <a16:creationId xmlns:a16="http://schemas.microsoft.com/office/drawing/2014/main" id="{662C4270-C58C-C940-B0EF-3FBEAD7572B5}"/>
-              </a:ext>
-            </a:extLst>
-          </p:cNvPr>
+          <p:cNvPr id="7" name="Rectangle 6"/>
           <p:cNvSpPr/>
           <p:nvPr userDrawn="1"/>
         </p:nvSpPr>
@@ -5585,13 +4897,7 @@
       </p:sp>
       <p:cxnSp>
         <p:nvCxnSpPr>
-          <p:cNvPr id="9" name="Straight Connector 8">
-            <a:extLst>
-              <a:ext uri="{FF2B5EF4-FFF2-40B4-BE49-F238E27FC236}">
-                <a16:creationId xmlns:a16="http://schemas.microsoft.com/office/drawing/2014/main" id="{97AD48D7-EAA2-964B-A120-85C67653E646}"/>
-              </a:ext>
-            </a:extLst>
-          </p:cNvPr>
+          <p:cNvPr id="9" name="Straight Connector 8"/>
           <p:cNvCxnSpPr/>
           <p:nvPr userDrawn="1"/>
         </p:nvCxnSpPr>
@@ -5626,13 +4932,7 @@
       </p:cxnSp>
       <p:sp>
         <p:nvSpPr>
-          <p:cNvPr id="5" name="Picture Placeholder 4">
-            <a:extLst>
-              <a:ext uri="{FF2B5EF4-FFF2-40B4-BE49-F238E27FC236}">
-                <a16:creationId xmlns:a16="http://schemas.microsoft.com/office/drawing/2014/main" id="{2A518CE1-0D5F-1C42-9A3E-10D40306BD89}"/>
-              </a:ext>
-            </a:extLst>
-          </p:cNvPr>
+          <p:cNvPr id="5" name="Picture Placeholder 4"/>
           <p:cNvSpPr>
             <a:spLocks noGrp="1"/>
           </p:cNvSpPr>
@@ -5650,7 +4950,7 @@
           <a:bodyPr anchor="ctr"/>
           <a:lstStyle>
             <a:lvl1pPr marL="0" indent="0" algn="ctr">
-              <a:buFont typeface="Arial" panose="020B0604020202020204" pitchFamily="34" charset="0"/>
+              <a:buFont typeface="Arial" panose="020B0604020202090204" pitchFamily="34" charset="0"/>
               <a:buNone/>
               <a:defRPr/>
             </a:lvl1pPr>
@@ -5660,18 +4960,13 @@
               <a:rPr lang="en-US" dirty="0"/>
               <a:t>Insert image</a:t>
             </a:r>
-          </a:p>
-        </p:txBody>
-      </p:sp>
-      <p:sp>
-        <p:nvSpPr>
-          <p:cNvPr id="8" name="Rectangle 7">
-            <a:extLst>
-              <a:ext uri="{FF2B5EF4-FFF2-40B4-BE49-F238E27FC236}">
-                <a16:creationId xmlns:a16="http://schemas.microsoft.com/office/drawing/2014/main" id="{31632447-B762-F14C-9D91-BE4817800ADD}"/>
-              </a:ext>
-            </a:extLst>
-          </p:cNvPr>
+            <a:endParaRPr lang="en-US" dirty="0"/>
+          </a:p>
+        </p:txBody>
+      </p:sp>
+      <p:sp>
+        <p:nvSpPr>
+          <p:cNvPr id="8" name="Rectangle 7"/>
           <p:cNvSpPr/>
           <p:nvPr userDrawn="1"/>
         </p:nvSpPr>
@@ -5717,18 +5012,12 @@
       </p:sp>
       <p:sp>
         <p:nvSpPr>
-          <p:cNvPr id="2" name="Title 1">
-            <a:extLst>
-              <a:ext uri="{FF2B5EF4-FFF2-40B4-BE49-F238E27FC236}">
-                <a16:creationId xmlns:a16="http://schemas.microsoft.com/office/drawing/2014/main" id="{6349CBB3-A058-9248-905D-0684034A4364}"/>
-              </a:ext>
-            </a:extLst>
-          </p:cNvPr>
+          <p:cNvPr id="2" name="Title 1"/>
           <p:cNvSpPr>
             <a:spLocks noGrp="1"/>
           </p:cNvSpPr>
           <p:nvPr>
-            <p:ph type="title"/>
+            <p:ph type="title" hasCustomPrompt="1"/>
           </p:nvPr>
         </p:nvSpPr>
         <p:spPr/>
@@ -5740,18 +5029,13 @@
               <a:rPr lang="en-US" dirty="0"/>
               <a:t>Click to edit Master title</a:t>
             </a:r>
+            <a:endParaRPr lang="en-US" dirty="0"/>
           </a:p>
         </p:txBody>
       </p:sp>
       <p:cxnSp>
         <p:nvCxnSpPr>
-          <p:cNvPr id="6" name="Straight Connector 5">
-            <a:extLst>
-              <a:ext uri="{FF2B5EF4-FFF2-40B4-BE49-F238E27FC236}">
-                <a16:creationId xmlns:a16="http://schemas.microsoft.com/office/drawing/2014/main" id="{F3EF7B8B-DC7E-A14C-8B53-C948B4015EC6}"/>
-              </a:ext>
-            </a:extLst>
-          </p:cNvPr>
+          <p:cNvPr id="6" name="Straight Connector 5"/>
           <p:cNvCxnSpPr/>
           <p:nvPr userDrawn="1"/>
         </p:nvCxnSpPr>
@@ -5785,11 +5069,6 @@
         </p:style>
       </p:cxnSp>
     </p:spTree>
-    <p:extLst>
-      <p:ext uri="{BB962C8B-B14F-4D97-AF65-F5344CB8AC3E}">
-        <p14:creationId xmlns:p14="http://schemas.microsoft.com/office/powerpoint/2010/main" val="934452563"/>
-      </p:ext>
-    </p:extLst>
   </p:cSld>
   <p:clrMapOvr>
     <a:masterClrMapping/>
@@ -5797,8 +5076,8 @@
 </p:sldLayout>
 </file>
 
-<file path=ppt/slideLayouts/slideLayout25.xml><?xml version="1.0" encoding="utf-8"?>
-<p:sldLayout xmlns:a="http://schemas.openxmlformats.org/drawingml/2006/main" xmlns:r="http://schemas.openxmlformats.org/officeDocument/2006/relationships" xmlns:p="http://schemas.openxmlformats.org/presentationml/2006/main" showMasterSp="0" preserve="1" userDrawn="1">
+<file path=ppt/slideLayouts/slideLayout24.xml><?xml version="1.0" encoding="utf-8"?>
+<p:sldLayout xmlns:a="http://schemas.openxmlformats.org/drawingml/2006/main" xmlns:r="http://schemas.openxmlformats.org/officeDocument/2006/relationships" xmlns:p="http://schemas.openxmlformats.org/presentationml/2006/main" preserve="1" showMasterSp="0" userDrawn="1">
   <p:cSld name="1_Title Slide">
     <p:spTree>
       <p:nvGrpSpPr>
@@ -5816,13 +5095,7 @@
       </p:grpSpPr>
       <p:sp>
         <p:nvSpPr>
-          <p:cNvPr id="2" name="Title 1">
-            <a:extLst>
-              <a:ext uri="{FF2B5EF4-FFF2-40B4-BE49-F238E27FC236}">
-                <a16:creationId xmlns:a16="http://schemas.microsoft.com/office/drawing/2014/main" id="{F774E2BD-0C58-E64B-AB95-36840E71CE6C}"/>
-              </a:ext>
-            </a:extLst>
-          </p:cNvPr>
+          <p:cNvPr id="2" name="Title 1"/>
           <p:cNvSpPr>
             <a:spLocks noGrp="1"/>
           </p:cNvSpPr>
@@ -5859,13 +5132,7 @@
       </p:sp>
       <p:sp>
         <p:nvSpPr>
-          <p:cNvPr id="3" name="Subtitle 2">
-            <a:extLst>
-              <a:ext uri="{FF2B5EF4-FFF2-40B4-BE49-F238E27FC236}">
-                <a16:creationId xmlns:a16="http://schemas.microsoft.com/office/drawing/2014/main" id="{36E65A1A-B737-B943-8F8E-C68DC1ACD7AA}"/>
-              </a:ext>
-            </a:extLst>
-          </p:cNvPr>
+          <p:cNvPr id="3" name="Subtitle 2"/>
           <p:cNvSpPr>
             <a:spLocks noGrp="1"/>
           </p:cNvSpPr>
@@ -5933,13 +5200,7 @@
       </p:sp>
       <p:cxnSp>
         <p:nvCxnSpPr>
-          <p:cNvPr id="19" name="Straight Connector 18">
-            <a:extLst>
-              <a:ext uri="{FF2B5EF4-FFF2-40B4-BE49-F238E27FC236}">
-                <a16:creationId xmlns:a16="http://schemas.microsoft.com/office/drawing/2014/main" id="{0D89A3AF-4EDC-4043-804E-E87D504FBF6B}"/>
-              </a:ext>
-            </a:extLst>
-          </p:cNvPr>
+          <p:cNvPr id="19" name="Straight Connector 18"/>
           <p:cNvCxnSpPr/>
           <p:nvPr userDrawn="1"/>
         </p:nvCxnSpPr>
@@ -5974,13 +5235,7 @@
       </p:cxnSp>
       <p:pic>
         <p:nvPicPr>
-          <p:cNvPr id="23" name="Picture 22" descr="Toastmasters International">
-            <a:extLst>
-              <a:ext uri="{FF2B5EF4-FFF2-40B4-BE49-F238E27FC236}">
-                <a16:creationId xmlns:a16="http://schemas.microsoft.com/office/drawing/2014/main" id="{81373B61-26E6-9E41-B3D7-2240926DC383}"/>
-              </a:ext>
-            </a:extLst>
-          </p:cNvPr>
+          <p:cNvPr id="23" name="Picture 22" descr="Toastmasters International"/>
           <p:cNvPicPr>
             <a:picLocks noChangeAspect="1"/>
           </p:cNvPicPr>
@@ -6003,11 +5258,6 @@
         </p:spPr>
       </p:pic>
     </p:spTree>
-    <p:extLst>
-      <p:ext uri="{BB962C8B-B14F-4D97-AF65-F5344CB8AC3E}">
-        <p14:creationId xmlns:p14="http://schemas.microsoft.com/office/powerpoint/2010/main" val="1287038089"/>
-      </p:ext>
-    </p:extLst>
   </p:cSld>
   <p:clrMapOvr>
     <a:overrideClrMapping bg1="lt1" tx1="dk1" bg2="lt2" tx2="dk2" accent1="accent1" accent2="accent2" accent3="accent3" accent4="accent4" accent5="accent5" accent6="accent6" hlink="hlink" folHlink="folHlink"/>
@@ -6015,7 +5265,7 @@
 </p:sldLayout>
 </file>
 
-<file path=ppt/slideLayouts/slideLayout26.xml><?xml version="1.0" encoding="utf-8"?>
+<file path=ppt/slideLayouts/slideLayout25.xml><?xml version="1.0" encoding="utf-8"?>
 <p:sldLayout xmlns:a="http://schemas.openxmlformats.org/drawingml/2006/main" xmlns:r="http://schemas.openxmlformats.org/officeDocument/2006/relationships" xmlns:p="http://schemas.openxmlformats.org/presentationml/2006/main" preserve="1" userDrawn="1">
   <p:cSld name="1_Title and Content">
     <p:spTree>
@@ -6034,13 +5284,7 @@
       </p:grpSpPr>
       <p:sp>
         <p:nvSpPr>
-          <p:cNvPr id="2" name="Title 1">
-            <a:extLst>
-              <a:ext uri="{FF2B5EF4-FFF2-40B4-BE49-F238E27FC236}">
-                <a16:creationId xmlns:a16="http://schemas.microsoft.com/office/drawing/2014/main" id="{64C3AE9D-042A-DD42-9A11-F79F2844C85D}"/>
-              </a:ext>
-            </a:extLst>
-          </p:cNvPr>
+          <p:cNvPr id="2" name="Title 1"/>
           <p:cNvSpPr>
             <a:spLocks noGrp="1"/>
           </p:cNvSpPr>
@@ -6071,13 +5315,7 @@
       </p:sp>
       <p:sp>
         <p:nvSpPr>
-          <p:cNvPr id="3" name="Content Placeholder 2">
-            <a:extLst>
-              <a:ext uri="{FF2B5EF4-FFF2-40B4-BE49-F238E27FC236}">
-                <a16:creationId xmlns:a16="http://schemas.microsoft.com/office/drawing/2014/main" id="{F0B19004-5E21-B147-B0EB-1A69AD8C296D}"/>
-              </a:ext>
-            </a:extLst>
-          </p:cNvPr>
+          <p:cNvPr id="3" name="Content Placeholder 2"/>
           <p:cNvSpPr>
             <a:spLocks noGrp="1"/>
           </p:cNvSpPr>
@@ -6103,6 +5341,7 @@
               <a:rPr lang="en-US"/>
               <a:t>Click to edit Master text styles</a:t>
             </a:r>
+            <a:endParaRPr lang="en-US"/>
           </a:p>
           <a:p>
             <a:pPr lvl="1"/>
@@ -6110,6 +5349,7 @@
               <a:rPr lang="en-US"/>
               <a:t>Second level</a:t>
             </a:r>
+            <a:endParaRPr lang="en-US"/>
           </a:p>
           <a:p>
             <a:pPr lvl="2"/>
@@ -6117,6 +5357,7 @@
               <a:rPr lang="en-US"/>
               <a:t>Third level</a:t>
             </a:r>
+            <a:endParaRPr lang="en-US"/>
           </a:p>
           <a:p>
             <a:pPr lvl="3"/>
@@ -6124,18 +5365,13 @@
               <a:rPr lang="en-US"/>
               <a:t>Fourth level</a:t>
             </a:r>
-          </a:p>
-        </p:txBody>
-      </p:sp>
-      <p:sp>
-        <p:nvSpPr>
-          <p:cNvPr id="7" name="Slide Number Placeholder 6">
-            <a:extLst>
-              <a:ext uri="{FF2B5EF4-FFF2-40B4-BE49-F238E27FC236}">
-                <a16:creationId xmlns:a16="http://schemas.microsoft.com/office/drawing/2014/main" id="{19ABB276-9101-0D4D-A13B-A773BD15A610}"/>
-              </a:ext>
-            </a:extLst>
-          </p:cNvPr>
+            <a:endParaRPr lang="en-US"/>
+          </a:p>
+        </p:txBody>
+      </p:sp>
+      <p:sp>
+        <p:nvSpPr>
+          <p:cNvPr id="7" name="Slide Number Placeholder 6"/>
           <p:cNvSpPr>
             <a:spLocks noGrp="1"/>
           </p:cNvSpPr>
@@ -6150,18 +5386,12 @@
           <a:p>
             <a:fld id="{B15CCACC-6213-F14B-B40D-407BFF938B14}" type="slidenum">
               <a:rPr lang="en-US" smtClean="0"/>
-              <a:t>‹#›</a:t>
             </a:fld>
             <a:endParaRPr lang="en-US"/>
           </a:p>
         </p:txBody>
       </p:sp>
     </p:spTree>
-    <p:extLst>
-      <p:ext uri="{BB962C8B-B14F-4D97-AF65-F5344CB8AC3E}">
-        <p14:creationId xmlns:p14="http://schemas.microsoft.com/office/powerpoint/2010/main" val="963009546"/>
-      </p:ext>
-    </p:extLst>
   </p:cSld>
   <p:clrMapOvr>
     <a:masterClrMapping/>
@@ -6169,7 +5399,7 @@
 </p:sldLayout>
 </file>
 
-<file path=ppt/slideLayouts/slideLayout27.xml><?xml version="1.0" encoding="utf-8"?>
+<file path=ppt/slideLayouts/slideLayout26.xml><?xml version="1.0" encoding="utf-8"?>
 <p:sldLayout xmlns:a="http://schemas.openxmlformats.org/drawingml/2006/main" xmlns:r="http://schemas.openxmlformats.org/officeDocument/2006/relationships" xmlns:p="http://schemas.openxmlformats.org/presentationml/2006/main" preserve="1" userDrawn="1">
   <p:cSld name="1_Title and Two Content">
     <p:spTree>
@@ -6188,13 +5418,7 @@
       </p:grpSpPr>
       <p:sp>
         <p:nvSpPr>
-          <p:cNvPr id="2" name="Title 1">
-            <a:extLst>
-              <a:ext uri="{FF2B5EF4-FFF2-40B4-BE49-F238E27FC236}">
-                <a16:creationId xmlns:a16="http://schemas.microsoft.com/office/drawing/2014/main" id="{BAF2DB36-0E37-3E4F-846E-FFE754041574}"/>
-              </a:ext>
-            </a:extLst>
-          </p:cNvPr>
+          <p:cNvPr id="2" name="Title 1"/>
           <p:cNvSpPr>
             <a:spLocks noGrp="1"/>
           </p:cNvSpPr>
@@ -6233,13 +5457,7 @@
       </p:sp>
       <p:sp>
         <p:nvSpPr>
-          <p:cNvPr id="3" name="Content Placeholder 2">
-            <a:extLst>
-              <a:ext uri="{FF2B5EF4-FFF2-40B4-BE49-F238E27FC236}">
-                <a16:creationId xmlns:a16="http://schemas.microsoft.com/office/drawing/2014/main" id="{FC3CB7B1-BD73-384F-B626-099E8AB1C163}"/>
-              </a:ext>
-            </a:extLst>
-          </p:cNvPr>
+          <p:cNvPr id="3" name="Content Placeholder 2"/>
           <p:cNvSpPr>
             <a:spLocks noGrp="1"/>
           </p:cNvSpPr>
@@ -6265,6 +5483,7 @@
               <a:rPr lang="en-US" dirty="0"/>
               <a:t>Level One Bullet</a:t>
             </a:r>
+            <a:endParaRPr lang="en-US" dirty="0"/>
           </a:p>
           <a:p>
             <a:pPr lvl="1"/>
@@ -6272,6 +5491,7 @@
               <a:rPr lang="en-US" dirty="0"/>
               <a:t>Level Two Bullet</a:t>
             </a:r>
+            <a:endParaRPr lang="en-US" dirty="0"/>
           </a:p>
           <a:p>
             <a:pPr lvl="2"/>
@@ -6279,6 +5499,7 @@
               <a:rPr lang="en-US" dirty="0"/>
               <a:t>Level Three Bullet</a:t>
             </a:r>
+            <a:endParaRPr lang="en-US" dirty="0"/>
           </a:p>
           <a:p>
             <a:pPr lvl="3"/>
@@ -6286,18 +5507,13 @@
               <a:rPr lang="en-US" dirty="0"/>
               <a:t>Level Four Bullet</a:t>
             </a:r>
-          </a:p>
-        </p:txBody>
-      </p:sp>
-      <p:sp>
-        <p:nvSpPr>
-          <p:cNvPr id="4" name="Content Placeholder 3">
-            <a:extLst>
-              <a:ext uri="{FF2B5EF4-FFF2-40B4-BE49-F238E27FC236}">
-                <a16:creationId xmlns:a16="http://schemas.microsoft.com/office/drawing/2014/main" id="{437BAA05-1B10-1D4A-BBC2-304E5EEDACA0}"/>
-              </a:ext>
-            </a:extLst>
-          </p:cNvPr>
+            <a:endParaRPr lang="en-US" dirty="0"/>
+          </a:p>
+        </p:txBody>
+      </p:sp>
+      <p:sp>
+        <p:nvSpPr>
+          <p:cNvPr id="4" name="Content Placeholder 3"/>
           <p:cNvSpPr>
             <a:spLocks noGrp="1"/>
           </p:cNvSpPr>
@@ -6323,6 +5539,7 @@
               <a:rPr lang="en-US" dirty="0"/>
               <a:t>Level One Bullet</a:t>
             </a:r>
+            <a:endParaRPr lang="en-US" dirty="0"/>
           </a:p>
           <a:p>
             <a:pPr lvl="1"/>
@@ -6330,6 +5547,7 @@
               <a:rPr lang="en-US" dirty="0"/>
               <a:t>Level Two Bullet</a:t>
             </a:r>
+            <a:endParaRPr lang="en-US" dirty="0"/>
           </a:p>
           <a:p>
             <a:pPr lvl="2"/>
@@ -6337,6 +5555,7 @@
               <a:rPr lang="en-US" dirty="0"/>
               <a:t>Level Three Bullet</a:t>
             </a:r>
+            <a:endParaRPr lang="en-US" dirty="0"/>
           </a:p>
           <a:p>
             <a:pPr lvl="3"/>
@@ -6344,18 +5563,13 @@
               <a:rPr lang="en-US" dirty="0"/>
               <a:t>Level Four Bullet</a:t>
             </a:r>
-          </a:p>
-        </p:txBody>
-      </p:sp>
-      <p:sp>
-        <p:nvSpPr>
-          <p:cNvPr id="8" name="Slide Number Placeholder 7">
-            <a:extLst>
-              <a:ext uri="{FF2B5EF4-FFF2-40B4-BE49-F238E27FC236}">
-                <a16:creationId xmlns:a16="http://schemas.microsoft.com/office/drawing/2014/main" id="{30DD411A-1AC0-4C4B-B7F9-D6B8D5E7DF62}"/>
-              </a:ext>
-            </a:extLst>
-          </p:cNvPr>
+            <a:endParaRPr lang="en-US" dirty="0"/>
+          </a:p>
+        </p:txBody>
+      </p:sp>
+      <p:sp>
+        <p:nvSpPr>
+          <p:cNvPr id="8" name="Slide Number Placeholder 7"/>
           <p:cNvSpPr>
             <a:spLocks noGrp="1"/>
           </p:cNvSpPr>
@@ -6370,18 +5584,12 @@
           <a:p>
             <a:fld id="{B15CCACC-6213-F14B-B40D-407BFF938B14}" type="slidenum">
               <a:rPr lang="en-US" smtClean="0"/>
-              <a:t>‹#›</a:t>
             </a:fld>
             <a:endParaRPr lang="en-US"/>
           </a:p>
         </p:txBody>
       </p:sp>
     </p:spTree>
-    <p:extLst>
-      <p:ext uri="{BB962C8B-B14F-4D97-AF65-F5344CB8AC3E}">
-        <p14:creationId xmlns:p14="http://schemas.microsoft.com/office/powerpoint/2010/main" val="839743775"/>
-      </p:ext>
-    </p:extLst>
   </p:cSld>
   <p:clrMapOvr>
     <a:masterClrMapping/>
@@ -6389,7 +5597,7 @@
 </p:sldLayout>
 </file>
 
-<file path=ppt/slideLayouts/slideLayout28.xml><?xml version="1.0" encoding="utf-8"?>
+<file path=ppt/slideLayouts/slideLayout27.xml><?xml version="1.0" encoding="utf-8"?>
 <p:sldLayout xmlns:a="http://schemas.openxmlformats.org/drawingml/2006/main" xmlns:r="http://schemas.openxmlformats.org/officeDocument/2006/relationships" xmlns:p="http://schemas.openxmlformats.org/presentationml/2006/main" preserve="1" userDrawn="1">
   <p:cSld name="1_Title and Three Content">
     <p:spTree>
@@ -6408,13 +5616,7 @@
       </p:grpSpPr>
       <p:sp>
         <p:nvSpPr>
-          <p:cNvPr id="2" name="Title 1">
-            <a:extLst>
-              <a:ext uri="{FF2B5EF4-FFF2-40B4-BE49-F238E27FC236}">
-                <a16:creationId xmlns:a16="http://schemas.microsoft.com/office/drawing/2014/main" id="{CD699B51-C150-AD4E-BEE5-623B0A131E39}"/>
-              </a:ext>
-            </a:extLst>
-          </p:cNvPr>
+          <p:cNvPr id="2" name="Title 1"/>
           <p:cNvSpPr>
             <a:spLocks noGrp="1"/>
           </p:cNvSpPr>
@@ -6453,13 +5655,7 @@
       </p:sp>
       <p:sp>
         <p:nvSpPr>
-          <p:cNvPr id="6" name="Slide Number Placeholder 5">
-            <a:extLst>
-              <a:ext uri="{FF2B5EF4-FFF2-40B4-BE49-F238E27FC236}">
-                <a16:creationId xmlns:a16="http://schemas.microsoft.com/office/drawing/2014/main" id="{7B303C40-DDF3-1B4D-8096-0CB457987799}"/>
-              </a:ext>
-            </a:extLst>
-          </p:cNvPr>
+          <p:cNvPr id="6" name="Slide Number Placeholder 5"/>
           <p:cNvSpPr>
             <a:spLocks noGrp="1"/>
           </p:cNvSpPr>
@@ -6474,7 +5670,6 @@
           <a:p>
             <a:fld id="{B15CCACC-6213-F14B-B40D-407BFF938B14}" type="slidenum">
               <a:rPr lang="en-US" smtClean="0"/>
-              <a:t>‹#›</a:t>
             </a:fld>
             <a:endParaRPr lang="en-US"/>
           </a:p>
@@ -6482,13 +5677,7 @@
       </p:sp>
       <p:sp>
         <p:nvSpPr>
-          <p:cNvPr id="4" name="Text Placeholder 5">
-            <a:extLst>
-              <a:ext uri="{FF2B5EF4-FFF2-40B4-BE49-F238E27FC236}">
-                <a16:creationId xmlns:a16="http://schemas.microsoft.com/office/drawing/2014/main" id="{2430D756-47CB-0E43-B9CD-A7BE8386C3D2}"/>
-              </a:ext>
-            </a:extLst>
-          </p:cNvPr>
+          <p:cNvPr id="4" name="Text Placeholder 5"/>
           <p:cNvSpPr>
             <a:spLocks noGrp="1"/>
           </p:cNvSpPr>
@@ -6534,7 +5723,6 @@
               <a:buSzTx/>
               <a:buFontTx/>
               <a:buNone/>
-              <a:tabLst/>
               <a:defRPr sz="1800">
                 <a:solidFill>
                   <a:schemeClr val="tx1"/>
@@ -6558,7 +5746,6 @@
               <a:buSzTx/>
               <a:buFontTx/>
               <a:buNone/>
-              <a:tabLst/>
               <a:defRPr/>
             </a:pPr>
             <a:r>
@@ -6570,6 +5757,12 @@
               </a:rPr>
               <a:t>body body body body body body body body body body body body body body body body body body body body body body body body</a:t>
             </a:r>
+            <a:endParaRPr lang="en-US" b="0" i="0" dirty="0">
+              <a:solidFill>
+                <a:srgbClr val="595959"/>
+              </a:solidFill>
+              <a:latin typeface="Myriad Pro" panose="020B0503030403020204" pitchFamily="34" charset="0"/>
+            </a:endParaRPr>
           </a:p>
           <a:p>
             <a:pPr marL="0" marR="0" lvl="0" indent="0" algn="ctr" defTabSz="914400" rtl="0" eaLnBrk="1" fontAlgn="base" latinLnBrk="0" hangingPunct="1">
@@ -6586,7 +5779,6 @@
               <a:buSzTx/>
               <a:buFontTx/>
               <a:buNone/>
-              <a:tabLst/>
               <a:defRPr/>
             </a:pPr>
             <a:r>
@@ -6604,13 +5796,7 @@
       </p:sp>
       <p:sp>
         <p:nvSpPr>
-          <p:cNvPr id="5" name="Text Placeholder 5">
-            <a:extLst>
-              <a:ext uri="{FF2B5EF4-FFF2-40B4-BE49-F238E27FC236}">
-                <a16:creationId xmlns:a16="http://schemas.microsoft.com/office/drawing/2014/main" id="{6B29F451-CE5A-EB40-A282-04773C4C957D}"/>
-              </a:ext>
-            </a:extLst>
-          </p:cNvPr>
+          <p:cNvPr id="5" name="Text Placeholder 5"/>
           <p:cNvSpPr>
             <a:spLocks noGrp="1"/>
           </p:cNvSpPr>
@@ -6656,7 +5842,6 @@
               <a:buSzTx/>
               <a:buFontTx/>
               <a:buNone/>
-              <a:tabLst/>
               <a:defRPr sz="1800">
                 <a:solidFill>
                   <a:schemeClr val="tx1"/>
@@ -6680,7 +5865,6 @@
               <a:buSzTx/>
               <a:buFontTx/>
               <a:buNone/>
-              <a:tabLst/>
               <a:defRPr/>
             </a:pPr>
             <a:r>
@@ -6692,6 +5876,12 @@
               </a:rPr>
               <a:t>body body body body body body body body body body body body body body body body body body body body body body body body</a:t>
             </a:r>
+            <a:endParaRPr lang="en-US" b="0" i="0" dirty="0">
+              <a:solidFill>
+                <a:srgbClr val="595959"/>
+              </a:solidFill>
+              <a:latin typeface="Myriad Pro" panose="020B0503030403020204" pitchFamily="34" charset="0"/>
+            </a:endParaRPr>
           </a:p>
           <a:p>
             <a:pPr marL="0" marR="0" lvl="0" indent="0" algn="ctr" defTabSz="914400" rtl="0" eaLnBrk="1" fontAlgn="base" latinLnBrk="0" hangingPunct="1">
@@ -6708,7 +5898,6 @@
               <a:buSzTx/>
               <a:buFontTx/>
               <a:buNone/>
-              <a:tabLst/>
               <a:defRPr/>
             </a:pPr>
             <a:r>
@@ -6726,13 +5915,7 @@
       </p:sp>
       <p:sp>
         <p:nvSpPr>
-          <p:cNvPr id="7" name="Text Placeholder 5">
-            <a:extLst>
-              <a:ext uri="{FF2B5EF4-FFF2-40B4-BE49-F238E27FC236}">
-                <a16:creationId xmlns:a16="http://schemas.microsoft.com/office/drawing/2014/main" id="{715B99DB-285A-9F48-94ED-A7E37351D0D7}"/>
-              </a:ext>
-            </a:extLst>
-          </p:cNvPr>
+          <p:cNvPr id="7" name="Text Placeholder 5"/>
           <p:cNvSpPr>
             <a:spLocks noGrp="1"/>
           </p:cNvSpPr>
@@ -6778,7 +5961,6 @@
               <a:buSzTx/>
               <a:buFontTx/>
               <a:buNone/>
-              <a:tabLst/>
               <a:defRPr sz="1800">
                 <a:solidFill>
                   <a:schemeClr val="tx1"/>
@@ -6802,7 +5984,6 @@
               <a:buSzTx/>
               <a:buFontTx/>
               <a:buNone/>
-              <a:tabLst/>
               <a:defRPr/>
             </a:pPr>
             <a:r>
@@ -6814,6 +5995,12 @@
               </a:rPr>
               <a:t>body body body body body body body body body body body body body body body body body body body body body body body body</a:t>
             </a:r>
+            <a:endParaRPr lang="en-US" b="0" i="0" dirty="0">
+              <a:solidFill>
+                <a:srgbClr val="595959"/>
+              </a:solidFill>
+              <a:latin typeface="Myriad Pro" panose="020B0503030403020204" pitchFamily="34" charset="0"/>
+            </a:endParaRPr>
           </a:p>
           <a:p>
             <a:pPr marL="0" marR="0" lvl="0" indent="0" algn="ctr" defTabSz="914400" rtl="0" eaLnBrk="1" fontAlgn="base" latinLnBrk="0" hangingPunct="1">
@@ -6830,7 +6017,6 @@
               <a:buSzTx/>
               <a:buFontTx/>
               <a:buNone/>
-              <a:tabLst/>
               <a:defRPr/>
             </a:pPr>
             <a:r>
@@ -6848,13 +6034,7 @@
       </p:sp>
       <p:sp>
         <p:nvSpPr>
-          <p:cNvPr id="8" name="Text Placeholder 13">
-            <a:extLst>
-              <a:ext uri="{FF2B5EF4-FFF2-40B4-BE49-F238E27FC236}">
-                <a16:creationId xmlns:a16="http://schemas.microsoft.com/office/drawing/2014/main" id="{6DD56EEB-5E1A-FC41-9BDC-6104C8A2666A}"/>
-              </a:ext>
-            </a:extLst>
-          </p:cNvPr>
+          <p:cNvPr id="8" name="Text Placeholder 13"/>
           <p:cNvSpPr>
             <a:spLocks noGrp="1"/>
           </p:cNvSpPr>
@@ -6890,18 +6070,13 @@
               <a:rPr lang="en-US" dirty="0"/>
               <a:t>Subhead</a:t>
             </a:r>
-          </a:p>
-        </p:txBody>
-      </p:sp>
-      <p:sp>
-        <p:nvSpPr>
-          <p:cNvPr id="9" name="Text Placeholder 13">
-            <a:extLst>
-              <a:ext uri="{FF2B5EF4-FFF2-40B4-BE49-F238E27FC236}">
-                <a16:creationId xmlns:a16="http://schemas.microsoft.com/office/drawing/2014/main" id="{002BAA5A-C66E-AB4A-ABA6-ECB4D6209592}"/>
-              </a:ext>
-            </a:extLst>
-          </p:cNvPr>
+            <a:endParaRPr lang="en-US" dirty="0"/>
+          </a:p>
+        </p:txBody>
+      </p:sp>
+      <p:sp>
+        <p:nvSpPr>
+          <p:cNvPr id="9" name="Text Placeholder 13"/>
           <p:cNvSpPr>
             <a:spLocks noGrp="1"/>
           </p:cNvSpPr>
@@ -6937,18 +6112,13 @@
               <a:rPr lang="en-US" dirty="0"/>
               <a:t>Subhead</a:t>
             </a:r>
-          </a:p>
-        </p:txBody>
-      </p:sp>
-      <p:sp>
-        <p:nvSpPr>
-          <p:cNvPr id="10" name="Text Placeholder 13">
-            <a:extLst>
-              <a:ext uri="{FF2B5EF4-FFF2-40B4-BE49-F238E27FC236}">
-                <a16:creationId xmlns:a16="http://schemas.microsoft.com/office/drawing/2014/main" id="{8D0E545A-1D40-EE41-8064-5928222E71F5}"/>
-              </a:ext>
-            </a:extLst>
-          </p:cNvPr>
+            <a:endParaRPr lang="en-US" dirty="0"/>
+          </a:p>
+        </p:txBody>
+      </p:sp>
+      <p:sp>
+        <p:nvSpPr>
+          <p:cNvPr id="10" name="Text Placeholder 13"/>
           <p:cNvSpPr>
             <a:spLocks noGrp="1"/>
           </p:cNvSpPr>
@@ -6984,15 +6154,11 @@
               <a:rPr lang="en-US" dirty="0"/>
               <a:t>Subhead</a:t>
             </a:r>
+            <a:endParaRPr lang="en-US" dirty="0"/>
           </a:p>
         </p:txBody>
       </p:sp>
     </p:spTree>
-    <p:extLst>
-      <p:ext uri="{BB962C8B-B14F-4D97-AF65-F5344CB8AC3E}">
-        <p14:creationId xmlns:p14="http://schemas.microsoft.com/office/powerpoint/2010/main" val="2933943441"/>
-      </p:ext>
-    </p:extLst>
   </p:cSld>
   <p:clrMapOvr>
     <a:masterClrMapping/>
@@ -7000,7 +6166,7 @@
 </p:sldLayout>
 </file>
 
-<file path=ppt/slideLayouts/slideLayout29.xml><?xml version="1.0" encoding="utf-8"?>
+<file path=ppt/slideLayouts/slideLayout28.xml><?xml version="1.0" encoding="utf-8"?>
 <p:sldLayout xmlns:a="http://schemas.openxmlformats.org/drawingml/2006/main" xmlns:r="http://schemas.openxmlformats.org/officeDocument/2006/relationships" xmlns:p="http://schemas.openxmlformats.org/presentationml/2006/main" preserve="1" userDrawn="1">
   <p:cSld name="1_Title and Text Left_Content Right">
     <p:spTree>
@@ -7019,13 +6185,7 @@
       </p:grpSpPr>
       <p:sp>
         <p:nvSpPr>
-          <p:cNvPr id="2" name="Title 1">
-            <a:extLst>
-              <a:ext uri="{FF2B5EF4-FFF2-40B4-BE49-F238E27FC236}">
-                <a16:creationId xmlns:a16="http://schemas.microsoft.com/office/drawing/2014/main" id="{4F9AD8F0-BA9C-2D49-BEF0-F0A72CC2C305}"/>
-              </a:ext>
-            </a:extLst>
-          </p:cNvPr>
+          <p:cNvPr id="2" name="Title 1"/>
           <p:cNvSpPr>
             <a:spLocks noGrp="1"/>
           </p:cNvSpPr>
@@ -7066,13 +6226,7 @@
       </p:sp>
       <p:sp>
         <p:nvSpPr>
-          <p:cNvPr id="4" name="Text Placeholder 3">
-            <a:extLst>
-              <a:ext uri="{FF2B5EF4-FFF2-40B4-BE49-F238E27FC236}">
-                <a16:creationId xmlns:a16="http://schemas.microsoft.com/office/drawing/2014/main" id="{AB2026E2-9833-424F-8180-005EEF86E250}"/>
-              </a:ext>
-            </a:extLst>
-          </p:cNvPr>
+          <p:cNvPr id="4" name="Text Placeholder 3"/>
           <p:cNvSpPr>
             <a:spLocks noGrp="1"/>
           </p:cNvSpPr>
@@ -7141,18 +6295,13 @@
               <a:rPr lang="en-US"/>
               <a:t>Click to edit Master text styles</a:t>
             </a:r>
-          </a:p>
-        </p:txBody>
-      </p:sp>
-      <p:sp>
-        <p:nvSpPr>
-          <p:cNvPr id="8" name="Slide Number Placeholder 7">
-            <a:extLst>
-              <a:ext uri="{FF2B5EF4-FFF2-40B4-BE49-F238E27FC236}">
-                <a16:creationId xmlns:a16="http://schemas.microsoft.com/office/drawing/2014/main" id="{DBD07C98-DEB2-9043-B3B7-E156746DEEA1}"/>
-              </a:ext>
-            </a:extLst>
-          </p:cNvPr>
+            <a:endParaRPr lang="en-US"/>
+          </a:p>
+        </p:txBody>
+      </p:sp>
+      <p:sp>
+        <p:nvSpPr>
+          <p:cNvPr id="8" name="Slide Number Placeholder 7"/>
           <p:cNvSpPr>
             <a:spLocks noGrp="1"/>
           </p:cNvSpPr>
@@ -7167,7 +6316,6 @@
           <a:p>
             <a:fld id="{B15CCACC-6213-F14B-B40D-407BFF938B14}" type="slidenum">
               <a:rPr lang="en-US" smtClean="0"/>
-              <a:t>‹#›</a:t>
             </a:fld>
             <a:endParaRPr lang="en-US"/>
           </a:p>
@@ -7175,13 +6323,7 @@
       </p:sp>
       <p:sp>
         <p:nvSpPr>
-          <p:cNvPr id="5" name="Picture Placeholder 4">
-            <a:extLst>
-              <a:ext uri="{FF2B5EF4-FFF2-40B4-BE49-F238E27FC236}">
-                <a16:creationId xmlns:a16="http://schemas.microsoft.com/office/drawing/2014/main" id="{30403F9B-2509-B349-8F7B-B7A269B84DED}"/>
-              </a:ext>
-            </a:extLst>
-          </p:cNvPr>
+          <p:cNvPr id="5" name="Picture Placeholder 4"/>
           <p:cNvSpPr>
             <a:spLocks noGrp="1"/>
           </p:cNvSpPr>
@@ -7212,15 +6354,196 @@
               <a:rPr lang="en-US" dirty="0"/>
               <a:t>Click to Add Photo</a:t>
             </a:r>
+            <a:endParaRPr lang="en-US" dirty="0"/>
           </a:p>
         </p:txBody>
       </p:sp>
     </p:spTree>
-    <p:extLst>
-      <p:ext uri="{BB962C8B-B14F-4D97-AF65-F5344CB8AC3E}">
-        <p14:creationId xmlns:p14="http://schemas.microsoft.com/office/powerpoint/2010/main" val="2494206876"/>
-      </p:ext>
-    </p:extLst>
+  </p:cSld>
+  <p:clrMapOvr>
+    <a:masterClrMapping/>
+  </p:clrMapOvr>
+</p:sldLayout>
+</file>
+
+<file path=ppt/slideLayouts/slideLayout29.xml><?xml version="1.0" encoding="utf-8"?>
+<p:sldLayout xmlns:a="http://schemas.openxmlformats.org/drawingml/2006/main" xmlns:r="http://schemas.openxmlformats.org/officeDocument/2006/relationships" xmlns:p="http://schemas.openxmlformats.org/presentationml/2006/main" preserve="1" userDrawn="1">
+  <p:cSld name="1_Title and Large Image">
+    <p:spTree>
+      <p:nvGrpSpPr>
+        <p:cNvPr id="1" name=""/>
+        <p:cNvGrpSpPr/>
+        <p:nvPr/>
+      </p:nvGrpSpPr>
+      <p:grpSpPr>
+        <a:xfrm>
+          <a:off x="0" y="0"/>
+          <a:ext cx="0" cy="0"/>
+          <a:chOff x="0" y="0"/>
+          <a:chExt cx="0" cy="0"/>
+        </a:xfrm>
+      </p:grpSpPr>
+      <p:sp>
+        <p:nvSpPr>
+          <p:cNvPr id="3" name="Slide Number Placeholder 2"/>
+          <p:cNvSpPr>
+            <a:spLocks noGrp="1"/>
+          </p:cNvSpPr>
+          <p:nvPr>
+            <p:ph type="sldNum" sz="quarter" idx="10"/>
+          </p:nvPr>
+        </p:nvSpPr>
+        <p:spPr/>
+        <p:txBody>
+          <a:bodyPr/>
+          <a:lstStyle/>
+          <a:p>
+            <a:fld id="{B15CCACC-6213-F14B-B40D-407BFF938B14}" type="slidenum">
+              <a:rPr lang="en-US" smtClean="0"/>
+            </a:fld>
+            <a:endParaRPr lang="en-US"/>
+          </a:p>
+        </p:txBody>
+      </p:sp>
+      <p:sp>
+        <p:nvSpPr>
+          <p:cNvPr id="5" name="Picture Placeholder 4"/>
+          <p:cNvSpPr>
+            <a:spLocks noGrp="1"/>
+          </p:cNvSpPr>
+          <p:nvPr>
+            <p:ph type="pic" sz="quarter" idx="11" hasCustomPrompt="1"/>
+          </p:nvPr>
+        </p:nvSpPr>
+        <p:spPr>
+          <a:xfrm>
+            <a:off x="0" y="1142999"/>
+            <a:ext cx="12192000" cy="5084065"/>
+          </a:xfrm>
+        </p:spPr>
+        <p:txBody>
+          <a:bodyPr anchor="ctr"/>
+          <a:lstStyle>
+            <a:lvl1pPr marL="0" indent="0" algn="ctr">
+              <a:buFont typeface="Arial" panose="020B0604020202090204" pitchFamily="34" charset="0"/>
+              <a:buNone/>
+              <a:defRPr/>
+            </a:lvl1pPr>
+          </a:lstStyle>
+          <a:p>
+            <a:r>
+              <a:rPr lang="en-US" dirty="0"/>
+              <a:t>Insert image</a:t>
+            </a:r>
+            <a:endParaRPr lang="en-US" dirty="0"/>
+          </a:p>
+        </p:txBody>
+      </p:sp>
+      <p:sp>
+        <p:nvSpPr>
+          <p:cNvPr id="8" name="Rectangle 7"/>
+          <p:cNvSpPr/>
+          <p:nvPr userDrawn="1"/>
+        </p:nvSpPr>
+        <p:spPr>
+          <a:xfrm>
+            <a:off x="0" y="-1"/>
+            <a:ext cx="12192000" cy="1143001"/>
+          </a:xfrm>
+          <a:prstGeom prst="rect">
+            <a:avLst/>
+          </a:prstGeom>
+          <a:solidFill>
+            <a:srgbClr val="F5F5F5"/>
+          </a:solidFill>
+          <a:ln>
+            <a:noFill/>
+          </a:ln>
+        </p:spPr>
+        <p:style>
+          <a:lnRef idx="2">
+            <a:schemeClr val="accent1">
+              <a:shade val="50000"/>
+            </a:schemeClr>
+          </a:lnRef>
+          <a:fillRef idx="1">
+            <a:schemeClr val="accent1"/>
+          </a:fillRef>
+          <a:effectRef idx="0">
+            <a:schemeClr val="accent1"/>
+          </a:effectRef>
+          <a:fontRef idx="minor">
+            <a:schemeClr val="lt1"/>
+          </a:fontRef>
+        </p:style>
+        <p:txBody>
+          <a:bodyPr rtlCol="0" anchor="ctr"/>
+          <a:lstStyle/>
+          <a:p>
+            <a:pPr algn="ctr"/>
+            <a:endParaRPr lang="en-US"/>
+          </a:p>
+        </p:txBody>
+      </p:sp>
+      <p:sp>
+        <p:nvSpPr>
+          <p:cNvPr id="2" name="Title 1"/>
+          <p:cNvSpPr>
+            <a:spLocks noGrp="1"/>
+          </p:cNvSpPr>
+          <p:nvPr>
+            <p:ph type="title"/>
+          </p:nvPr>
+        </p:nvSpPr>
+        <p:spPr/>
+        <p:txBody>
+          <a:bodyPr/>
+          <a:lstStyle/>
+          <a:p>
+            <a:r>
+              <a:rPr lang="en-US"/>
+              <a:t>Click to edit Master title style</a:t>
+            </a:r>
+            <a:endParaRPr lang="en-US" dirty="0"/>
+          </a:p>
+        </p:txBody>
+      </p:sp>
+      <p:cxnSp>
+        <p:nvCxnSpPr>
+          <p:cNvPr id="10" name="Straight Connector 9"/>
+          <p:cNvCxnSpPr/>
+          <p:nvPr userDrawn="1"/>
+        </p:nvCxnSpPr>
+        <p:spPr>
+          <a:xfrm>
+            <a:off x="406400" y="989880"/>
+            <a:ext cx="711200" cy="0"/>
+          </a:xfrm>
+          <a:prstGeom prst="line">
+            <a:avLst/>
+          </a:prstGeom>
+          <a:ln w="28575">
+            <a:solidFill>
+              <a:srgbClr val="800000"/>
+            </a:solidFill>
+          </a:ln>
+        </p:spPr>
+        <p:style>
+          <a:lnRef idx="1">
+            <a:schemeClr val="accent1"/>
+          </a:lnRef>
+          <a:fillRef idx="0">
+            <a:schemeClr val="accent1"/>
+          </a:fillRef>
+          <a:effectRef idx="0">
+            <a:schemeClr val="accent1"/>
+          </a:effectRef>
+          <a:fontRef idx="minor">
+            <a:schemeClr val="tx1"/>
+          </a:fontRef>
+        </p:style>
+      </p:cxnSp>
+    </p:spTree>
   </p:cSld>
   <p:clrMapOvr>
     <a:masterClrMapping/>
@@ -7229,7 +6552,7 @@
 </file>
 
 <file path=ppt/slideLayouts/slideLayout3.xml><?xml version="1.0" encoding="utf-8"?>
-<p:sldLayout xmlns:a="http://schemas.openxmlformats.org/drawingml/2006/main" xmlns:r="http://schemas.openxmlformats.org/officeDocument/2006/relationships" xmlns:p="http://schemas.openxmlformats.org/presentationml/2006/main" showMasterSp="0" preserve="1" userDrawn="1">
+<p:sldLayout xmlns:a="http://schemas.openxmlformats.org/drawingml/2006/main" xmlns:r="http://schemas.openxmlformats.org/officeDocument/2006/relationships" xmlns:p="http://schemas.openxmlformats.org/presentationml/2006/main" preserve="1" showMasterSp="0" userDrawn="1">
   <p:cSld name="Prepared Speaker Slide">
     <p:spTree>
       <p:nvGrpSpPr>
@@ -7247,13 +6570,7 @@
       </p:grpSpPr>
       <p:sp>
         <p:nvSpPr>
-          <p:cNvPr id="11" name="Rectangle 10">
-            <a:extLst>
-              <a:ext uri="{FF2B5EF4-FFF2-40B4-BE49-F238E27FC236}">
-                <a16:creationId xmlns:a16="http://schemas.microsoft.com/office/drawing/2014/main" id="{45619CAB-6643-C445-9D1E-B586B7DBC1C9}"/>
-              </a:ext>
-            </a:extLst>
-          </p:cNvPr>
+          <p:cNvPr id="11" name="Rectangle 10"/>
           <p:cNvSpPr/>
           <p:nvPr userDrawn="1"/>
         </p:nvSpPr>
@@ -7311,13 +6628,7 @@
       </p:sp>
       <p:sp>
         <p:nvSpPr>
-          <p:cNvPr id="8" name="Rectangle 7">
-            <a:extLst>
-              <a:ext uri="{FF2B5EF4-FFF2-40B4-BE49-F238E27FC236}">
-                <a16:creationId xmlns:a16="http://schemas.microsoft.com/office/drawing/2014/main" id="{3C2420E5-B19B-524A-8BC9-508D147EF32B}"/>
-              </a:ext>
-            </a:extLst>
-          </p:cNvPr>
+          <p:cNvPr id="8" name="Rectangle 7"/>
           <p:cNvSpPr/>
           <p:nvPr userDrawn="1"/>
         </p:nvSpPr>
@@ -7363,26 +6674,14 @@
       </p:sp>
       <p:pic>
         <p:nvPicPr>
-          <p:cNvPr id="10" name="Picture 9">
-            <a:extLst>
-              <a:ext uri="{FF2B5EF4-FFF2-40B4-BE49-F238E27FC236}">
-                <a16:creationId xmlns:a16="http://schemas.microsoft.com/office/drawing/2014/main" id="{AC9AF70D-6371-A340-A1FF-58A02DD84AB9}"/>
-              </a:ext>
-            </a:extLst>
-          </p:cNvPr>
+          <p:cNvPr id="10" name="Picture 9"/>
           <p:cNvPicPr>
             <a:picLocks noChangeAspect="1"/>
           </p:cNvPicPr>
           <p:nvPr userDrawn="1"/>
         </p:nvPicPr>
         <p:blipFill>
-          <a:blip r:embed="rId2" cstate="screen">
-            <a:extLst>
-              <a:ext uri="{28A0092B-C50C-407E-A947-70E740481C1C}">
-                <a14:useLocalDpi xmlns:a14="http://schemas.microsoft.com/office/drawing/2010/main"/>
-              </a:ext>
-            </a:extLst>
-          </a:blip>
+          <a:blip r:embed="rId2" cstate="screen"/>
           <a:stretch>
             <a:fillRect/>
           </a:stretch>
@@ -7399,13 +6698,7 @@
       </p:pic>
       <p:sp>
         <p:nvSpPr>
-          <p:cNvPr id="12" name="title">
-            <a:extLst>
-              <a:ext uri="{FF2B5EF4-FFF2-40B4-BE49-F238E27FC236}">
-                <a16:creationId xmlns:a16="http://schemas.microsoft.com/office/drawing/2014/main" id="{6548366F-DD1B-E444-8E3B-E95A563D0EB1}"/>
-              </a:ext>
-            </a:extLst>
-          </p:cNvPr>
+          <p:cNvPr id="12" name="title"/>
           <p:cNvSpPr>
             <a:spLocks noGrp="1"/>
           </p:cNvSpPr>
@@ -7428,7 +6721,7 @@
           </a:bodyPr>
           <a:lstStyle>
             <a:lvl1pPr algn="ctr">
-              <a:defRPr sz="3600">
+              <a:defRPr sz="4000">
                 <a:solidFill>
                   <a:srgbClr val="F2DF74"/>
                 </a:solidFill>
@@ -7440,18 +6733,13 @@
               <a:rPr lang="en-US" dirty="0"/>
               <a:t>Click to edit Section title</a:t>
             </a:r>
-          </a:p>
-        </p:txBody>
-      </p:sp>
-      <p:sp>
-        <p:nvSpPr>
-          <p:cNvPr id="6" name="project_info">
-            <a:extLst>
-              <a:ext uri="{FF2B5EF4-FFF2-40B4-BE49-F238E27FC236}">
-                <a16:creationId xmlns:a16="http://schemas.microsoft.com/office/drawing/2014/main" id="{647EF824-A716-C00C-5459-8A174F519F04}"/>
-              </a:ext>
-            </a:extLst>
-          </p:cNvPr>
+            <a:endParaRPr lang="en-US" dirty="0"/>
+          </a:p>
+        </p:txBody>
+      </p:sp>
+      <p:sp>
+        <p:nvSpPr>
+          <p:cNvPr id="6" name="project_info"/>
           <p:cNvSpPr>
             <a:spLocks noGrp="1"/>
           </p:cNvSpPr>
@@ -7466,28 +6754,24 @@
           </a:xfrm>
         </p:spPr>
         <p:txBody>
-          <a:bodyPr/>
+          <a:bodyPr>
+            <a:noAutofit/>
+          </a:bodyPr>
           <a:lstStyle>
             <a:lvl1pPr algn="ctr">
               <a:buNone/>
-              <a:defRPr sz="2100"/>
+              <a:defRPr sz="2800"/>
             </a:lvl1pPr>
           </a:lstStyle>
           <a:p>
             <a:pPr lvl="0"/>
-            <a:endParaRPr lang="en-CN" dirty="0"/>
-          </a:p>
-        </p:txBody>
-      </p:sp>
-      <p:sp>
-        <p:nvSpPr>
-          <p:cNvPr id="13" name="subtitle">
-            <a:extLst>
-              <a:ext uri="{FF2B5EF4-FFF2-40B4-BE49-F238E27FC236}">
-                <a16:creationId xmlns:a16="http://schemas.microsoft.com/office/drawing/2014/main" id="{FEDBFCD6-6E1D-B541-A1AF-99FEDC0C7A97}"/>
-              </a:ext>
-            </a:extLst>
-          </p:cNvPr>
+            <a:endParaRPr lang="en-US" dirty="0"/>
+          </a:p>
+        </p:txBody>
+      </p:sp>
+      <p:sp>
+        <p:nvSpPr>
+          <p:cNvPr id="13" name="subtitle"/>
           <p:cNvSpPr>
             <a:spLocks noGrp="1"/>
           </p:cNvSpPr>
@@ -7511,7 +6795,7 @@
           <a:lstStyle>
             <a:lvl1pPr marL="0" indent="0" algn="ctr">
               <a:buNone/>
-              <a:defRPr sz="2100"/>
+              <a:defRPr sz="2800"/>
             </a:lvl1pPr>
             <a:lvl2pPr marL="457200" indent="0" algn="ctr">
               <a:buNone/>
@@ -7551,18 +6835,13 @@
               <a:rPr lang="en-US" dirty="0"/>
               <a:t>Click to edit Section subtitle</a:t>
             </a:r>
-          </a:p>
-        </p:txBody>
-      </p:sp>
-      <p:sp>
-        <p:nvSpPr>
-          <p:cNvPr id="3" name="duration_background">
-            <a:extLst>
-              <a:ext uri="{FF2B5EF4-FFF2-40B4-BE49-F238E27FC236}">
-                <a16:creationId xmlns:a16="http://schemas.microsoft.com/office/drawing/2014/main" id="{E331BF4E-C971-46DE-7500-2FC1AB672787}"/>
-              </a:ext>
-            </a:extLst>
-          </p:cNvPr>
+            <a:endParaRPr lang="en-US" dirty="0"/>
+          </a:p>
+        </p:txBody>
+      </p:sp>
+      <p:sp>
+        <p:nvSpPr>
+          <p:cNvPr id="3" name="duration_background"/>
           <p:cNvSpPr/>
           <p:nvPr userDrawn="1"/>
         </p:nvSpPr>
@@ -7605,13 +6884,7 @@
       </p:sp>
       <p:sp>
         <p:nvSpPr>
-          <p:cNvPr id="5" name="duration">
-            <a:extLst>
-              <a:ext uri="{FF2B5EF4-FFF2-40B4-BE49-F238E27FC236}">
-                <a16:creationId xmlns:a16="http://schemas.microsoft.com/office/drawing/2014/main" id="{BE7FFFED-B39C-9159-1ADD-632D548A0F73}"/>
-              </a:ext>
-            </a:extLst>
-          </p:cNvPr>
+          <p:cNvPr id="5" name="duration"/>
           <p:cNvSpPr>
             <a:spLocks noGrp="1"/>
           </p:cNvSpPr>
@@ -7636,21 +6909,16 @@
           <a:p>
             <a:pPr lvl="0"/>
             <a:r>
-              <a:rPr lang="en-CN" dirty="0"/>
+              <a:rPr lang="en-US" dirty="0"/>
               <a:t>Duration</a:t>
             </a:r>
-          </a:p>
-        </p:txBody>
-      </p:sp>
-      <p:sp>
-        <p:nvSpPr>
-          <p:cNvPr id="14" name="avatar">
-            <a:extLst>
-              <a:ext uri="{FF2B5EF4-FFF2-40B4-BE49-F238E27FC236}">
-                <a16:creationId xmlns:a16="http://schemas.microsoft.com/office/drawing/2014/main" id="{6166F0DC-87E3-F8EE-EAF9-16720CDDF6C1}"/>
-              </a:ext>
-            </a:extLst>
-          </p:cNvPr>
+            <a:endParaRPr lang="en-US" dirty="0"/>
+          </a:p>
+        </p:txBody>
+      </p:sp>
+      <p:sp>
+        <p:nvSpPr>
+          <p:cNvPr id="14" name="avatar"/>
           <p:cNvSpPr>
             <a:spLocks noGrp="1"/>
           </p:cNvSpPr>
@@ -7679,16 +6947,11 @@
           <a:bodyPr/>
           <a:lstStyle/>
           <a:p>
-            <a:endParaRPr lang="en-CN"/>
+            <a:endParaRPr lang="en-US"/>
           </a:p>
         </p:txBody>
       </p:sp>
     </p:spTree>
-    <p:extLst>
-      <p:ext uri="{BB962C8B-B14F-4D97-AF65-F5344CB8AC3E}">
-        <p14:creationId xmlns:p14="http://schemas.microsoft.com/office/powerpoint/2010/main" val="3225370137"/>
-      </p:ext>
-    </p:extLst>
   </p:cSld>
   <p:clrMapOvr>
     <a:masterClrMapping/>
@@ -7697,8 +6960,8 @@
 </file>
 
 <file path=ppt/slideLayouts/slideLayout30.xml><?xml version="1.0" encoding="utf-8"?>
-<p:sldLayout xmlns:a="http://schemas.openxmlformats.org/drawingml/2006/main" xmlns:r="http://schemas.openxmlformats.org/officeDocument/2006/relationships" xmlns:p="http://schemas.openxmlformats.org/presentationml/2006/main" preserve="1" userDrawn="1">
-  <p:cSld name="1_Title and Large Image">
+<p:sldLayout xmlns:a="http://schemas.openxmlformats.org/drawingml/2006/main" xmlns:r="http://schemas.openxmlformats.org/officeDocument/2006/relationships" xmlns:p="http://schemas.openxmlformats.org/presentationml/2006/main" preserve="1" showMasterSp="0" userDrawn="1">
+  <p:cSld name="Title and Full Image">
     <p:spTree>
       <p:nvGrpSpPr>
         <p:cNvPr id="1" name=""/>
@@ -7715,60 +6978,25 @@
       </p:grpSpPr>
       <p:sp>
         <p:nvSpPr>
-          <p:cNvPr id="3" name="Slide Number Placeholder 2">
-            <a:extLst>
-              <a:ext uri="{FF2B5EF4-FFF2-40B4-BE49-F238E27FC236}">
-                <a16:creationId xmlns:a16="http://schemas.microsoft.com/office/drawing/2014/main" id="{13E3B808-8450-C749-BE34-83F343354452}"/>
-              </a:ext>
-            </a:extLst>
-          </p:cNvPr>
+          <p:cNvPr id="5" name="Picture Placeholder 4"/>
           <p:cNvSpPr>
             <a:spLocks noGrp="1"/>
           </p:cNvSpPr>
           <p:nvPr>
-            <p:ph type="sldNum" sz="quarter" idx="10"/>
-          </p:nvPr>
-        </p:nvSpPr>
-        <p:spPr/>
-        <p:txBody>
-          <a:bodyPr/>
-          <a:lstStyle/>
-          <a:p>
-            <a:fld id="{B15CCACC-6213-F14B-B40D-407BFF938B14}" type="slidenum">
-              <a:rPr lang="en-US" smtClean="0"/>
-              <a:t>‹#›</a:t>
-            </a:fld>
-            <a:endParaRPr lang="en-US"/>
-          </a:p>
-        </p:txBody>
-      </p:sp>
-      <p:sp>
-        <p:nvSpPr>
-          <p:cNvPr id="5" name="Picture Placeholder 4">
-            <a:extLst>
-              <a:ext uri="{FF2B5EF4-FFF2-40B4-BE49-F238E27FC236}">
-                <a16:creationId xmlns:a16="http://schemas.microsoft.com/office/drawing/2014/main" id="{2A518CE1-0D5F-1C42-9A3E-10D40306BD89}"/>
-              </a:ext>
-            </a:extLst>
-          </p:cNvPr>
-          <p:cNvSpPr>
-            <a:spLocks noGrp="1"/>
-          </p:cNvSpPr>
-          <p:nvPr>
             <p:ph type="pic" sz="quarter" idx="11" hasCustomPrompt="1"/>
           </p:nvPr>
         </p:nvSpPr>
         <p:spPr>
           <a:xfrm>
-            <a:off x="0" y="1142999"/>
-            <a:ext cx="12192000" cy="5084065"/>
+            <a:off x="0" y="1143000"/>
+            <a:ext cx="12192000" cy="5715000"/>
           </a:xfrm>
         </p:spPr>
         <p:txBody>
           <a:bodyPr anchor="ctr"/>
           <a:lstStyle>
             <a:lvl1pPr marL="0" indent="0" algn="ctr">
-              <a:buFont typeface="Arial" panose="020B0604020202020204" pitchFamily="34" charset="0"/>
+              <a:buFont typeface="Arial" panose="020B0604020202090204" pitchFamily="34" charset="0"/>
               <a:buNone/>
               <a:defRPr/>
             </a:lvl1pPr>
@@ -7778,18 +7006,13 @@
               <a:rPr lang="en-US" dirty="0"/>
               <a:t>Insert image</a:t>
             </a:r>
-          </a:p>
-        </p:txBody>
-      </p:sp>
-      <p:sp>
-        <p:nvSpPr>
-          <p:cNvPr id="8" name="Rectangle 7">
-            <a:extLst>
-              <a:ext uri="{FF2B5EF4-FFF2-40B4-BE49-F238E27FC236}">
-                <a16:creationId xmlns:a16="http://schemas.microsoft.com/office/drawing/2014/main" id="{A629875B-36BA-7147-91A7-92751BF38026}"/>
-              </a:ext>
-            </a:extLst>
-          </p:cNvPr>
+            <a:endParaRPr lang="en-US" dirty="0"/>
+          </a:p>
+        </p:txBody>
+      </p:sp>
+      <p:sp>
+        <p:nvSpPr>
+          <p:cNvPr id="7" name="Rectangle 6"/>
           <p:cNvSpPr/>
           <p:nvPr userDrawn="1"/>
         </p:nvSpPr>
@@ -7835,13 +7058,7 @@
       </p:sp>
       <p:sp>
         <p:nvSpPr>
-          <p:cNvPr id="2" name="Title 1">
-            <a:extLst>
-              <a:ext uri="{FF2B5EF4-FFF2-40B4-BE49-F238E27FC236}">
-                <a16:creationId xmlns:a16="http://schemas.microsoft.com/office/drawing/2014/main" id="{6349CBB3-A058-9248-905D-0684034A4364}"/>
-              </a:ext>
-            </a:extLst>
-          </p:cNvPr>
+          <p:cNvPr id="2" name="Title 1"/>
           <p:cNvSpPr>
             <a:spLocks noGrp="1"/>
           </p:cNvSpPr>
@@ -7864,13 +7081,7 @@
       </p:sp>
       <p:cxnSp>
         <p:nvCxnSpPr>
-          <p:cNvPr id="10" name="Straight Connector 9">
-            <a:extLst>
-              <a:ext uri="{FF2B5EF4-FFF2-40B4-BE49-F238E27FC236}">
-                <a16:creationId xmlns:a16="http://schemas.microsoft.com/office/drawing/2014/main" id="{EA1FA9E0-A75C-1C46-AB6F-6A5E7D665B54}"/>
-              </a:ext>
-            </a:extLst>
-          </p:cNvPr>
+          <p:cNvPr id="6" name="Straight Connector 5"/>
           <p:cNvCxnSpPr/>
           <p:nvPr userDrawn="1"/>
         </p:nvCxnSpPr>
@@ -7904,11 +7115,6 @@
         </p:style>
       </p:cxnSp>
     </p:spTree>
-    <p:extLst>
-      <p:ext uri="{BB962C8B-B14F-4D97-AF65-F5344CB8AC3E}">
-        <p14:creationId xmlns:p14="http://schemas.microsoft.com/office/powerpoint/2010/main" val="968530226"/>
-      </p:ext>
-    </p:extLst>
   </p:cSld>
   <p:clrMapOvr>
     <a:masterClrMapping/>
@@ -7917,8 +7123,8 @@
 </file>
 
 <file path=ppt/slideLayouts/slideLayout31.xml><?xml version="1.0" encoding="utf-8"?>
-<p:sldLayout xmlns:a="http://schemas.openxmlformats.org/drawingml/2006/main" xmlns:r="http://schemas.openxmlformats.org/officeDocument/2006/relationships" xmlns:p="http://schemas.openxmlformats.org/presentationml/2006/main" showMasterSp="0" preserve="1" userDrawn="1">
-  <p:cSld name="Title and Full Image">
+<p:sldLayout xmlns:a="http://schemas.openxmlformats.org/drawingml/2006/main" xmlns:r="http://schemas.openxmlformats.org/officeDocument/2006/relationships" xmlns:p="http://schemas.openxmlformats.org/presentationml/2006/main" preserve="1" showMasterSp="0" userDrawn="1">
+  <p:cSld name="How to use colors">
     <p:spTree>
       <p:nvGrpSpPr>
         <p:cNvPr id="1" name=""/>
@@ -7935,65 +7141,20 @@
       </p:grpSpPr>
       <p:sp>
         <p:nvSpPr>
-          <p:cNvPr id="5" name="Picture Placeholder 4">
-            <a:extLst>
-              <a:ext uri="{FF2B5EF4-FFF2-40B4-BE49-F238E27FC236}">
-                <a16:creationId xmlns:a16="http://schemas.microsoft.com/office/drawing/2014/main" id="{2A518CE1-0D5F-1C42-9A3E-10D40306BD89}"/>
-              </a:ext>
-            </a:extLst>
-          </p:cNvPr>
-          <p:cNvSpPr>
-            <a:spLocks noGrp="1"/>
-          </p:cNvSpPr>
-          <p:nvPr>
-            <p:ph type="pic" sz="quarter" idx="11" hasCustomPrompt="1"/>
-          </p:nvPr>
-        </p:nvSpPr>
-        <p:spPr>
-          <a:xfrm>
-            <a:off x="0" y="1143000"/>
-            <a:ext cx="12192000" cy="5715000"/>
-          </a:xfrm>
-        </p:spPr>
-        <p:txBody>
-          <a:bodyPr anchor="ctr"/>
-          <a:lstStyle>
-            <a:lvl1pPr marL="0" indent="0" algn="ctr">
-              <a:buFont typeface="Arial" panose="020B0604020202020204" pitchFamily="34" charset="0"/>
-              <a:buNone/>
-              <a:defRPr/>
-            </a:lvl1pPr>
-          </a:lstStyle>
-          <a:p>
-            <a:r>
-              <a:rPr lang="en-US" dirty="0"/>
-              <a:t>Insert image</a:t>
-            </a:r>
-          </a:p>
-        </p:txBody>
-      </p:sp>
-      <p:sp>
-        <p:nvSpPr>
-          <p:cNvPr id="7" name="Rectangle 6">
-            <a:extLst>
-              <a:ext uri="{FF2B5EF4-FFF2-40B4-BE49-F238E27FC236}">
-                <a16:creationId xmlns:a16="http://schemas.microsoft.com/office/drawing/2014/main" id="{0E6B948D-23E4-3F42-B765-2AA919B9E9C5}"/>
-              </a:ext>
-            </a:extLst>
-          </p:cNvPr>
+          <p:cNvPr id="9" name="Rectangle 8"/>
           <p:cNvSpPr/>
           <p:nvPr userDrawn="1"/>
         </p:nvSpPr>
         <p:spPr>
           <a:xfrm>
-            <a:off x="0" y="-1"/>
-            <a:ext cx="12192000" cy="1143001"/>
+            <a:off x="6096000" y="0"/>
+            <a:ext cx="6096000" cy="6208770"/>
           </a:xfrm>
           <a:prstGeom prst="rect">
             <a:avLst/>
           </a:prstGeom>
           <a:solidFill>
-            <a:srgbClr val="F5F5F5"/>
+            <a:schemeClr val="bg1"/>
           </a:solidFill>
           <a:ln>
             <a:noFill/>
@@ -8026,126 +7187,132 @@
       </p:sp>
       <p:sp>
         <p:nvSpPr>
-          <p:cNvPr id="2" name="Title 1">
-            <a:extLst>
-              <a:ext uri="{FF2B5EF4-FFF2-40B4-BE49-F238E27FC236}">
-                <a16:creationId xmlns:a16="http://schemas.microsoft.com/office/drawing/2014/main" id="{6349CBB3-A058-9248-905D-0684034A4364}"/>
-              </a:ext>
-            </a:extLst>
-          </p:cNvPr>
+          <p:cNvPr id="2" name="Title 1"/>
           <p:cNvSpPr>
             <a:spLocks noGrp="1"/>
           </p:cNvSpPr>
           <p:nvPr>
-            <p:ph type="title"/>
-          </p:nvPr>
-        </p:nvSpPr>
-        <p:spPr/>
-        <p:txBody>
-          <a:bodyPr/>
-          <a:lstStyle/>
-          <a:p>
-            <a:r>
-              <a:rPr lang="en-US"/>
-              <a:t>Click to edit Master title style</a:t>
+            <p:ph type="title" hasCustomPrompt="1"/>
+          </p:nvPr>
+        </p:nvSpPr>
+        <p:spPr>
+          <a:xfrm>
+            <a:off x="277934" y="295773"/>
+            <a:ext cx="5495544" cy="1143000"/>
+          </a:xfrm>
+          <a:prstGeom prst="rect">
+            <a:avLst/>
+          </a:prstGeom>
+        </p:spPr>
+        <p:txBody>
+          <a:bodyPr anchor="ctr">
+            <a:normAutofit/>
+          </a:bodyPr>
+          <a:lstStyle>
+            <a:lvl1pPr>
+              <a:defRPr sz="3600"/>
+            </a:lvl1pPr>
+          </a:lstStyle>
+          <a:p>
+            <a:r>
+              <a:rPr lang="en-US" dirty="0"/>
+              <a:t>How to use Colors on Charts/Tables</a:t>
             </a:r>
             <a:endParaRPr lang="en-US" dirty="0"/>
           </a:p>
         </p:txBody>
       </p:sp>
-      <p:cxnSp>
-        <p:nvCxnSpPr>
-          <p:cNvPr id="6" name="Straight Connector 5">
-            <a:extLst>
-              <a:ext uri="{FF2B5EF4-FFF2-40B4-BE49-F238E27FC236}">
-                <a16:creationId xmlns:a16="http://schemas.microsoft.com/office/drawing/2014/main" id="{F3EF7B8B-DC7E-A14C-8B53-C948B4015EC6}"/>
-              </a:ext>
-            </a:extLst>
-          </p:cNvPr>
-          <p:cNvCxnSpPr/>
-          <p:nvPr userDrawn="1"/>
-        </p:nvCxnSpPr>
-        <p:spPr>
-          <a:xfrm>
-            <a:off x="406400" y="989880"/>
-            <a:ext cx="711200" cy="0"/>
-          </a:xfrm>
-          <a:prstGeom prst="line">
-            <a:avLst/>
-          </a:prstGeom>
-          <a:ln w="28575">
-            <a:solidFill>
-              <a:srgbClr val="800000"/>
-            </a:solidFill>
-          </a:ln>
-        </p:spPr>
-        <p:style>
-          <a:lnRef idx="1">
-            <a:schemeClr val="accent1"/>
-          </a:lnRef>
-          <a:fillRef idx="0">
-            <a:schemeClr val="accent1"/>
-          </a:fillRef>
-          <a:effectRef idx="0">
-            <a:schemeClr val="accent1"/>
-          </a:effectRef>
-          <a:fontRef idx="minor">
-            <a:schemeClr val="tx1"/>
-          </a:fontRef>
-        </p:style>
-      </p:cxnSp>
-    </p:spTree>
-    <p:extLst>
-      <p:ext uri="{BB962C8B-B14F-4D97-AF65-F5344CB8AC3E}">
-        <p14:creationId xmlns:p14="http://schemas.microsoft.com/office/powerpoint/2010/main" val="428614058"/>
-      </p:ext>
-    </p:extLst>
-  </p:cSld>
-  <p:clrMapOvr>
-    <a:masterClrMapping/>
-  </p:clrMapOvr>
-</p:sldLayout>
-</file>
-
-<file path=ppt/slideLayouts/slideLayout32.xml><?xml version="1.0" encoding="utf-8"?>
-<p:sldLayout xmlns:a="http://schemas.openxmlformats.org/drawingml/2006/main" xmlns:r="http://schemas.openxmlformats.org/officeDocument/2006/relationships" xmlns:p="http://schemas.openxmlformats.org/presentationml/2006/main" showMasterSp="0" preserve="1" userDrawn="1">
-  <p:cSld name="How to use colors">
-    <p:spTree>
-      <p:nvGrpSpPr>
-        <p:cNvPr id="1" name=""/>
-        <p:cNvGrpSpPr/>
-        <p:nvPr/>
-      </p:nvGrpSpPr>
-      <p:grpSpPr>
-        <a:xfrm>
-          <a:off x="0" y="0"/>
-          <a:ext cx="0" cy="0"/>
-          <a:chOff x="0" y="0"/>
-          <a:chExt cx="0" cy="0"/>
-        </a:xfrm>
-      </p:grpSpPr>
-      <p:sp>
-        <p:nvSpPr>
-          <p:cNvPr id="9" name="Rectangle 8">
-            <a:extLst>
-              <a:ext uri="{FF2B5EF4-FFF2-40B4-BE49-F238E27FC236}">
-                <a16:creationId xmlns:a16="http://schemas.microsoft.com/office/drawing/2014/main" id="{BB99C37B-CADC-224E-AFF4-6F5D325F9CED}"/>
-              </a:ext>
-            </a:extLst>
-          </p:cNvPr>
+      <p:sp>
+        <p:nvSpPr>
+          <p:cNvPr id="4" name="Text Placeholder 3"/>
+          <p:cNvSpPr>
+            <a:spLocks noGrp="1"/>
+          </p:cNvSpPr>
+          <p:nvPr>
+            <p:ph type="body" sz="half" idx="2" hasCustomPrompt="1"/>
+          </p:nvPr>
+        </p:nvSpPr>
+        <p:spPr>
+          <a:xfrm>
+            <a:off x="277934" y="2019065"/>
+            <a:ext cx="5498276" cy="3848335"/>
+          </a:xfrm>
+          <a:prstGeom prst="rect">
+            <a:avLst/>
+          </a:prstGeom>
+        </p:spPr>
+        <p:txBody>
+          <a:bodyPr>
+            <a:normAutofit/>
+          </a:bodyPr>
+          <a:lstStyle>
+            <a:lvl1pPr marL="0" indent="0">
+              <a:buNone/>
+              <a:defRPr sz="2800"/>
+            </a:lvl1pPr>
+            <a:lvl2pPr marL="457200" indent="0">
+              <a:buNone/>
+              <a:defRPr sz="1400"/>
+            </a:lvl2pPr>
+            <a:lvl3pPr marL="914400" indent="0">
+              <a:buNone/>
+              <a:defRPr sz="1200"/>
+            </a:lvl3pPr>
+            <a:lvl4pPr marL="1371600" indent="0">
+              <a:buNone/>
+              <a:defRPr sz="1000"/>
+            </a:lvl4pPr>
+            <a:lvl5pPr marL="1828800" indent="0">
+              <a:buNone/>
+              <a:defRPr sz="1000"/>
+            </a:lvl5pPr>
+            <a:lvl6pPr marL="2286000" indent="0">
+              <a:buNone/>
+              <a:defRPr sz="1000"/>
+            </a:lvl6pPr>
+            <a:lvl7pPr marL="2743200" indent="0">
+              <a:buNone/>
+              <a:defRPr sz="1000"/>
+            </a:lvl7pPr>
+            <a:lvl8pPr marL="3200400" indent="0">
+              <a:buNone/>
+              <a:defRPr sz="1000"/>
+            </a:lvl8pPr>
+            <a:lvl9pPr marL="3657600" indent="0">
+              <a:buNone/>
+              <a:defRPr sz="1000"/>
+            </a:lvl9pPr>
+          </a:lstStyle>
+          <a:p>
+            <a:pPr>
+              <a:lnSpc>
+                <a:spcPct val="110000"/>
+              </a:lnSpc>
+            </a:pPr>
+            <a:r>
+              <a:rPr lang="en-US" sz="2800" b="0" dirty="0"/>
+              <a:t>When utilizing a chart, make sure there is enough color contrast between the text and the background color. Review the example on the next slide.</a:t>
+            </a:r>
+            <a:endParaRPr lang="en-US" sz="2800" b="0" dirty="0"/>
+          </a:p>
+        </p:txBody>
+      </p:sp>
+      <p:sp>
+        <p:nvSpPr>
+          <p:cNvPr id="10" name="Rectangle 9"/>
           <p:cNvSpPr/>
           <p:nvPr userDrawn="1"/>
         </p:nvSpPr>
         <p:spPr>
           <a:xfrm>
-            <a:off x="6096000" y="0"/>
-            <a:ext cx="6096000" cy="6208770"/>
+            <a:off x="0" y="6212926"/>
+            <a:ext cx="12192000" cy="645074"/>
           </a:xfrm>
           <a:prstGeom prst="rect">
             <a:avLst/>
           </a:prstGeom>
           <a:solidFill>
-            <a:schemeClr val="bg1"/>
+            <a:srgbClr val="004165"/>
           </a:solidFill>
           <a:ln>
             <a:noFill/>
@@ -8176,202 +7343,14 @@
           </a:p>
         </p:txBody>
       </p:sp>
-      <p:sp>
-        <p:nvSpPr>
-          <p:cNvPr id="2" name="Title 1">
-            <a:extLst>
-              <a:ext uri="{FF2B5EF4-FFF2-40B4-BE49-F238E27FC236}">
-                <a16:creationId xmlns:a16="http://schemas.microsoft.com/office/drawing/2014/main" id="{4F9AD8F0-BA9C-2D49-BEF0-F0A72CC2C305}"/>
-              </a:ext>
-            </a:extLst>
-          </p:cNvPr>
-          <p:cNvSpPr>
-            <a:spLocks noGrp="1"/>
-          </p:cNvSpPr>
-          <p:nvPr>
-            <p:ph type="title" hasCustomPrompt="1"/>
-          </p:nvPr>
-        </p:nvSpPr>
-        <p:spPr>
-          <a:xfrm>
-            <a:off x="277934" y="295773"/>
-            <a:ext cx="5495544" cy="1143000"/>
-          </a:xfrm>
-          <a:prstGeom prst="rect">
-            <a:avLst/>
-          </a:prstGeom>
-        </p:spPr>
-        <p:txBody>
-          <a:bodyPr anchor="ctr">
-            <a:normAutofit/>
-          </a:bodyPr>
-          <a:lstStyle>
-            <a:lvl1pPr>
-              <a:defRPr sz="3600"/>
-            </a:lvl1pPr>
-          </a:lstStyle>
-          <a:p>
-            <a:r>
-              <a:rPr lang="en-US" dirty="0"/>
-              <a:t>How to use Colors on Charts/Tables</a:t>
-            </a:r>
-          </a:p>
-        </p:txBody>
-      </p:sp>
-      <p:sp>
-        <p:nvSpPr>
-          <p:cNvPr id="4" name="Text Placeholder 3">
-            <a:extLst>
-              <a:ext uri="{FF2B5EF4-FFF2-40B4-BE49-F238E27FC236}">
-                <a16:creationId xmlns:a16="http://schemas.microsoft.com/office/drawing/2014/main" id="{AB2026E2-9833-424F-8180-005EEF86E250}"/>
-              </a:ext>
-            </a:extLst>
-          </p:cNvPr>
-          <p:cNvSpPr>
-            <a:spLocks noGrp="1"/>
-          </p:cNvSpPr>
-          <p:nvPr>
-            <p:ph type="body" sz="half" idx="2" hasCustomPrompt="1"/>
-          </p:nvPr>
-        </p:nvSpPr>
-        <p:spPr>
-          <a:xfrm>
-            <a:off x="277934" y="2019065"/>
-            <a:ext cx="5498276" cy="3848335"/>
-          </a:xfrm>
-          <a:prstGeom prst="rect">
-            <a:avLst/>
-          </a:prstGeom>
-        </p:spPr>
-        <p:txBody>
-          <a:bodyPr>
-            <a:normAutofit/>
-          </a:bodyPr>
-          <a:lstStyle>
-            <a:lvl1pPr marL="0" indent="0">
-              <a:buNone/>
-              <a:defRPr sz="2800"/>
-            </a:lvl1pPr>
-            <a:lvl2pPr marL="457200" indent="0">
-              <a:buNone/>
-              <a:defRPr sz="1400"/>
-            </a:lvl2pPr>
-            <a:lvl3pPr marL="914400" indent="0">
-              <a:buNone/>
-              <a:defRPr sz="1200"/>
-            </a:lvl3pPr>
-            <a:lvl4pPr marL="1371600" indent="0">
-              <a:buNone/>
-              <a:defRPr sz="1000"/>
-            </a:lvl4pPr>
-            <a:lvl5pPr marL="1828800" indent="0">
-              <a:buNone/>
-              <a:defRPr sz="1000"/>
-            </a:lvl5pPr>
-            <a:lvl6pPr marL="2286000" indent="0">
-              <a:buNone/>
-              <a:defRPr sz="1000"/>
-            </a:lvl6pPr>
-            <a:lvl7pPr marL="2743200" indent="0">
-              <a:buNone/>
-              <a:defRPr sz="1000"/>
-            </a:lvl7pPr>
-            <a:lvl8pPr marL="3200400" indent="0">
-              <a:buNone/>
-              <a:defRPr sz="1000"/>
-            </a:lvl8pPr>
-            <a:lvl9pPr marL="3657600" indent="0">
-              <a:buNone/>
-              <a:defRPr sz="1000"/>
-            </a:lvl9pPr>
-          </a:lstStyle>
-          <a:p>
-            <a:pPr>
-              <a:lnSpc>
-                <a:spcPct val="110000"/>
-              </a:lnSpc>
-            </a:pPr>
-            <a:r>
-              <a:rPr lang="en-US" sz="2800" b="0" dirty="0"/>
-              <a:t>When utilizing a chart, make sure there is enough color contrast between the text and the background color. Review the example on the next slide.</a:t>
-            </a:r>
-          </a:p>
-        </p:txBody>
-      </p:sp>
-      <p:sp>
-        <p:nvSpPr>
-          <p:cNvPr id="10" name="Rectangle 9">
-            <a:extLst>
-              <a:ext uri="{FF2B5EF4-FFF2-40B4-BE49-F238E27FC236}">
-                <a16:creationId xmlns:a16="http://schemas.microsoft.com/office/drawing/2014/main" id="{3A3057B3-0FA6-1247-A5B1-98999B22F4C8}"/>
-              </a:ext>
-            </a:extLst>
-          </p:cNvPr>
-          <p:cNvSpPr/>
-          <p:nvPr userDrawn="1"/>
-        </p:nvSpPr>
-        <p:spPr>
-          <a:xfrm>
-            <a:off x="0" y="6212926"/>
-            <a:ext cx="12192000" cy="645074"/>
-          </a:xfrm>
-          <a:prstGeom prst="rect">
-            <a:avLst/>
-          </a:prstGeom>
-          <a:solidFill>
-            <a:srgbClr val="004165"/>
-          </a:solidFill>
-          <a:ln>
-            <a:noFill/>
-          </a:ln>
-        </p:spPr>
-        <p:style>
-          <a:lnRef idx="2">
-            <a:schemeClr val="accent1">
-              <a:shade val="50000"/>
-            </a:schemeClr>
-          </a:lnRef>
-          <a:fillRef idx="1">
-            <a:schemeClr val="accent1"/>
-          </a:fillRef>
-          <a:effectRef idx="0">
-            <a:schemeClr val="accent1"/>
-          </a:effectRef>
-          <a:fontRef idx="minor">
-            <a:schemeClr val="lt1"/>
-          </a:fontRef>
-        </p:style>
-        <p:txBody>
-          <a:bodyPr rtlCol="0" anchor="ctr"/>
-          <a:lstStyle/>
-          <a:p>
-            <a:pPr algn="ctr"/>
-            <a:endParaRPr lang="en-US"/>
-          </a:p>
-        </p:txBody>
-      </p:sp>
       <p:pic>
         <p:nvPicPr>
-          <p:cNvPr id="11" name="Picture 10">
-            <a:extLst>
-              <a:ext uri="{FF2B5EF4-FFF2-40B4-BE49-F238E27FC236}">
-                <a16:creationId xmlns:a16="http://schemas.microsoft.com/office/drawing/2014/main" id="{25D6B0BF-536F-B648-9FED-043275D46675}"/>
-              </a:ext>
-            </a:extLst>
-          </p:cNvPr>
-          <p:cNvPicPr>
-            <a:picLocks/>
-          </p:cNvPicPr>
+          <p:cNvPr id="11" name="Picture 10"/>
+          <p:cNvPicPr/>
           <p:nvPr userDrawn="1"/>
         </p:nvPicPr>
         <p:blipFill>
-          <a:blip r:embed="rId2" cstate="email">
-            <a:extLst>
-              <a:ext uri="{28A0092B-C50C-407E-A947-70E740481C1C}">
-                <a14:useLocalDpi xmlns:a14="http://schemas.microsoft.com/office/drawing/2010/main"/>
-              </a:ext>
-            </a:extLst>
-          </a:blip>
+          <a:blip r:embed="rId2" cstate="email"/>
           <a:stretch>
             <a:fillRect/>
           </a:stretch>
@@ -8388,13 +7367,7 @@
       </p:pic>
       <p:cxnSp>
         <p:nvCxnSpPr>
-          <p:cNvPr id="14" name="Straight Connector 13">
-            <a:extLst>
-              <a:ext uri="{FF2B5EF4-FFF2-40B4-BE49-F238E27FC236}">
-                <a16:creationId xmlns:a16="http://schemas.microsoft.com/office/drawing/2014/main" id="{8AD59A93-E94D-0445-9D55-67EBAACB4771}"/>
-              </a:ext>
-            </a:extLst>
-          </p:cNvPr>
+          <p:cNvPr id="14" name="Straight Connector 13"/>
           <p:cNvCxnSpPr/>
           <p:nvPr userDrawn="1"/>
         </p:nvCxnSpPr>
@@ -8429,13 +7402,7 @@
       </p:cxnSp>
       <p:grpSp>
         <p:nvGrpSpPr>
-          <p:cNvPr id="13" name="Group 12">
-            <a:extLst>
-              <a:ext uri="{FF2B5EF4-FFF2-40B4-BE49-F238E27FC236}">
-                <a16:creationId xmlns:a16="http://schemas.microsoft.com/office/drawing/2014/main" id="{5081AD1C-9BAD-504D-A94E-B572CF6BB330}"/>
-              </a:ext>
-            </a:extLst>
-          </p:cNvPr>
+          <p:cNvPr id="13" name="Group 12"/>
           <p:cNvGrpSpPr/>
           <p:nvPr userDrawn="1"/>
         </p:nvGrpSpPr>
@@ -8449,13 +7416,7 @@
         </p:grpSpPr>
         <p:sp>
           <p:nvSpPr>
-            <p:cNvPr id="15" name="Rectangle 14">
-              <a:extLst>
-                <a:ext uri="{FF2B5EF4-FFF2-40B4-BE49-F238E27FC236}">
-                  <a16:creationId xmlns:a16="http://schemas.microsoft.com/office/drawing/2014/main" id="{C24C0F28-DFB4-FB48-B1BA-69CBD0ECB0DE}"/>
-                </a:ext>
-              </a:extLst>
-            </p:cNvPr>
+            <p:cNvPr id="15" name="Rectangle 14"/>
             <p:cNvSpPr/>
             <p:nvPr userDrawn="1"/>
           </p:nvSpPr>
@@ -8501,13 +7462,7 @@
         </p:sp>
         <p:sp>
           <p:nvSpPr>
-            <p:cNvPr id="16" name="Rectangle 15">
-              <a:extLst>
-                <a:ext uri="{FF2B5EF4-FFF2-40B4-BE49-F238E27FC236}">
-                  <a16:creationId xmlns:a16="http://schemas.microsoft.com/office/drawing/2014/main" id="{2CC55AFF-0CD7-6E47-9CE6-AD24C7E762D1}"/>
-                </a:ext>
-              </a:extLst>
-            </p:cNvPr>
+            <p:cNvPr id="16" name="Rectangle 15"/>
             <p:cNvSpPr/>
             <p:nvPr userDrawn="1"/>
           </p:nvSpPr>
@@ -8553,13 +7508,7 @@
         </p:sp>
         <p:sp>
           <p:nvSpPr>
-            <p:cNvPr id="17" name="Rectangle 16">
-              <a:extLst>
-                <a:ext uri="{FF2B5EF4-FFF2-40B4-BE49-F238E27FC236}">
-                  <a16:creationId xmlns:a16="http://schemas.microsoft.com/office/drawing/2014/main" id="{EAF0F4FD-D576-DB44-882A-074F220CF31B}"/>
-                </a:ext>
-              </a:extLst>
-            </p:cNvPr>
+            <p:cNvPr id="17" name="Rectangle 16"/>
             <p:cNvSpPr/>
             <p:nvPr userDrawn="1"/>
           </p:nvSpPr>
@@ -8605,13 +7554,7 @@
         </p:sp>
         <p:sp>
           <p:nvSpPr>
-            <p:cNvPr id="18" name="Rectangle 17">
-              <a:extLst>
-                <a:ext uri="{FF2B5EF4-FFF2-40B4-BE49-F238E27FC236}">
-                  <a16:creationId xmlns:a16="http://schemas.microsoft.com/office/drawing/2014/main" id="{5F15AC36-03F4-7F46-B01D-5A11BD0A6A94}"/>
-                </a:ext>
-              </a:extLst>
-            </p:cNvPr>
+            <p:cNvPr id="18" name="Rectangle 17"/>
             <p:cNvSpPr/>
             <p:nvPr userDrawn="1"/>
           </p:nvSpPr>
@@ -8657,13 +7600,7 @@
         </p:sp>
         <p:sp>
           <p:nvSpPr>
-            <p:cNvPr id="19" name="Rectangle 18">
-              <a:extLst>
-                <a:ext uri="{FF2B5EF4-FFF2-40B4-BE49-F238E27FC236}">
-                  <a16:creationId xmlns:a16="http://schemas.microsoft.com/office/drawing/2014/main" id="{B6527A42-9DFA-1A41-9DD3-25755BEA8387}"/>
-                </a:ext>
-              </a:extLst>
-            </p:cNvPr>
+            <p:cNvPr id="19" name="Rectangle 18"/>
             <p:cNvSpPr/>
             <p:nvPr userDrawn="1"/>
           </p:nvSpPr>
@@ -8709,16 +7646,8 @@
         </p:sp>
         <p:sp>
           <p:nvSpPr>
-            <p:cNvPr id="20" name="Title 1">
-              <a:extLst>
-                <a:ext uri="{FF2B5EF4-FFF2-40B4-BE49-F238E27FC236}">
-                  <a16:creationId xmlns:a16="http://schemas.microsoft.com/office/drawing/2014/main" id="{F82D3875-578C-9849-9094-D12B6FE410F6}"/>
-                </a:ext>
-              </a:extLst>
-            </p:cNvPr>
-            <p:cNvSpPr txBox="1">
-              <a:spLocks/>
-            </p:cNvSpPr>
+            <p:cNvPr id="20" name="Title 1"/>
+            <p:cNvSpPr txBox="1"/>
             <p:nvPr userDrawn="1"/>
           </p:nvSpPr>
           <p:spPr>
@@ -8742,7 +7671,7 @@
                 <a:spcBef>
                   <a:spcPct val="0"/>
                 </a:spcBef>
-                <a:buFont typeface="Arial" panose="020B0604020202020204" pitchFamily="34" charset="0"/>
+                <a:buFont typeface="Arial" panose="020B0604020202090204" pitchFamily="34" charset="0"/>
                 <a:buNone/>
                 <a:defRPr sz="3600" b="1" kern="1200">
                   <a:solidFill>
@@ -8760,21 +7689,14 @@
                 <a:rPr lang="en-US" sz="1800" b="1" dirty="0"/>
                 <a:t>1</a:t>
               </a:r>
+              <a:endParaRPr lang="en-US" sz="1800" b="1" dirty="0"/>
             </a:p>
           </p:txBody>
         </p:sp>
         <p:sp>
           <p:nvSpPr>
-            <p:cNvPr id="21" name="Title 1">
-              <a:extLst>
-                <a:ext uri="{FF2B5EF4-FFF2-40B4-BE49-F238E27FC236}">
-                  <a16:creationId xmlns:a16="http://schemas.microsoft.com/office/drawing/2014/main" id="{C6DB5269-9F92-124F-9EFB-0B5E49CFC12C}"/>
-                </a:ext>
-              </a:extLst>
-            </p:cNvPr>
-            <p:cNvSpPr txBox="1">
-              <a:spLocks/>
-            </p:cNvSpPr>
+            <p:cNvPr id="21" name="Title 1"/>
+            <p:cNvSpPr txBox="1"/>
             <p:nvPr userDrawn="1"/>
           </p:nvSpPr>
           <p:spPr>
@@ -8798,7 +7720,7 @@
                 <a:spcBef>
                   <a:spcPct val="0"/>
                 </a:spcBef>
-                <a:buFont typeface="Arial" panose="020B0604020202020204" pitchFamily="34" charset="0"/>
+                <a:buFont typeface="Arial" panose="020B0604020202090204" pitchFamily="34" charset="0"/>
                 <a:buNone/>
                 <a:defRPr sz="3600" b="1" kern="1200">
                   <a:solidFill>
@@ -8816,21 +7738,14 @@
                 <a:rPr lang="en-US" sz="1800" b="1" dirty="0"/>
                 <a:t>2</a:t>
               </a:r>
+              <a:endParaRPr lang="en-US" sz="1800" b="1" dirty="0"/>
             </a:p>
           </p:txBody>
         </p:sp>
         <p:sp>
           <p:nvSpPr>
-            <p:cNvPr id="22" name="Title 1">
-              <a:extLst>
-                <a:ext uri="{FF2B5EF4-FFF2-40B4-BE49-F238E27FC236}">
-                  <a16:creationId xmlns:a16="http://schemas.microsoft.com/office/drawing/2014/main" id="{3DF9AC09-C32F-7848-A0E3-9D5E9CA98006}"/>
-                </a:ext>
-              </a:extLst>
-            </p:cNvPr>
-            <p:cNvSpPr txBox="1">
-              <a:spLocks/>
-            </p:cNvSpPr>
+            <p:cNvPr id="22" name="Title 1"/>
+            <p:cNvSpPr txBox="1"/>
             <p:nvPr userDrawn="1"/>
           </p:nvSpPr>
           <p:spPr>
@@ -8854,7 +7769,7 @@
                 <a:spcBef>
                   <a:spcPct val="0"/>
                 </a:spcBef>
-                <a:buFont typeface="Arial" panose="020B0604020202020204" pitchFamily="34" charset="0"/>
+                <a:buFont typeface="Arial" panose="020B0604020202090204" pitchFamily="34" charset="0"/>
                 <a:buNone/>
                 <a:defRPr sz="3600" b="1" kern="1200">
                   <a:solidFill>
@@ -8876,21 +7791,18 @@
                 </a:rPr>
                 <a:t>3</a:t>
               </a:r>
+              <a:endParaRPr lang="en-US" sz="1800" b="1" dirty="0">
+                <a:solidFill>
+                  <a:schemeClr val="bg1"/>
+                </a:solidFill>
+              </a:endParaRPr>
             </a:p>
           </p:txBody>
         </p:sp>
         <p:sp>
           <p:nvSpPr>
-            <p:cNvPr id="23" name="Title 1">
-              <a:extLst>
-                <a:ext uri="{FF2B5EF4-FFF2-40B4-BE49-F238E27FC236}">
-                  <a16:creationId xmlns:a16="http://schemas.microsoft.com/office/drawing/2014/main" id="{FCFA7C4A-3612-C345-A189-543B61F29B61}"/>
-                </a:ext>
-              </a:extLst>
-            </p:cNvPr>
-            <p:cNvSpPr txBox="1">
-              <a:spLocks/>
-            </p:cNvSpPr>
+            <p:cNvPr id="23" name="Title 1"/>
+            <p:cNvSpPr txBox="1"/>
             <p:nvPr userDrawn="1"/>
           </p:nvSpPr>
           <p:spPr>
@@ -8914,7 +7826,7 @@
                 <a:spcBef>
                   <a:spcPct val="0"/>
                 </a:spcBef>
-                <a:buFont typeface="Arial" panose="020B0604020202020204" pitchFamily="34" charset="0"/>
+                <a:buFont typeface="Arial" panose="020B0604020202090204" pitchFamily="34" charset="0"/>
                 <a:buNone/>
                 <a:defRPr sz="3600" b="1" kern="1200">
                   <a:solidFill>
@@ -8936,21 +7848,18 @@
                 </a:rPr>
                 <a:t>4</a:t>
               </a:r>
+              <a:endParaRPr lang="en-US" sz="1800" b="1" dirty="0">
+                <a:solidFill>
+                  <a:schemeClr val="bg1"/>
+                </a:solidFill>
+              </a:endParaRPr>
             </a:p>
           </p:txBody>
         </p:sp>
         <p:sp>
           <p:nvSpPr>
-            <p:cNvPr id="24" name="Title 1">
-              <a:extLst>
-                <a:ext uri="{FF2B5EF4-FFF2-40B4-BE49-F238E27FC236}">
-                  <a16:creationId xmlns:a16="http://schemas.microsoft.com/office/drawing/2014/main" id="{342C6220-558E-134C-ADB9-621C3F5FC88D}"/>
-                </a:ext>
-              </a:extLst>
-            </p:cNvPr>
-            <p:cNvSpPr txBox="1">
-              <a:spLocks/>
-            </p:cNvSpPr>
+            <p:cNvPr id="24" name="Title 1"/>
+            <p:cNvSpPr txBox="1"/>
             <p:nvPr userDrawn="1"/>
           </p:nvSpPr>
           <p:spPr>
@@ -8974,7 +7883,7 @@
                 <a:spcBef>
                   <a:spcPct val="0"/>
                 </a:spcBef>
-                <a:buFont typeface="Arial" panose="020B0604020202020204" pitchFamily="34" charset="0"/>
+                <a:buFont typeface="Arial" panose="020B0604020202090204" pitchFamily="34" charset="0"/>
                 <a:buNone/>
                 <a:defRPr sz="3600" b="1" kern="1200">
                   <a:solidFill>
@@ -8996,19 +7905,18 @@
                 </a:rPr>
                 <a:t>5</a:t>
               </a:r>
+              <a:endParaRPr lang="en-US" sz="1800" b="1" dirty="0">
+                <a:solidFill>
+                  <a:schemeClr val="bg1"/>
+                </a:solidFill>
+              </a:endParaRPr>
             </a:p>
           </p:txBody>
         </p:sp>
       </p:grpSp>
       <p:grpSp>
         <p:nvGrpSpPr>
-          <p:cNvPr id="25" name="Group 24">
-            <a:extLst>
-              <a:ext uri="{FF2B5EF4-FFF2-40B4-BE49-F238E27FC236}">
-                <a16:creationId xmlns:a16="http://schemas.microsoft.com/office/drawing/2014/main" id="{7226A98E-0B3B-D649-B831-8ECA3D5D07AC}"/>
-              </a:ext>
-            </a:extLst>
-          </p:cNvPr>
+          <p:cNvPr id="25" name="Group 24"/>
           <p:cNvGrpSpPr/>
           <p:nvPr userDrawn="1"/>
         </p:nvGrpSpPr>
@@ -9022,13 +7930,7 @@
         </p:grpSpPr>
         <p:sp>
           <p:nvSpPr>
-            <p:cNvPr id="26" name="Rectangle 25">
-              <a:extLst>
-                <a:ext uri="{FF2B5EF4-FFF2-40B4-BE49-F238E27FC236}">
-                  <a16:creationId xmlns:a16="http://schemas.microsoft.com/office/drawing/2014/main" id="{5566CF8A-D4B7-0640-8565-D3974191389E}"/>
-                </a:ext>
-              </a:extLst>
-            </p:cNvPr>
+            <p:cNvPr id="26" name="Rectangle 25"/>
             <p:cNvSpPr/>
             <p:nvPr userDrawn="1"/>
           </p:nvSpPr>
@@ -9074,13 +7976,7 @@
         </p:sp>
         <p:sp>
           <p:nvSpPr>
-            <p:cNvPr id="27" name="Rectangle 26">
-              <a:extLst>
-                <a:ext uri="{FF2B5EF4-FFF2-40B4-BE49-F238E27FC236}">
-                  <a16:creationId xmlns:a16="http://schemas.microsoft.com/office/drawing/2014/main" id="{370E2D77-3B55-5242-B380-4175817554C0}"/>
-                </a:ext>
-              </a:extLst>
-            </p:cNvPr>
+            <p:cNvPr id="27" name="Rectangle 26"/>
             <p:cNvSpPr/>
             <p:nvPr userDrawn="1"/>
           </p:nvSpPr>
@@ -9126,13 +8022,7 @@
         </p:sp>
         <p:sp>
           <p:nvSpPr>
-            <p:cNvPr id="28" name="Rectangle 27">
-              <a:extLst>
-                <a:ext uri="{FF2B5EF4-FFF2-40B4-BE49-F238E27FC236}">
-                  <a16:creationId xmlns:a16="http://schemas.microsoft.com/office/drawing/2014/main" id="{12BD00BB-9D42-6243-9736-8E9F8874AA73}"/>
-                </a:ext>
-              </a:extLst>
-            </p:cNvPr>
+            <p:cNvPr id="28" name="Rectangle 27"/>
             <p:cNvSpPr/>
             <p:nvPr userDrawn="1"/>
           </p:nvSpPr>
@@ -9178,13 +8068,7 @@
         </p:sp>
         <p:sp>
           <p:nvSpPr>
-            <p:cNvPr id="29" name="Rectangle 28">
-              <a:extLst>
-                <a:ext uri="{FF2B5EF4-FFF2-40B4-BE49-F238E27FC236}">
-                  <a16:creationId xmlns:a16="http://schemas.microsoft.com/office/drawing/2014/main" id="{8AFEEF79-D422-7B44-8963-650D1FCB8CAE}"/>
-                </a:ext>
-              </a:extLst>
-            </p:cNvPr>
+            <p:cNvPr id="29" name="Rectangle 28"/>
             <p:cNvSpPr/>
             <p:nvPr userDrawn="1"/>
           </p:nvSpPr>
@@ -9230,13 +8114,7 @@
         </p:sp>
         <p:sp>
           <p:nvSpPr>
-            <p:cNvPr id="30" name="Rectangle 29">
-              <a:extLst>
-                <a:ext uri="{FF2B5EF4-FFF2-40B4-BE49-F238E27FC236}">
-                  <a16:creationId xmlns:a16="http://schemas.microsoft.com/office/drawing/2014/main" id="{657089A6-0701-4840-8598-9AAA5958F3F3}"/>
-                </a:ext>
-              </a:extLst>
-            </p:cNvPr>
+            <p:cNvPr id="30" name="Rectangle 29"/>
             <p:cNvSpPr/>
             <p:nvPr userDrawn="1"/>
           </p:nvSpPr>
@@ -9282,16 +8160,8 @@
         </p:sp>
         <p:sp>
           <p:nvSpPr>
-            <p:cNvPr id="31" name="Title 1">
-              <a:extLst>
-                <a:ext uri="{FF2B5EF4-FFF2-40B4-BE49-F238E27FC236}">
-                  <a16:creationId xmlns:a16="http://schemas.microsoft.com/office/drawing/2014/main" id="{AE711AD8-A200-934D-BA4B-F4C6307321AF}"/>
-                </a:ext>
-              </a:extLst>
-            </p:cNvPr>
-            <p:cNvSpPr txBox="1">
-              <a:spLocks/>
-            </p:cNvSpPr>
+            <p:cNvPr id="31" name="Title 1"/>
+            <p:cNvSpPr txBox="1"/>
             <p:nvPr userDrawn="1"/>
           </p:nvSpPr>
           <p:spPr>
@@ -9315,7 +8185,7 @@
                 <a:spcBef>
                   <a:spcPct val="0"/>
                 </a:spcBef>
-                <a:buFont typeface="Arial" panose="020B0604020202020204" pitchFamily="34" charset="0"/>
+                <a:buFont typeface="Arial" panose="020B0604020202090204" pitchFamily="34" charset="0"/>
                 <a:buNone/>
                 <a:defRPr sz="3600" b="1" kern="1200">
                   <a:solidFill>
@@ -9333,21 +8203,14 @@
                 <a:rPr lang="en-US" sz="1800" b="1" dirty="0"/>
                 <a:t>1</a:t>
               </a:r>
+              <a:endParaRPr lang="en-US" sz="1800" b="1" dirty="0"/>
             </a:p>
           </p:txBody>
         </p:sp>
         <p:sp>
           <p:nvSpPr>
-            <p:cNvPr id="32" name="Title 1">
-              <a:extLst>
-                <a:ext uri="{FF2B5EF4-FFF2-40B4-BE49-F238E27FC236}">
-                  <a16:creationId xmlns:a16="http://schemas.microsoft.com/office/drawing/2014/main" id="{DD72198E-3F55-524E-9B45-1E7C4E571496}"/>
-                </a:ext>
-              </a:extLst>
-            </p:cNvPr>
-            <p:cNvSpPr txBox="1">
-              <a:spLocks/>
-            </p:cNvSpPr>
+            <p:cNvPr id="32" name="Title 1"/>
+            <p:cNvSpPr txBox="1"/>
             <p:nvPr userDrawn="1"/>
           </p:nvSpPr>
           <p:spPr>
@@ -9371,7 +8234,7 @@
                 <a:spcBef>
                   <a:spcPct val="0"/>
                 </a:spcBef>
-                <a:buFont typeface="Arial" panose="020B0604020202020204" pitchFamily="34" charset="0"/>
+                <a:buFont typeface="Arial" panose="020B0604020202090204" pitchFamily="34" charset="0"/>
                 <a:buNone/>
                 <a:defRPr sz="3600" b="1" kern="1200">
                   <a:solidFill>
@@ -9389,21 +8252,14 @@
                 <a:rPr lang="en-US" sz="1800" b="1" dirty="0"/>
                 <a:t>2</a:t>
               </a:r>
+              <a:endParaRPr lang="en-US" sz="1800" b="1" dirty="0"/>
             </a:p>
           </p:txBody>
         </p:sp>
         <p:sp>
           <p:nvSpPr>
-            <p:cNvPr id="33" name="Title 1">
-              <a:extLst>
-                <a:ext uri="{FF2B5EF4-FFF2-40B4-BE49-F238E27FC236}">
-                  <a16:creationId xmlns:a16="http://schemas.microsoft.com/office/drawing/2014/main" id="{D4572998-3193-9748-BC2F-A847C2A2FD41}"/>
-                </a:ext>
-              </a:extLst>
-            </p:cNvPr>
-            <p:cNvSpPr txBox="1">
-              <a:spLocks/>
-            </p:cNvSpPr>
+            <p:cNvPr id="33" name="Title 1"/>
+            <p:cNvSpPr txBox="1"/>
             <p:nvPr userDrawn="1"/>
           </p:nvSpPr>
           <p:spPr>
@@ -9427,7 +8283,7 @@
                 <a:spcBef>
                   <a:spcPct val="0"/>
                 </a:spcBef>
-                <a:buFont typeface="Arial" panose="020B0604020202020204" pitchFamily="34" charset="0"/>
+                <a:buFont typeface="Arial" panose="020B0604020202090204" pitchFamily="34" charset="0"/>
                 <a:buNone/>
                 <a:defRPr sz="3600" b="1" kern="1200">
                   <a:solidFill>
@@ -9449,21 +8305,18 @@
                 </a:rPr>
                 <a:t>3</a:t>
               </a:r>
+              <a:endParaRPr lang="en-US" sz="1800" b="1" dirty="0">
+                <a:solidFill>
+                  <a:schemeClr val="bg1"/>
+                </a:solidFill>
+              </a:endParaRPr>
             </a:p>
           </p:txBody>
         </p:sp>
         <p:sp>
           <p:nvSpPr>
-            <p:cNvPr id="34" name="Title 1">
-              <a:extLst>
-                <a:ext uri="{FF2B5EF4-FFF2-40B4-BE49-F238E27FC236}">
-                  <a16:creationId xmlns:a16="http://schemas.microsoft.com/office/drawing/2014/main" id="{DD2B0AB2-F8FE-344E-B643-8D6D9718EF9D}"/>
-                </a:ext>
-              </a:extLst>
-            </p:cNvPr>
-            <p:cNvSpPr txBox="1">
-              <a:spLocks/>
-            </p:cNvSpPr>
+            <p:cNvPr id="34" name="Title 1"/>
+            <p:cNvSpPr txBox="1"/>
             <p:nvPr userDrawn="1"/>
           </p:nvSpPr>
           <p:spPr>
@@ -9487,7 +8340,7 @@
                 <a:spcBef>
                   <a:spcPct val="0"/>
                 </a:spcBef>
-                <a:buFont typeface="Arial" panose="020B0604020202020204" pitchFamily="34" charset="0"/>
+                <a:buFont typeface="Arial" panose="020B0604020202090204" pitchFamily="34" charset="0"/>
                 <a:buNone/>
                 <a:defRPr sz="3600" b="1" kern="1200">
                   <a:solidFill>
@@ -9509,21 +8362,18 @@
                 </a:rPr>
                 <a:t>4</a:t>
               </a:r>
+              <a:endParaRPr lang="en-US" sz="1800" b="1" dirty="0">
+                <a:solidFill>
+                  <a:schemeClr val="bg1"/>
+                </a:solidFill>
+              </a:endParaRPr>
             </a:p>
           </p:txBody>
         </p:sp>
         <p:sp>
           <p:nvSpPr>
-            <p:cNvPr id="35" name="Title 1">
-              <a:extLst>
-                <a:ext uri="{FF2B5EF4-FFF2-40B4-BE49-F238E27FC236}">
-                  <a16:creationId xmlns:a16="http://schemas.microsoft.com/office/drawing/2014/main" id="{23C15460-6F14-C946-A23F-08B4721FF79A}"/>
-                </a:ext>
-              </a:extLst>
-            </p:cNvPr>
-            <p:cNvSpPr txBox="1">
-              <a:spLocks/>
-            </p:cNvSpPr>
+            <p:cNvPr id="35" name="Title 1"/>
+            <p:cNvSpPr txBox="1"/>
             <p:nvPr userDrawn="1"/>
           </p:nvSpPr>
           <p:spPr>
@@ -9547,7 +8397,7 @@
                 <a:spcBef>
                   <a:spcPct val="0"/>
                 </a:spcBef>
-                <a:buFont typeface="Arial" panose="020B0604020202020204" pitchFamily="34" charset="0"/>
+                <a:buFont typeface="Arial" panose="020B0604020202090204" pitchFamily="34" charset="0"/>
                 <a:buNone/>
                 <a:defRPr sz="3600" b="1" kern="1200">
                   <a:solidFill>
@@ -9569,19 +8419,18 @@
                 </a:rPr>
                 <a:t>5</a:t>
               </a:r>
+              <a:endParaRPr lang="en-US" sz="1800" b="1" dirty="0">
+                <a:solidFill>
+                  <a:schemeClr val="bg1"/>
+                </a:solidFill>
+              </a:endParaRPr>
             </a:p>
           </p:txBody>
         </p:sp>
       </p:grpSp>
       <p:sp>
         <p:nvSpPr>
-          <p:cNvPr id="7" name="TextBox 6">
-            <a:extLst>
-              <a:ext uri="{FF2B5EF4-FFF2-40B4-BE49-F238E27FC236}">
-                <a16:creationId xmlns:a16="http://schemas.microsoft.com/office/drawing/2014/main" id="{559D9239-BCD2-0A4E-8663-64AA8D579F28}"/>
-              </a:ext>
-            </a:extLst>
-          </p:cNvPr>
+          <p:cNvPr id="7" name="TextBox 6"/>
           <p:cNvSpPr txBox="1"/>
           <p:nvPr userDrawn="1"/>
         </p:nvSpPr>
@@ -9608,7 +8457,7 @@
               <a:spcAft>
                 <a:spcPts val="1200"/>
               </a:spcAft>
-              <a:buFont typeface="Arial" panose="020B0604020202020204" pitchFamily="34" charset="0"/>
+              <a:buFont typeface="Arial" panose="020B0604020202090204" pitchFamily="34" charset="0"/>
               <a:buChar char="•"/>
             </a:pPr>
             <a:r>
@@ -9623,6 +8472,7 @@
               <a:rPr lang="en-US" sz="1800" b="0" dirty="0"/>
               <a:t>.</a:t>
             </a:r>
+            <a:endParaRPr lang="en-US" sz="1800" b="0" dirty="0"/>
           </a:p>
           <a:p>
             <a:pPr marL="285750" indent="-285750">
@@ -9632,7 +8482,7 @@
               <a:spcAft>
                 <a:spcPts val="1200"/>
               </a:spcAft>
-              <a:buFont typeface="Arial" panose="020B0604020202020204" pitchFamily="34" charset="0"/>
+              <a:buFont typeface="Arial" panose="020B0604020202090204" pitchFamily="34" charset="0"/>
               <a:buChar char="•"/>
             </a:pPr>
             <a:r>
@@ -9647,6 +8497,7 @@
               <a:rPr lang="en-US" sz="1800" b="0" dirty="0"/>
               <a:t>(when used on background colors, for best accessibility).</a:t>
             </a:r>
+            <a:endParaRPr lang="en-US" sz="1800" b="0" dirty="0"/>
           </a:p>
           <a:p>
             <a:pPr marL="285750" indent="-285750">
@@ -9656,7 +8507,7 @@
               <a:spcAft>
                 <a:spcPts val="1200"/>
               </a:spcAft>
-              <a:buFont typeface="Arial" panose="020B0604020202020204" pitchFamily="34" charset="0"/>
+              <a:buFont typeface="Arial" panose="020B0604020202090204" pitchFamily="34" charset="0"/>
               <a:buChar char="•"/>
             </a:pPr>
             <a:r>
@@ -9665,8 +8516,8 @@
             </a:r>
             <a:r>
               <a:rPr lang="en-US" sz="1800" b="1" i="0" dirty="0">
-                <a:latin typeface="Arial" panose="020B0604020202020204" pitchFamily="34" charset="0"/>
-                <a:cs typeface="Arial" panose="020B0604020202020204" pitchFamily="34" charset="0"/>
+                <a:latin typeface="Arial" panose="020B0604020202090204" pitchFamily="34" charset="0"/>
+                <a:cs typeface="Arial" panose="020B0604020202090204" pitchFamily="34" charset="0"/>
               </a:rPr>
               <a:t>#333333 </a:t>
             </a:r>
@@ -9674,6 +8525,7 @@
               <a:rPr lang="en-US" sz="1800" b="0" dirty="0"/>
               <a:t>Text color on Accent 1 and Accent 2. </a:t>
             </a:r>
+            <a:endParaRPr lang="en-US" sz="1800" b="0" dirty="0"/>
           </a:p>
           <a:p>
             <a:pPr marL="285750" indent="-285750">
@@ -9683,7 +8535,7 @@
               <a:spcAft>
                 <a:spcPts val="1200"/>
               </a:spcAft>
-              <a:buFont typeface="Arial" panose="020B0604020202020204" pitchFamily="34" charset="0"/>
+              <a:buFont typeface="Arial" panose="020B0604020202090204" pitchFamily="34" charset="0"/>
               <a:buChar char="•"/>
             </a:pPr>
             <a:r>
@@ -9705,18 +8557,13 @@
               <a:rPr lang="en-US" sz="1800" b="0" dirty="0"/>
               <a:t>on Accent 3, Accent 4, and Accent 5.</a:t>
             </a:r>
-          </a:p>
-        </p:txBody>
-      </p:sp>
-      <p:sp>
-        <p:nvSpPr>
-          <p:cNvPr id="36" name="Slide Number Placeholder 14">
-            <a:extLst>
-              <a:ext uri="{FF2B5EF4-FFF2-40B4-BE49-F238E27FC236}">
-                <a16:creationId xmlns:a16="http://schemas.microsoft.com/office/drawing/2014/main" id="{D2C14E01-4C90-EF4B-979D-86C4EB40D0CE}"/>
-              </a:ext>
-            </a:extLst>
-          </p:cNvPr>
+            <a:endParaRPr lang="en-US" sz="1800" b="0" dirty="0"/>
+          </a:p>
+        </p:txBody>
+      </p:sp>
+      <p:sp>
+        <p:nvSpPr>
+          <p:cNvPr id="36" name="Slide Number Placeholder 14"/>
           <p:cNvSpPr>
             <a:spLocks noGrp="1"/>
           </p:cNvSpPr>
@@ -9747,19 +8594,12 @@
           <a:p>
             <a:fld id="{B15CCACC-6213-F14B-B40D-407BFF938B14}" type="slidenum">
               <a:rPr lang="en-US" smtClean="0"/>
-              <a:pPr/>
-              <a:t>‹#›</a:t>
             </a:fld>
             <a:endParaRPr lang="en-US" dirty="0"/>
           </a:p>
         </p:txBody>
       </p:sp>
     </p:spTree>
-    <p:extLst>
-      <p:ext uri="{BB962C8B-B14F-4D97-AF65-F5344CB8AC3E}">
-        <p14:creationId xmlns:p14="http://schemas.microsoft.com/office/powerpoint/2010/main" val="1029063995"/>
-      </p:ext>
-    </p:extLst>
   </p:cSld>
   <p:clrMapOvr>
     <a:masterClrMapping/>
@@ -9767,7 +8607,7 @@
 </p:sldLayout>
 </file>
 
-<file path=ppt/slideLayouts/slideLayout33.xml><?xml version="1.0" encoding="utf-8"?>
+<file path=ppt/slideLayouts/slideLayout32.xml><?xml version="1.0" encoding="utf-8"?>
 <p:sldLayout xmlns:a="http://schemas.openxmlformats.org/drawingml/2006/main" xmlns:r="http://schemas.openxmlformats.org/officeDocument/2006/relationships" xmlns:p="http://schemas.openxmlformats.org/presentationml/2006/main" showMasterSp="0" userDrawn="1">
   <p:cSld name="Title Slide-dark bkgd">
     <p:bg>
@@ -9775,11 +8615,6 @@
         <a:blipFill dpi="0" rotWithShape="1">
           <a:blip r:embed="rId2" cstate="email">
             <a:lum/>
-            <a:extLst>
-              <a:ext uri="{28A0092B-C50C-407E-A947-70E740481C1C}">
-                <a14:useLocalDpi xmlns:a14="http://schemas.microsoft.com/office/drawing/2010/main"/>
-              </a:ext>
-            </a:extLst>
           </a:blip>
           <a:srcRect/>
           <a:stretch>
@@ -9806,19 +8641,11 @@
       <p:pic>
         <p:nvPicPr>
           <p:cNvPr id="8" name="Picture 7"/>
-          <p:cNvPicPr>
-            <a:picLocks/>
-          </p:cNvPicPr>
+          <p:cNvPicPr/>
           <p:nvPr userDrawn="1"/>
         </p:nvPicPr>
         <p:blipFill>
-          <a:blip r:embed="rId3" cstate="email">
-            <a:extLst>
-              <a:ext uri="{28A0092B-C50C-407E-A947-70E740481C1C}">
-                <a14:useLocalDpi xmlns:a14="http://schemas.microsoft.com/office/drawing/2010/main"/>
-              </a:ext>
-            </a:extLst>
-          </a:blip>
+          <a:blip r:embed="rId3" cstate="email"/>
           <a:stretch>
             <a:fillRect/>
           </a:stretch>
@@ -9895,9 +8722,9 @@
                 <a:solidFill>
                   <a:srgbClr val="FFF0A0"/>
                 </a:solidFill>
-                <a:latin typeface="Myriad Pro" charset="0"/>
-                <a:ea typeface="Myriad Pro" charset="0"/>
-                <a:cs typeface="Myriad Pro" charset="0"/>
+                <a:latin typeface="Myriad Pro" panose="020B0503030403020204" pitchFamily="34" charset="0"/>
+                <a:ea typeface="Myriad Pro" panose="020B0503030403020204" pitchFamily="34" charset="0"/>
+                <a:cs typeface="Myriad Pro" panose="020B0503030403020204" pitchFamily="34" charset="0"/>
               </a:defRPr>
             </a:lvl1pPr>
           </a:lstStyle>
@@ -9906,6 +8733,7 @@
               <a:rPr lang="en-US"/>
               <a:t>Click to Edit Master Title</a:t>
             </a:r>
+            <a:endParaRPr lang="en-US"/>
           </a:p>
         </p:txBody>
       </p:sp>
@@ -9946,26 +8774,22 @@
               <a:rPr lang="en-US"/>
               <a:t>Click to Edit Master subtitle</a:t>
             </a:r>
+            <a:endParaRPr lang="en-US"/>
           </a:p>
         </p:txBody>
       </p:sp>
     </p:spTree>
-    <p:extLst>
-      <p:ext uri="{BB962C8B-B14F-4D97-AF65-F5344CB8AC3E}">
-        <p14:creationId xmlns:p14="http://schemas.microsoft.com/office/powerpoint/2010/main" val="2767917083"/>
-      </p:ext>
-    </p:extLst>
   </p:cSld>
   <p:clrMapOvr>
     <a:masterClrMapping/>
   </p:clrMapOvr>
-  <mc:AlternateContent xmlns:mc="http://schemas.openxmlformats.org/markup-compatibility/2006" xmlns:p14="http://schemas.microsoft.com/office/powerpoint/2010/main">
-    <mc:Choice Requires="p14">
+  <mc:AlternateContent xmlns:mc="http://schemas.openxmlformats.org/markup-compatibility/2006">
+    <mc:Choice xmlns:p14="http://schemas.microsoft.com/office/powerpoint/2010/main" Requires="p14">
       <p:transition p14:dur="100">
         <p:cut/>
       </p:transition>
     </mc:Choice>
-    <mc:Fallback xmlns="">
+    <mc:Fallback>
       <p:transition>
         <p:cut/>
       </p:transition>
@@ -9974,7 +8798,7 @@
 </p:sldLayout>
 </file>
 
-<file path=ppt/slideLayouts/slideLayout34.xml><?xml version="1.0" encoding="utf-8"?>
+<file path=ppt/slideLayouts/slideLayout33.xml><?xml version="1.0" encoding="utf-8"?>
 <p:sldLayout xmlns:a="http://schemas.openxmlformats.org/drawingml/2006/main" xmlns:r="http://schemas.openxmlformats.org/officeDocument/2006/relationships" xmlns:p="http://schemas.openxmlformats.org/presentationml/2006/main" userDrawn="1">
   <p:cSld name="Title &amp; Bulleted Content">
     <p:spTree>
@@ -10057,6 +8881,7 @@
               <a:rPr lang="en-US" dirty="0"/>
               <a:t>Click to edit Master title style</a:t>
             </a:r>
+            <a:endParaRPr lang="en-US" dirty="0"/>
           </a:p>
         </p:txBody>
       </p:sp>
@@ -10084,7 +8909,7 @@
             <a:normAutofit/>
           </a:bodyPr>
           <a:lstStyle>
-            <a:lvl1pPr marL="287338" indent="-287338">
+            <a:lvl1pPr marL="287655" indent="-287655">
               <a:buSzPct val="100000"/>
               <a:defRPr sz="2400">
                 <a:solidFill>
@@ -10099,7 +8924,7 @@
                 </a:solidFill>
               </a:defRPr>
             </a:lvl2pPr>
-            <a:lvl3pPr marL="1084263" indent="-169863">
+            <a:lvl3pPr marL="1084580" indent="-170180">
               <a:defRPr>
                 <a:solidFill>
                   <a:schemeClr val="tx1"/>
@@ -10113,7 +8938,7 @@
                 </a:solidFill>
               </a:defRPr>
             </a:lvl4pPr>
-            <a:lvl5pPr marL="2060575" indent="-290513">
+            <a:lvl5pPr marL="2060575" indent="-290830">
               <a:defRPr>
                 <a:solidFill>
                   <a:schemeClr val="tx1"/>
@@ -10127,6 +8952,7 @@
               <a:rPr lang="en-US" dirty="0"/>
               <a:t>Click to edit Master text styles</a:t>
             </a:r>
+            <a:endParaRPr lang="en-US" dirty="0"/>
           </a:p>
           <a:p>
             <a:pPr lvl="1"/>
@@ -10134,6 +8960,7 @@
               <a:rPr lang="en-US" dirty="0"/>
               <a:t>Second level</a:t>
             </a:r>
+            <a:endParaRPr lang="en-US" dirty="0"/>
           </a:p>
           <a:p>
             <a:pPr lvl="2"/>
@@ -10141,6 +8968,7 @@
               <a:rPr lang="en-US" dirty="0"/>
               <a:t>Third level</a:t>
             </a:r>
+            <a:endParaRPr lang="en-US" dirty="0"/>
           </a:p>
           <a:p>
             <a:pPr lvl="3"/>
@@ -10148,6 +8976,7 @@
               <a:rPr lang="en-US" dirty="0"/>
               <a:t>Fourth level</a:t>
             </a:r>
+            <a:endParaRPr lang="en-US" dirty="0"/>
           </a:p>
           <a:p>
             <a:pPr lvl="4"/>
@@ -10155,51 +8984,31 @@
               <a:rPr lang="en-US" dirty="0"/>
               <a:t>Fifth level</a:t>
             </a:r>
+            <a:endParaRPr lang="en-US" dirty="0"/>
           </a:p>
         </p:txBody>
       </p:sp>
     </p:spTree>
-    <p:extLst>
-      <p:ext uri="{BB962C8B-B14F-4D97-AF65-F5344CB8AC3E}">
-        <p14:creationId xmlns:p14="http://schemas.microsoft.com/office/powerpoint/2010/main" val="2177131570"/>
-      </p:ext>
-    </p:extLst>
   </p:cSld>
   <p:clrMapOvr>
     <a:masterClrMapping/>
   </p:clrMapOvr>
-  <mc:AlternateContent xmlns:mc="http://schemas.openxmlformats.org/markup-compatibility/2006" xmlns:p14="http://schemas.microsoft.com/office/powerpoint/2010/main">
-    <mc:Choice Requires="p14">
+  <mc:AlternateContent xmlns:mc="http://schemas.openxmlformats.org/markup-compatibility/2006">
+    <mc:Choice xmlns:p14="http://schemas.microsoft.com/office/powerpoint/2010/main" Requires="p14">
       <p:transition p14:dur="100">
         <p:cut/>
       </p:transition>
     </mc:Choice>
-    <mc:Fallback xmlns="">
+    <mc:Fallback>
       <p:transition>
         <p:cut/>
       </p:transition>
     </mc:Fallback>
   </mc:AlternateContent>
-  <p:extLst>
-    <p:ext uri="{DCECCB84-F9BA-43D5-87BE-67443E8EF086}">
-      <p15:sldGuideLst xmlns:p15="http://schemas.microsoft.com/office/powerpoint/2012/main">
-        <p15:guide id="1" orient="horz" pos="2160">
-          <p15:clr>
-            <a:srgbClr val="FBAE40"/>
-          </p15:clr>
-        </p15:guide>
-        <p15:guide id="2" pos="3840">
-          <p15:clr>
-            <a:srgbClr val="FBAE40"/>
-          </p15:clr>
-        </p15:guide>
-      </p15:sldGuideLst>
-    </p:ext>
-  </p:extLst>
 </p:sldLayout>
 </file>
 
-<file path=ppt/slideLayouts/slideLayout35.xml><?xml version="1.0" encoding="utf-8"?>
+<file path=ppt/slideLayouts/slideLayout34.xml><?xml version="1.0" encoding="utf-8"?>
 <p:sldLayout xmlns:a="http://schemas.openxmlformats.org/drawingml/2006/main" xmlns:r="http://schemas.openxmlformats.org/officeDocument/2006/relationships" xmlns:p="http://schemas.openxmlformats.org/presentationml/2006/main" showMasterSp="0" userDrawn="1">
   <p:cSld name="Custom - With Title">
     <p:spTree>
@@ -10285,19 +9094,11 @@
       <p:pic>
         <p:nvPicPr>
           <p:cNvPr id="5" name="Picture 4"/>
-          <p:cNvPicPr>
-            <a:picLocks/>
-          </p:cNvPicPr>
+          <p:cNvPicPr/>
           <p:nvPr userDrawn="1"/>
         </p:nvPicPr>
         <p:blipFill>
-          <a:blip r:embed="rId2" cstate="email">
-            <a:extLst>
-              <a:ext uri="{28A0092B-C50C-407E-A947-70E740481C1C}">
-                <a14:useLocalDpi xmlns:a14="http://schemas.microsoft.com/office/drawing/2010/main"/>
-              </a:ext>
-            </a:extLst>
-          </a:blip>
+          <a:blip r:embed="rId2" cstate="email"/>
           <a:stretch>
             <a:fillRect/>
           </a:stretch>
@@ -10313,22 +9114,17 @@
         </p:spPr>
       </p:pic>
     </p:spTree>
-    <p:extLst>
-      <p:ext uri="{BB962C8B-B14F-4D97-AF65-F5344CB8AC3E}">
-        <p14:creationId xmlns:p14="http://schemas.microsoft.com/office/powerpoint/2010/main" val="4227857959"/>
-      </p:ext>
-    </p:extLst>
   </p:cSld>
   <p:clrMapOvr>
     <a:masterClrMapping/>
   </p:clrMapOvr>
-  <mc:AlternateContent xmlns:mc="http://schemas.openxmlformats.org/markup-compatibility/2006" xmlns:p14="http://schemas.microsoft.com/office/powerpoint/2010/main">
-    <mc:Choice Requires="p14">
+  <mc:AlternateContent xmlns:mc="http://schemas.openxmlformats.org/markup-compatibility/2006">
+    <mc:Choice xmlns:p14="http://schemas.microsoft.com/office/powerpoint/2010/main" Requires="p14">
       <p:transition p14:dur="100">
         <p:cut/>
       </p:transition>
     </mc:Choice>
-    <mc:Fallback xmlns="">
+    <mc:Fallback>
       <p:transition>
         <p:cut/>
       </p:transition>
@@ -10338,7 +9134,7 @@
 </file>
 
 <file path=ppt/slideLayouts/slideLayout4.xml><?xml version="1.0" encoding="utf-8"?>
-<p:sldLayout xmlns:a="http://schemas.openxmlformats.org/drawingml/2006/main" xmlns:r="http://schemas.openxmlformats.org/officeDocument/2006/relationships" xmlns:p="http://schemas.openxmlformats.org/presentationml/2006/main" showMasterSp="0" preserve="1" userDrawn="1">
+<p:sldLayout xmlns:a="http://schemas.openxmlformats.org/drawingml/2006/main" xmlns:r="http://schemas.openxmlformats.org/officeDocument/2006/relationships" xmlns:p="http://schemas.openxmlformats.org/presentationml/2006/main" preserve="1" showMasterSp="0" userDrawn="1">
   <p:cSld name="Keynote Speaker Slide">
     <p:spTree>
       <p:nvGrpSpPr>
@@ -10356,13 +9152,7 @@
       </p:grpSpPr>
       <p:sp>
         <p:nvSpPr>
-          <p:cNvPr id="11" name="Rectangle 10">
-            <a:extLst>
-              <a:ext uri="{FF2B5EF4-FFF2-40B4-BE49-F238E27FC236}">
-                <a16:creationId xmlns:a16="http://schemas.microsoft.com/office/drawing/2014/main" id="{45619CAB-6643-C445-9D1E-B586B7DBC1C9}"/>
-              </a:ext>
-            </a:extLst>
-          </p:cNvPr>
+          <p:cNvPr id="11" name="Rectangle 10"/>
           <p:cNvSpPr/>
           <p:nvPr userDrawn="1"/>
         </p:nvSpPr>
@@ -10420,13 +9210,7 @@
       </p:sp>
       <p:sp>
         <p:nvSpPr>
-          <p:cNvPr id="8" name="Rectangle 7">
-            <a:extLst>
-              <a:ext uri="{FF2B5EF4-FFF2-40B4-BE49-F238E27FC236}">
-                <a16:creationId xmlns:a16="http://schemas.microsoft.com/office/drawing/2014/main" id="{3C2420E5-B19B-524A-8BC9-508D147EF32B}"/>
-              </a:ext>
-            </a:extLst>
-          </p:cNvPr>
+          <p:cNvPr id="8" name="Rectangle 7"/>
           <p:cNvSpPr/>
           <p:nvPr userDrawn="1"/>
         </p:nvSpPr>
@@ -10472,26 +9256,14 @@
       </p:sp>
       <p:pic>
         <p:nvPicPr>
-          <p:cNvPr id="10" name="Picture 9">
-            <a:extLst>
-              <a:ext uri="{FF2B5EF4-FFF2-40B4-BE49-F238E27FC236}">
-                <a16:creationId xmlns:a16="http://schemas.microsoft.com/office/drawing/2014/main" id="{AC9AF70D-6371-A340-A1FF-58A02DD84AB9}"/>
-              </a:ext>
-            </a:extLst>
-          </p:cNvPr>
+          <p:cNvPr id="10" name="Picture 9"/>
           <p:cNvPicPr>
             <a:picLocks noChangeAspect="1"/>
           </p:cNvPicPr>
           <p:nvPr userDrawn="1"/>
         </p:nvPicPr>
         <p:blipFill>
-          <a:blip r:embed="rId2" cstate="screen">
-            <a:extLst>
-              <a:ext uri="{28A0092B-C50C-407E-A947-70E740481C1C}">
-                <a14:useLocalDpi xmlns:a14="http://schemas.microsoft.com/office/drawing/2010/main"/>
-              </a:ext>
-            </a:extLst>
-          </a:blip>
+          <a:blip r:embed="rId2" cstate="screen"/>
           <a:stretch>
             <a:fillRect/>
           </a:stretch>
@@ -10508,13 +9280,7 @@
       </p:pic>
       <p:sp>
         <p:nvSpPr>
-          <p:cNvPr id="12" name="title">
-            <a:extLst>
-              <a:ext uri="{FF2B5EF4-FFF2-40B4-BE49-F238E27FC236}">
-                <a16:creationId xmlns:a16="http://schemas.microsoft.com/office/drawing/2014/main" id="{6548366F-DD1B-E444-8E3B-E95A563D0EB1}"/>
-              </a:ext>
-            </a:extLst>
-          </p:cNvPr>
+          <p:cNvPr id="12" name="title"/>
           <p:cNvSpPr>
             <a:spLocks noGrp="1"/>
           </p:cNvSpPr>
@@ -10537,7 +9303,7 @@
           </a:bodyPr>
           <a:lstStyle>
             <a:lvl1pPr algn="ctr">
-              <a:defRPr sz="3600">
+              <a:defRPr sz="4000">
                 <a:solidFill>
                   <a:srgbClr val="F2DF74"/>
                 </a:solidFill>
@@ -10549,18 +9315,13 @@
               <a:rPr lang="en-US" dirty="0"/>
               <a:t>Click to edit Section title</a:t>
             </a:r>
-          </a:p>
-        </p:txBody>
-      </p:sp>
-      <p:sp>
-        <p:nvSpPr>
-          <p:cNvPr id="13" name="subtitle">
-            <a:extLst>
-              <a:ext uri="{FF2B5EF4-FFF2-40B4-BE49-F238E27FC236}">
-                <a16:creationId xmlns:a16="http://schemas.microsoft.com/office/drawing/2014/main" id="{FEDBFCD6-6E1D-B541-A1AF-99FEDC0C7A97}"/>
-              </a:ext>
-            </a:extLst>
-          </p:cNvPr>
+            <a:endParaRPr lang="en-US" dirty="0"/>
+          </a:p>
+        </p:txBody>
+      </p:sp>
+      <p:sp>
+        <p:nvSpPr>
+          <p:cNvPr id="13" name="subtitle"/>
           <p:cNvSpPr>
             <a:spLocks noGrp="1"/>
           </p:cNvSpPr>
@@ -10584,7 +9345,7 @@
           <a:lstStyle>
             <a:lvl1pPr marL="0" indent="0" algn="ctr">
               <a:buNone/>
-              <a:defRPr sz="2100"/>
+              <a:defRPr sz="2800"/>
             </a:lvl1pPr>
             <a:lvl2pPr marL="457200" indent="0" algn="ctr">
               <a:buNone/>
@@ -10624,18 +9385,13 @@
               <a:rPr lang="en-US" dirty="0"/>
               <a:t>Click to edit Section subtitle</a:t>
             </a:r>
-          </a:p>
-        </p:txBody>
-      </p:sp>
-      <p:sp>
-        <p:nvSpPr>
-          <p:cNvPr id="3" name="duration_background">
-            <a:extLst>
-              <a:ext uri="{FF2B5EF4-FFF2-40B4-BE49-F238E27FC236}">
-                <a16:creationId xmlns:a16="http://schemas.microsoft.com/office/drawing/2014/main" id="{E331BF4E-C971-46DE-7500-2FC1AB672787}"/>
-              </a:ext>
-            </a:extLst>
-          </p:cNvPr>
+            <a:endParaRPr lang="en-US" dirty="0"/>
+          </a:p>
+        </p:txBody>
+      </p:sp>
+      <p:sp>
+        <p:nvSpPr>
+          <p:cNvPr id="3" name="duration_background"/>
           <p:cNvSpPr/>
           <p:nvPr userDrawn="1"/>
         </p:nvSpPr>
@@ -10678,13 +9434,7 @@
       </p:sp>
       <p:sp>
         <p:nvSpPr>
-          <p:cNvPr id="5" name="duration">
-            <a:extLst>
-              <a:ext uri="{FF2B5EF4-FFF2-40B4-BE49-F238E27FC236}">
-                <a16:creationId xmlns:a16="http://schemas.microsoft.com/office/drawing/2014/main" id="{BE7FFFED-B39C-9159-1ADD-632D548A0F73}"/>
-              </a:ext>
-            </a:extLst>
-          </p:cNvPr>
+          <p:cNvPr id="5" name="duration"/>
           <p:cNvSpPr>
             <a:spLocks noGrp="1"/>
           </p:cNvSpPr>
@@ -10709,21 +9459,16 @@
           <a:p>
             <a:pPr lvl="0"/>
             <a:r>
-              <a:rPr lang="en-CN" dirty="0"/>
+              <a:rPr lang="en-US" dirty="0"/>
               <a:t>Duration</a:t>
             </a:r>
-          </a:p>
-        </p:txBody>
-      </p:sp>
-      <p:sp>
-        <p:nvSpPr>
-          <p:cNvPr id="14" name="Picture Placeholder 13">
-            <a:extLst>
-              <a:ext uri="{FF2B5EF4-FFF2-40B4-BE49-F238E27FC236}">
-                <a16:creationId xmlns:a16="http://schemas.microsoft.com/office/drawing/2014/main" id="{6166F0DC-87E3-F8EE-EAF9-16720CDDF6C1}"/>
-              </a:ext>
-            </a:extLst>
-          </p:cNvPr>
+            <a:endParaRPr lang="en-US" dirty="0"/>
+          </a:p>
+        </p:txBody>
+      </p:sp>
+      <p:sp>
+        <p:nvSpPr>
+          <p:cNvPr id="14" name="Picture Placeholder 13"/>
           <p:cNvSpPr>
             <a:spLocks noGrp="1"/>
           </p:cNvSpPr>
@@ -10752,19 +9497,13 @@
           <a:bodyPr/>
           <a:lstStyle/>
           <a:p>
-            <a:endParaRPr lang="en-CN"/>
-          </a:p>
-        </p:txBody>
-      </p:sp>
-      <p:sp>
-        <p:nvSpPr>
-          <p:cNvPr id="2" name="TextBox 1">
-            <a:extLst>
-              <a:ext uri="{FF2B5EF4-FFF2-40B4-BE49-F238E27FC236}">
-                <a16:creationId xmlns:a16="http://schemas.microsoft.com/office/drawing/2014/main" id="{C98D6B2D-F278-77A3-CA3A-F31AF13627C8}"/>
-              </a:ext>
-            </a:extLst>
-          </p:cNvPr>
+            <a:endParaRPr lang="en-US"/>
+          </a:p>
+        </p:txBody>
+      </p:sp>
+      <p:sp>
+        <p:nvSpPr>
+          <p:cNvPr id="2" name="TextBox 1"/>
           <p:cNvSpPr txBox="1"/>
           <p:nvPr userDrawn="1"/>
         </p:nvSpPr>
@@ -10786,7 +9525,7 @@
           <a:p>
             <a:pPr algn="l"/>
             <a:r>
-              <a:rPr lang="en-CN" sz="2800" dirty="0">
+              <a:rPr lang="en-US" sz="2800" dirty="0">
                 <a:solidFill>
                   <a:schemeClr val="tx1"/>
                 </a:solidFill>
@@ -10795,15 +9534,17 @@
               </a:rPr>
               <a:t>KEYNOTE SPEECH</a:t>
             </a:r>
+            <a:endParaRPr lang="en-US" sz="2800" dirty="0">
+              <a:solidFill>
+                <a:schemeClr val="tx1"/>
+              </a:solidFill>
+              <a:latin typeface="Gotham Medium" pitchFamily="2" charset="0"/>
+              <a:cs typeface="Gotham Medium" pitchFamily="2" charset="0"/>
+            </a:endParaRPr>
           </a:p>
         </p:txBody>
       </p:sp>
     </p:spTree>
-    <p:extLst>
-      <p:ext uri="{BB962C8B-B14F-4D97-AF65-F5344CB8AC3E}">
-        <p14:creationId xmlns:p14="http://schemas.microsoft.com/office/powerpoint/2010/main" val="2813457031"/>
-      </p:ext>
-    </p:extLst>
   </p:cSld>
   <p:clrMapOvr>
     <a:masterClrMapping/>
@@ -10830,13 +9571,7 @@
       </p:grpSpPr>
       <p:sp>
         <p:nvSpPr>
-          <p:cNvPr id="3" name="Slide Number Placeholder 2">
-            <a:extLst>
-              <a:ext uri="{FF2B5EF4-FFF2-40B4-BE49-F238E27FC236}">
-                <a16:creationId xmlns:a16="http://schemas.microsoft.com/office/drawing/2014/main" id="{13E3B808-8450-C749-BE34-83F343354452}"/>
-              </a:ext>
-            </a:extLst>
-          </p:cNvPr>
+          <p:cNvPr id="3" name="Slide Number Placeholder 2"/>
           <p:cNvSpPr>
             <a:spLocks noGrp="1"/>
           </p:cNvSpPr>
@@ -10851,7 +9586,6 @@
           <a:p>
             <a:fld id="{B15CCACC-6213-F14B-B40D-407BFF938B14}" type="slidenum">
               <a:rPr lang="en-US" smtClean="0"/>
-              <a:t>‹#›</a:t>
             </a:fld>
             <a:endParaRPr lang="en-US"/>
           </a:p>
@@ -10859,26 +9593,14 @@
       </p:sp>
       <p:pic>
         <p:nvPicPr>
-          <p:cNvPr id="4" name="Picture 3" descr="A person sitting at a table using a computer&#10;&#10;AI-generated content may be incorrect.">
-            <a:extLst>
-              <a:ext uri="{FF2B5EF4-FFF2-40B4-BE49-F238E27FC236}">
-                <a16:creationId xmlns:a16="http://schemas.microsoft.com/office/drawing/2014/main" id="{AC3DD301-ECE6-CCC1-EEBC-07016967DE7C}"/>
-              </a:ext>
-            </a:extLst>
-          </p:cNvPr>
+          <p:cNvPr id="4" name="Picture 3" descr="A person sitting at a table using a computer&#10;&#10;AI-generated content may be incorrect."/>
           <p:cNvPicPr>
             <a:picLocks noChangeAspect="1"/>
           </p:cNvPicPr>
           <p:nvPr userDrawn="1"/>
         </p:nvPicPr>
         <p:blipFill>
-          <a:blip r:embed="rId2" cstate="email">
-            <a:extLst>
-              <a:ext uri="{28A0092B-C50C-407E-A947-70E740481C1C}">
-                <a14:useLocalDpi xmlns:a14="http://schemas.microsoft.com/office/drawing/2010/main"/>
-              </a:ext>
-            </a:extLst>
-          </a:blip>
+          <a:blip r:embed="rId2" cstate="email"/>
           <a:srcRect/>
           <a:stretch>
             <a:fillRect/>
@@ -10896,13 +9618,7 @@
       </p:pic>
       <p:sp>
         <p:nvSpPr>
-          <p:cNvPr id="6" name="TextBox 5">
-            <a:extLst>
-              <a:ext uri="{FF2B5EF4-FFF2-40B4-BE49-F238E27FC236}">
-                <a16:creationId xmlns:a16="http://schemas.microsoft.com/office/drawing/2014/main" id="{16E2313B-73AA-70C5-F396-2B7D60603504}"/>
-              </a:ext>
-            </a:extLst>
-          </p:cNvPr>
+          <p:cNvPr id="6" name="TextBox 5"/>
           <p:cNvSpPr txBox="1"/>
           <p:nvPr userDrawn="1"/>
         </p:nvSpPr>
@@ -10928,7 +9644,7 @@
               </a:rPr>
               <a:t>AGENDA</a:t>
             </a:r>
-            <a:endParaRPr lang="en-CN" sz="9600" b="1" dirty="0">
+            <a:endParaRPr lang="en-US" sz="9600" b="1" dirty="0">
               <a:latin typeface="Gotham Office" panose="02000000000000000000" pitchFamily="2" charset="0"/>
             </a:endParaRPr>
           </a:p>
@@ -10936,13 +9652,7 @@
       </p:sp>
       <p:pic>
         <p:nvPicPr>
-          <p:cNvPr id="8" name="Picture 7">
-            <a:extLst>
-              <a:ext uri="{FF2B5EF4-FFF2-40B4-BE49-F238E27FC236}">
-                <a16:creationId xmlns:a16="http://schemas.microsoft.com/office/drawing/2014/main" id="{F684598A-BEDD-3246-573C-3DF301555AFF}"/>
-              </a:ext>
-            </a:extLst>
-          </p:cNvPr>
+          <p:cNvPr id="8" name="Picture 7"/>
           <p:cNvPicPr>
             <a:picLocks noChangeAspect="1"/>
           </p:cNvPicPr>
@@ -10965,11 +9675,6 @@
         </p:spPr>
       </p:pic>
     </p:spTree>
-    <p:extLst>
-      <p:ext uri="{BB962C8B-B14F-4D97-AF65-F5344CB8AC3E}">
-        <p14:creationId xmlns:p14="http://schemas.microsoft.com/office/powerpoint/2010/main" val="1272611096"/>
-      </p:ext>
-    </p:extLst>
   </p:cSld>
   <p:clrMapOvr>
     <a:masterClrMapping/>
@@ -10996,13 +9701,7 @@
       </p:grpSpPr>
       <p:sp>
         <p:nvSpPr>
-          <p:cNvPr id="3" name="Slide Number Placeholder 2">
-            <a:extLst>
-              <a:ext uri="{FF2B5EF4-FFF2-40B4-BE49-F238E27FC236}">
-                <a16:creationId xmlns:a16="http://schemas.microsoft.com/office/drawing/2014/main" id="{13E3B808-8450-C749-BE34-83F343354452}"/>
-              </a:ext>
-            </a:extLst>
-          </p:cNvPr>
+          <p:cNvPr id="3" name="Slide Number Placeholder 2"/>
           <p:cNvSpPr>
             <a:spLocks noGrp="1"/>
           </p:cNvSpPr>
@@ -11017,7 +9716,6 @@
           <a:p>
             <a:fld id="{B15CCACC-6213-F14B-B40D-407BFF938B14}" type="slidenum">
               <a:rPr lang="en-US" smtClean="0"/>
-              <a:t>‹#›</a:t>
             </a:fld>
             <a:endParaRPr lang="en-US"/>
           </a:p>
@@ -11025,26 +9723,14 @@
       </p:sp>
       <p:pic>
         <p:nvPicPr>
-          <p:cNvPr id="4" name="Picture 3" descr="A person holding a microphone in front of a group of people&#10;&#10;AI-generated content may be incorrect.">
-            <a:extLst>
-              <a:ext uri="{FF2B5EF4-FFF2-40B4-BE49-F238E27FC236}">
-                <a16:creationId xmlns:a16="http://schemas.microsoft.com/office/drawing/2014/main" id="{D5F367BC-6D7A-E91B-2DC4-CD9AE5848CDE}"/>
-              </a:ext>
-            </a:extLst>
-          </p:cNvPr>
+          <p:cNvPr id="4" name="Picture 3" descr="A person holding a microphone in front of a group of people&#10;&#10;AI-generated content may be incorrect."/>
           <p:cNvPicPr>
             <a:picLocks noChangeAspect="1"/>
           </p:cNvPicPr>
           <p:nvPr userDrawn="1"/>
         </p:nvPicPr>
         <p:blipFill>
-          <a:blip r:embed="rId2" cstate="email">
-            <a:extLst>
-              <a:ext uri="{28A0092B-C50C-407E-A947-70E740481C1C}">
-                <a14:useLocalDpi xmlns:a14="http://schemas.microsoft.com/office/drawing/2010/main"/>
-              </a:ext>
-            </a:extLst>
-          </a:blip>
+          <a:blip r:embed="rId2" cstate="email"/>
           <a:srcRect/>
           <a:stretch>
             <a:fillRect/>
@@ -11062,13 +9748,7 @@
       </p:pic>
       <p:sp>
         <p:nvSpPr>
-          <p:cNvPr id="6" name="TextBox 5">
-            <a:extLst>
-              <a:ext uri="{FF2B5EF4-FFF2-40B4-BE49-F238E27FC236}">
-                <a16:creationId xmlns:a16="http://schemas.microsoft.com/office/drawing/2014/main" id="{6E76AEC4-0498-D811-3DDE-936E177F9DCD}"/>
-              </a:ext>
-            </a:extLst>
-          </p:cNvPr>
+          <p:cNvPr id="6" name="TextBox 5"/>
           <p:cNvSpPr txBox="1"/>
           <p:nvPr userDrawn="1"/>
         </p:nvSpPr>
@@ -11094,18 +9774,13 @@
               </a:rPr>
               <a:t>OPENING</a:t>
             </a:r>
-            <a:endParaRPr lang="en-CN" sz="9600" b="1" dirty="0">
+            <a:endParaRPr lang="en-US" sz="9600" b="1" dirty="0">
               <a:latin typeface="Gotham Office" panose="02000000000000000000" pitchFamily="2" charset="0"/>
             </a:endParaRPr>
           </a:p>
         </p:txBody>
       </p:sp>
     </p:spTree>
-    <p:extLst>
-      <p:ext uri="{BB962C8B-B14F-4D97-AF65-F5344CB8AC3E}">
-        <p14:creationId xmlns:p14="http://schemas.microsoft.com/office/powerpoint/2010/main" val="2229540622"/>
-      </p:ext>
-    </p:extLst>
   </p:cSld>
   <p:clrMapOvr>
     <a:masterClrMapping/>
@@ -11132,13 +9807,7 @@
       </p:grpSpPr>
       <p:sp>
         <p:nvSpPr>
-          <p:cNvPr id="3" name="Slide Number Placeholder 2">
-            <a:extLst>
-              <a:ext uri="{FF2B5EF4-FFF2-40B4-BE49-F238E27FC236}">
-                <a16:creationId xmlns:a16="http://schemas.microsoft.com/office/drawing/2014/main" id="{13E3B808-8450-C749-BE34-83F343354452}"/>
-              </a:ext>
-            </a:extLst>
-          </p:cNvPr>
+          <p:cNvPr id="3" name="Slide Number Placeholder 2"/>
           <p:cNvSpPr>
             <a:spLocks noGrp="1"/>
           </p:cNvSpPr>
@@ -11153,7 +9822,6 @@
           <a:p>
             <a:fld id="{B15CCACC-6213-F14B-B40D-407BFF938B14}" type="slidenum">
               <a:rPr lang="en-US" smtClean="0"/>
-              <a:t>‹#›</a:t>
             </a:fld>
             <a:endParaRPr lang="en-US"/>
           </a:p>
@@ -11161,26 +9829,14 @@
       </p:sp>
       <p:pic>
         <p:nvPicPr>
-          <p:cNvPr id="2" name="Picture 1" descr="A group of people around a table&#10;&#10;AI-generated content may be incorrect.">
-            <a:extLst>
-              <a:ext uri="{FF2B5EF4-FFF2-40B4-BE49-F238E27FC236}">
-                <a16:creationId xmlns:a16="http://schemas.microsoft.com/office/drawing/2014/main" id="{B55E3560-5E11-464E-3980-B8C3D8A42791}"/>
-              </a:ext>
-            </a:extLst>
-          </p:cNvPr>
+          <p:cNvPr id="2" name="Picture 1" descr="A group of people around a table&#10;&#10;AI-generated content may be incorrect."/>
           <p:cNvPicPr>
             <a:picLocks noChangeAspect="1"/>
           </p:cNvPicPr>
           <p:nvPr userDrawn="1"/>
         </p:nvPicPr>
         <p:blipFill>
-          <a:blip r:embed="rId2" cstate="email">
-            <a:extLst>
-              <a:ext uri="{28A0092B-C50C-407E-A947-70E740481C1C}">
-                <a14:useLocalDpi xmlns:a14="http://schemas.microsoft.com/office/drawing/2010/main"/>
-              </a:ext>
-            </a:extLst>
-          </a:blip>
+          <a:blip r:embed="rId2" cstate="email"/>
           <a:srcRect/>
           <a:stretch>
             <a:fillRect/>
@@ -11198,13 +9854,7 @@
       </p:pic>
       <p:sp>
         <p:nvSpPr>
-          <p:cNvPr id="5" name="TextBox 4">
-            <a:extLst>
-              <a:ext uri="{FF2B5EF4-FFF2-40B4-BE49-F238E27FC236}">
-                <a16:creationId xmlns:a16="http://schemas.microsoft.com/office/drawing/2014/main" id="{1BCA0F0F-73E1-6594-F6FA-AE15E933F873}"/>
-              </a:ext>
-            </a:extLst>
-          </p:cNvPr>
+          <p:cNvPr id="5" name="TextBox 4"/>
           <p:cNvSpPr txBox="1"/>
           <p:nvPr userDrawn="1"/>
         </p:nvSpPr>
@@ -11225,7 +9875,7 @@
           <a:lstStyle/>
           <a:p>
             <a:r>
-              <a:rPr lang="en-CN" sz="9600" b="1" dirty="0">
+              <a:rPr lang="en-US" sz="9600" b="1" dirty="0">
                 <a:latin typeface="Gotham Office" panose="02000000000000000000" pitchFamily="2" charset="0"/>
               </a:rPr>
               <a:t>TABLE</a:t>
@@ -11242,15 +9892,13 @@
               </a:rPr>
               <a:t>TOPICS</a:t>
             </a:r>
+            <a:endParaRPr lang="en-US" altLang="zh-CN" sz="9600" b="1" dirty="0">
+              <a:latin typeface="Gotham Office" panose="02000000000000000000" pitchFamily="2" charset="0"/>
+            </a:endParaRPr>
           </a:p>
         </p:txBody>
       </p:sp>
     </p:spTree>
-    <p:extLst>
-      <p:ext uri="{BB962C8B-B14F-4D97-AF65-F5344CB8AC3E}">
-        <p14:creationId xmlns:p14="http://schemas.microsoft.com/office/powerpoint/2010/main" val="1499565939"/>
-      </p:ext>
-    </p:extLst>
   </p:cSld>
   <p:clrMapOvr>
     <a:masterClrMapping/>
@@ -11277,13 +9925,7 @@
       </p:grpSpPr>
       <p:sp>
         <p:nvSpPr>
-          <p:cNvPr id="3" name="Slide Number Placeholder 2">
-            <a:extLst>
-              <a:ext uri="{FF2B5EF4-FFF2-40B4-BE49-F238E27FC236}">
-                <a16:creationId xmlns:a16="http://schemas.microsoft.com/office/drawing/2014/main" id="{13E3B808-8450-C749-BE34-83F343354452}"/>
-              </a:ext>
-            </a:extLst>
-          </p:cNvPr>
+          <p:cNvPr id="3" name="Slide Number Placeholder 2"/>
           <p:cNvSpPr>
             <a:spLocks noGrp="1"/>
           </p:cNvSpPr>
@@ -11298,7 +9940,6 @@
           <a:p>
             <a:fld id="{B15CCACC-6213-F14B-B40D-407BFF938B14}" type="slidenum">
               <a:rPr lang="en-US" smtClean="0"/>
-              <a:t>‹#›</a:t>
             </a:fld>
             <a:endParaRPr lang="en-US"/>
           </a:p>
@@ -11306,26 +9947,14 @@
       </p:sp>
       <p:pic>
         <p:nvPicPr>
-          <p:cNvPr id="4" name="Picture 3" descr="A group of people standing around a table&#10;&#10;AI-generated content may be incorrect.">
-            <a:extLst>
-              <a:ext uri="{FF2B5EF4-FFF2-40B4-BE49-F238E27FC236}">
-                <a16:creationId xmlns:a16="http://schemas.microsoft.com/office/drawing/2014/main" id="{6CE23ECB-056C-7306-AD38-1E0752D4CFD2}"/>
-              </a:ext>
-            </a:extLst>
-          </p:cNvPr>
+          <p:cNvPr id="4" name="Picture 3" descr="A group of people standing around a table&#10;&#10;AI-generated content may be incorrect."/>
           <p:cNvPicPr>
             <a:picLocks noChangeAspect="1"/>
           </p:cNvPicPr>
           <p:nvPr userDrawn="1"/>
         </p:nvPicPr>
         <p:blipFill>
-          <a:blip r:embed="rId2" cstate="email">
-            <a:extLst>
-              <a:ext uri="{28A0092B-C50C-407E-A947-70E740481C1C}">
-                <a14:useLocalDpi xmlns:a14="http://schemas.microsoft.com/office/drawing/2010/main"/>
-              </a:ext>
-            </a:extLst>
-          </a:blip>
+          <a:blip r:embed="rId2" cstate="email"/>
           <a:srcRect/>
           <a:stretch>
             <a:fillRect/>
@@ -11343,13 +9972,7 @@
       </p:pic>
       <p:sp>
         <p:nvSpPr>
-          <p:cNvPr id="6" name="TextBox 5">
-            <a:extLst>
-              <a:ext uri="{FF2B5EF4-FFF2-40B4-BE49-F238E27FC236}">
-                <a16:creationId xmlns:a16="http://schemas.microsoft.com/office/drawing/2014/main" id="{592B3E2E-C84D-D46C-8A1F-18446451E754}"/>
-              </a:ext>
-            </a:extLst>
-          </p:cNvPr>
+          <p:cNvPr id="6" name="TextBox 5"/>
           <p:cNvSpPr txBox="1"/>
           <p:nvPr userDrawn="1"/>
         </p:nvSpPr>
@@ -11370,7 +9993,7 @@
           <a:lstStyle/>
           <a:p>
             <a:r>
-              <a:rPr lang="en-CN" sz="9600" b="1" dirty="0">
+              <a:rPr lang="en-US" sz="9600" b="1" dirty="0">
                 <a:latin typeface="Gotham Office" panose="02000000000000000000" pitchFamily="2" charset="0"/>
               </a:rPr>
               <a:t>NETWORKING</a:t>
@@ -11388,11 +10011,6 @@
         </p:txBody>
       </p:sp>
     </p:spTree>
-    <p:extLst>
-      <p:ext uri="{BB962C8B-B14F-4D97-AF65-F5344CB8AC3E}">
-        <p14:creationId xmlns:p14="http://schemas.microsoft.com/office/powerpoint/2010/main" val="732832807"/>
-      </p:ext>
-    </p:extLst>
   </p:cSld>
   <p:clrMapOvr>
     <a:masterClrMapping/>
@@ -11419,13 +10037,7 @@
       </p:grpSpPr>
       <p:sp>
         <p:nvSpPr>
-          <p:cNvPr id="3" name="Slide Number Placeholder 2">
-            <a:extLst>
-              <a:ext uri="{FF2B5EF4-FFF2-40B4-BE49-F238E27FC236}">
-                <a16:creationId xmlns:a16="http://schemas.microsoft.com/office/drawing/2014/main" id="{13E3B808-8450-C749-BE34-83F343354452}"/>
-              </a:ext>
-            </a:extLst>
-          </p:cNvPr>
+          <p:cNvPr id="3" name="Slide Number Placeholder 2"/>
           <p:cNvSpPr>
             <a:spLocks noGrp="1"/>
           </p:cNvSpPr>
@@ -11440,7 +10052,6 @@
           <a:p>
             <a:fld id="{B15CCACC-6213-F14B-B40D-407BFF938B14}" type="slidenum">
               <a:rPr lang="en-US" smtClean="0"/>
-              <a:t>‹#›</a:t>
             </a:fld>
             <a:endParaRPr lang="en-US"/>
           </a:p>
@@ -11448,26 +10059,14 @@
       </p:sp>
       <p:pic>
         <p:nvPicPr>
-          <p:cNvPr id="2" name="Picture 1" descr="A person standing in front of a group of people sitting around a table&#10;&#10;AI-generated content may be incorrect.">
-            <a:extLst>
-              <a:ext uri="{FF2B5EF4-FFF2-40B4-BE49-F238E27FC236}">
-                <a16:creationId xmlns:a16="http://schemas.microsoft.com/office/drawing/2014/main" id="{4D9EECFE-3CD6-D75B-7640-D07D3017067D}"/>
-              </a:ext>
-            </a:extLst>
-          </p:cNvPr>
+          <p:cNvPr id="2" name="Picture 1" descr="A person standing in front of a group of people sitting around a table&#10;&#10;AI-generated content may be incorrect."/>
           <p:cNvPicPr>
             <a:picLocks noChangeAspect="1"/>
           </p:cNvPicPr>
           <p:nvPr userDrawn="1"/>
         </p:nvPicPr>
         <p:blipFill>
-          <a:blip r:embed="rId2" cstate="email">
-            <a:extLst>
-              <a:ext uri="{28A0092B-C50C-407E-A947-70E740481C1C}">
-                <a14:useLocalDpi xmlns:a14="http://schemas.microsoft.com/office/drawing/2010/main"/>
-              </a:ext>
-            </a:extLst>
-          </a:blip>
+          <a:blip r:embed="rId2" cstate="email"/>
           <a:srcRect/>
           <a:stretch>
             <a:fillRect/>
@@ -11485,13 +10084,7 @@
       </p:pic>
       <p:sp>
         <p:nvSpPr>
-          <p:cNvPr id="5" name="TextBox 4">
-            <a:extLst>
-              <a:ext uri="{FF2B5EF4-FFF2-40B4-BE49-F238E27FC236}">
-                <a16:creationId xmlns:a16="http://schemas.microsoft.com/office/drawing/2014/main" id="{058ACE50-8F0C-6D80-FE85-34718679FDAB}"/>
-              </a:ext>
-            </a:extLst>
-          </p:cNvPr>
+          <p:cNvPr id="5" name="TextBox 4"/>
           <p:cNvSpPr txBox="1"/>
           <p:nvPr userDrawn="1"/>
         </p:nvSpPr>
@@ -11512,7 +10105,7 @@
           <a:lstStyle/>
           <a:p>
             <a:r>
-              <a:rPr lang="en-CN" sz="9600" b="1" dirty="0">
+              <a:rPr lang="en-US" sz="9600" b="1" dirty="0">
                 <a:ln>
                   <a:solidFill>
                     <a:schemeClr val="bg1">
@@ -11525,15 +10118,21 @@
               </a:rPr>
               <a:t>SPEECHES</a:t>
             </a:r>
+            <a:endParaRPr lang="en-US" sz="9600" b="1" dirty="0">
+              <a:ln>
+                <a:solidFill>
+                  <a:schemeClr val="bg1">
+                    <a:lumMod val="20000"/>
+                    <a:lumOff val="80000"/>
+                  </a:schemeClr>
+                </a:solidFill>
+              </a:ln>
+              <a:latin typeface="Gotham Office" panose="02000000000000000000" pitchFamily="2" charset="0"/>
+            </a:endParaRPr>
           </a:p>
         </p:txBody>
       </p:sp>
     </p:spTree>
-    <p:extLst>
-      <p:ext uri="{BB962C8B-B14F-4D97-AF65-F5344CB8AC3E}">
-        <p14:creationId xmlns:p14="http://schemas.microsoft.com/office/powerpoint/2010/main" val="2537526750"/>
-      </p:ext>
-    </p:extLst>
   </p:cSld>
   <p:clrMapOvr>
     <a:masterClrMapping/>
@@ -11565,13 +10164,7 @@
       </p:grpSpPr>
       <p:sp>
         <p:nvSpPr>
-          <p:cNvPr id="11" name="Rectangle 10">
-            <a:extLst>
-              <a:ext uri="{FF2B5EF4-FFF2-40B4-BE49-F238E27FC236}">
-                <a16:creationId xmlns:a16="http://schemas.microsoft.com/office/drawing/2014/main" id="{FB0797D9-27CF-7B4D-9790-D869C58F3F42}"/>
-              </a:ext>
-            </a:extLst>
-          </p:cNvPr>
+          <p:cNvPr id="11" name="Rectangle 10"/>
           <p:cNvSpPr/>
           <p:nvPr userDrawn="1"/>
         </p:nvSpPr>
@@ -11629,13 +10222,7 @@
       </p:sp>
       <p:sp>
         <p:nvSpPr>
-          <p:cNvPr id="20" name="Rectangle 19">
-            <a:extLst>
-              <a:ext uri="{FF2B5EF4-FFF2-40B4-BE49-F238E27FC236}">
-                <a16:creationId xmlns:a16="http://schemas.microsoft.com/office/drawing/2014/main" id="{365278B8-008E-F549-82E1-0C807CDEB612}"/>
-              </a:ext>
-            </a:extLst>
-          </p:cNvPr>
+          <p:cNvPr id="20" name="Rectangle 19"/>
           <p:cNvSpPr/>
           <p:nvPr userDrawn="1"/>
         </p:nvSpPr>
@@ -11681,13 +10268,7 @@
       </p:sp>
       <p:sp>
         <p:nvSpPr>
-          <p:cNvPr id="8" name="Text Placeholder 7">
-            <a:extLst>
-              <a:ext uri="{FF2B5EF4-FFF2-40B4-BE49-F238E27FC236}">
-                <a16:creationId xmlns:a16="http://schemas.microsoft.com/office/drawing/2014/main" id="{0D39BE9D-B1D3-564A-82E1-F35C8A6D2A40}"/>
-              </a:ext>
-            </a:extLst>
-          </p:cNvPr>
+          <p:cNvPr id="8" name="Text Placeholder 7"/>
           <p:cNvSpPr>
             <a:spLocks noGrp="1"/>
           </p:cNvSpPr>
@@ -11715,6 +10296,7 @@
               <a:rPr lang="en-US" dirty="0"/>
               <a:t>Level One Bullet</a:t>
             </a:r>
+            <a:endParaRPr lang="en-US" dirty="0"/>
           </a:p>
           <a:p>
             <a:pPr lvl="1"/>
@@ -11722,6 +10304,7 @@
               <a:rPr lang="en-US" dirty="0"/>
               <a:t>Level Two Bullet</a:t>
             </a:r>
+            <a:endParaRPr lang="en-US" dirty="0"/>
           </a:p>
           <a:p>
             <a:pPr lvl="2"/>
@@ -11729,6 +10312,7 @@
               <a:rPr lang="en-US" dirty="0"/>
               <a:t>Level Three Bullet</a:t>
             </a:r>
+            <a:endParaRPr lang="en-US" dirty="0"/>
           </a:p>
           <a:p>
             <a:pPr lvl="3"/>
@@ -11736,18 +10320,13 @@
               <a:rPr lang="en-US" dirty="0"/>
               <a:t>Level Four Bullet</a:t>
             </a:r>
-          </a:p>
-        </p:txBody>
-      </p:sp>
-      <p:sp>
-        <p:nvSpPr>
-          <p:cNvPr id="12" name="Title Placeholder 11">
-            <a:extLst>
-              <a:ext uri="{FF2B5EF4-FFF2-40B4-BE49-F238E27FC236}">
-                <a16:creationId xmlns:a16="http://schemas.microsoft.com/office/drawing/2014/main" id="{F782093C-5F6F-DB4E-8069-C0C7B990217E}"/>
-              </a:ext>
-            </a:extLst>
-          </p:cNvPr>
+            <a:endParaRPr lang="en-US" dirty="0"/>
+          </a:p>
+        </p:txBody>
+      </p:sp>
+      <p:sp>
+        <p:nvSpPr>
+          <p:cNvPr id="12" name="Title Placeholder 11"/>
           <p:cNvSpPr>
             <a:spLocks noGrp="1"/>
           </p:cNvSpPr>
@@ -11774,18 +10353,13 @@
               <a:rPr lang="en-US" dirty="0"/>
               <a:t>Click to edit Master title</a:t>
             </a:r>
-          </a:p>
-        </p:txBody>
-      </p:sp>
-      <p:sp>
-        <p:nvSpPr>
-          <p:cNvPr id="15" name="Slide Number Placeholder 14">
-            <a:extLst>
-              <a:ext uri="{FF2B5EF4-FFF2-40B4-BE49-F238E27FC236}">
-                <a16:creationId xmlns:a16="http://schemas.microsoft.com/office/drawing/2014/main" id="{D3472CA6-F87F-A14B-8F68-9F82D1D88129}"/>
-              </a:ext>
-            </a:extLst>
-          </p:cNvPr>
+            <a:endParaRPr lang="en-US" dirty="0"/>
+          </a:p>
+        </p:txBody>
+      </p:sp>
+      <p:sp>
+        <p:nvSpPr>
+          <p:cNvPr id="15" name="Slide Number Placeholder 14"/>
           <p:cNvSpPr>
             <a:spLocks noGrp="1"/>
           </p:cNvSpPr>
@@ -11816,8 +10390,6 @@
           <a:p>
             <a:fld id="{B15CCACC-6213-F14B-B40D-407BFF938B14}" type="slidenum">
               <a:rPr lang="en-US" smtClean="0"/>
-              <a:pPr/>
-              <a:t>‹#›</a:t>
             </a:fld>
             <a:endParaRPr lang="en-US" dirty="0"/>
           </a:p>
@@ -11825,13 +10397,7 @@
       </p:sp>
       <p:cxnSp>
         <p:nvCxnSpPr>
-          <p:cNvPr id="14" name="Straight Connector 13">
-            <a:extLst>
-              <a:ext uri="{FF2B5EF4-FFF2-40B4-BE49-F238E27FC236}">
-                <a16:creationId xmlns:a16="http://schemas.microsoft.com/office/drawing/2014/main" id="{4A9D0EE2-196A-704E-B498-12C51A4ABFD0}"/>
-              </a:ext>
-            </a:extLst>
-          </p:cNvPr>
+          <p:cNvPr id="14" name="Straight Connector 13"/>
           <p:cNvCxnSpPr/>
           <p:nvPr userDrawn="1"/>
         </p:nvCxnSpPr>
@@ -11866,26 +10432,14 @@
       </p:cxnSp>
       <p:pic>
         <p:nvPicPr>
-          <p:cNvPr id="10" name="Picture 9">
-            <a:extLst>
-              <a:ext uri="{FF2B5EF4-FFF2-40B4-BE49-F238E27FC236}">
-                <a16:creationId xmlns:a16="http://schemas.microsoft.com/office/drawing/2014/main" id="{44D54578-5BB9-2145-AEC0-3E09AB82C02E}"/>
-              </a:ext>
-            </a:extLst>
-          </p:cNvPr>
+          <p:cNvPr id="10" name="Picture 9"/>
           <p:cNvPicPr>
             <a:picLocks noChangeAspect="1"/>
           </p:cNvPicPr>
           <p:nvPr userDrawn="1"/>
         </p:nvPicPr>
         <p:blipFill>
-          <a:blip r:embed="rId37" cstate="screen">
-            <a:extLst>
-              <a:ext uri="{28A0092B-C50C-407E-A947-70E740481C1C}">
-                <a14:useLocalDpi xmlns:a14="http://schemas.microsoft.com/office/drawing/2010/main"/>
-              </a:ext>
-            </a:extLst>
-          </a:blip>
+          <a:blip r:embed="rId35" cstate="screen"/>
           <a:stretch>
             <a:fillRect/>
           </a:stretch>
@@ -11901,49 +10455,43 @@
         </p:spPr>
       </p:pic>
     </p:spTree>
-    <p:extLst>
-      <p:ext uri="{BB962C8B-B14F-4D97-AF65-F5344CB8AC3E}">
-        <p14:creationId xmlns:p14="http://schemas.microsoft.com/office/powerpoint/2010/main" val="2040796175"/>
-      </p:ext>
-    </p:extLst>
   </p:cSld>
   <p:clrMap bg1="dk1" tx1="lt1" bg2="dk2" tx2="lt2" accent1="accent1" accent2="accent2" accent3="accent3" accent4="accent4" accent5="accent5" accent6="accent6" hlink="hlink" folHlink="folHlink"/>
   <p:sldLayoutIdLst>
-    <p:sldLayoutId id="2147483672" r:id="rId1"/>
-    <p:sldLayoutId id="2147483673" r:id="rId2"/>
-    <p:sldLayoutId id="2147483697" r:id="rId3"/>
-    <p:sldLayoutId id="2147483696" r:id="rId4"/>
-    <p:sldLayoutId id="2147483704" r:id="rId5"/>
-    <p:sldLayoutId id="2147483698" r:id="rId6"/>
-    <p:sldLayoutId id="2147483699" r:id="rId7"/>
-    <p:sldLayoutId id="2147483700" r:id="rId8"/>
-    <p:sldLayoutId id="2147483701" r:id="rId9"/>
-    <p:sldLayoutId id="2147483702" r:id="rId10"/>
-    <p:sldLayoutId id="2147483703" r:id="rId11"/>
-    <p:sldLayoutId id="2147483705" r:id="rId12"/>
-    <p:sldLayoutId id="2147483674" r:id="rId13"/>
-    <p:sldLayoutId id="2147483675" r:id="rId14"/>
-    <p:sldLayoutId id="2147483676" r:id="rId15"/>
-    <p:sldLayoutId id="2147483677" r:id="rId16"/>
-    <p:sldLayoutId id="2147483688" r:id="rId17"/>
-    <p:sldLayoutId id="2147483692" r:id="rId18"/>
-    <p:sldLayoutId id="2147483691" r:id="rId19"/>
-    <p:sldLayoutId id="2147483678" r:id="rId20"/>
-    <p:sldLayoutId id="2147483679" r:id="rId21"/>
-    <p:sldLayoutId id="2147483682" r:id="rId22"/>
-    <p:sldLayoutId id="2147483685" r:id="rId23"/>
-    <p:sldLayoutId id="2147483686" r:id="rId24"/>
-    <p:sldLayoutId id="2147483649" r:id="rId25"/>
-    <p:sldLayoutId id="2147483650" r:id="rId26"/>
-    <p:sldLayoutId id="2147483652" r:id="rId27"/>
-    <p:sldLayoutId id="2147483687" r:id="rId28"/>
-    <p:sldLayoutId id="2147483661" r:id="rId29"/>
-    <p:sldLayoutId id="2147483658" r:id="rId30"/>
-    <p:sldLayoutId id="2147483659" r:id="rId31"/>
-    <p:sldLayoutId id="2147483670" r:id="rId32"/>
-    <p:sldLayoutId id="2147483693" r:id="rId33"/>
-    <p:sldLayoutId id="2147483694" r:id="rId34"/>
-    <p:sldLayoutId id="2147483695" r:id="rId35"/>
+    <p:sldLayoutId id="2147483649" r:id="rId1"/>
+    <p:sldLayoutId id="2147483650" r:id="rId2"/>
+    <p:sldLayoutId id="2147483651" r:id="rId3"/>
+    <p:sldLayoutId id="2147483652" r:id="rId4"/>
+    <p:sldLayoutId id="2147483653" r:id="rId5"/>
+    <p:sldLayoutId id="2147483654" r:id="rId6"/>
+    <p:sldLayoutId id="2147483655" r:id="rId7"/>
+    <p:sldLayoutId id="2147483656" r:id="rId8"/>
+    <p:sldLayoutId id="2147483657" r:id="rId9"/>
+    <p:sldLayoutId id="2147483658" r:id="rId10"/>
+    <p:sldLayoutId id="2147483659" r:id="rId11"/>
+    <p:sldLayoutId id="2147483660" r:id="rId12"/>
+    <p:sldLayoutId id="2147483661" r:id="rId13"/>
+    <p:sldLayoutId id="2147483662" r:id="rId14"/>
+    <p:sldLayoutId id="2147483663" r:id="rId15"/>
+    <p:sldLayoutId id="2147483664" r:id="rId16"/>
+    <p:sldLayoutId id="2147483665" r:id="rId17"/>
+    <p:sldLayoutId id="2147483666" r:id="rId18"/>
+    <p:sldLayoutId id="2147483667" r:id="rId19"/>
+    <p:sldLayoutId id="2147483668" r:id="rId20"/>
+    <p:sldLayoutId id="2147483669" r:id="rId21"/>
+    <p:sldLayoutId id="2147483670" r:id="rId22"/>
+    <p:sldLayoutId id="2147483671" r:id="rId23"/>
+    <p:sldLayoutId id="2147483672" r:id="rId24"/>
+    <p:sldLayoutId id="2147483673" r:id="rId25"/>
+    <p:sldLayoutId id="2147483674" r:id="rId26"/>
+    <p:sldLayoutId id="2147483675" r:id="rId27"/>
+    <p:sldLayoutId id="2147483676" r:id="rId28"/>
+    <p:sldLayoutId id="2147483677" r:id="rId29"/>
+    <p:sldLayoutId id="2147483678" r:id="rId30"/>
+    <p:sldLayoutId id="2147483679" r:id="rId31"/>
+    <p:sldLayoutId id="2147483680" r:id="rId32"/>
+    <p:sldLayoutId id="2147483681" r:id="rId33"/>
+    <p:sldLayoutId id="2147483682" r:id="rId34"/>
   </p:sldLayoutIdLst>
   <p:txStyles>
     <p:titleStyle>
@@ -11954,7 +10502,7 @@
         <a:spcBef>
           <a:spcPct val="0"/>
         </a:spcBef>
-        <a:buFont typeface="Arial" panose="020B0604020202020204" pitchFamily="34" charset="0"/>
+        <a:buFont typeface="Arial" panose="020B0604020202090204" pitchFamily="34" charset="0"/>
         <a:buNone/>
         <a:defRPr sz="3600" b="1" kern="1200">
           <a:solidFill>
@@ -11974,7 +10522,7 @@
         <a:spcBef>
           <a:spcPts val="1000"/>
         </a:spcBef>
-        <a:buFont typeface="Arial" panose="020B0604020202020204" pitchFamily="34" charset="0"/>
+        <a:buFont typeface="Arial" panose="020B0604020202090204" pitchFamily="34" charset="0"/>
         <a:buChar char="•"/>
         <a:defRPr sz="2800" kern="1200">
           <a:solidFill>
@@ -11992,7 +10540,7 @@
         <a:spcBef>
           <a:spcPts val="500"/>
         </a:spcBef>
-        <a:buFont typeface="Arial" panose="020B0604020202020204" pitchFamily="34" charset="0"/>
+        <a:buFont typeface="Arial" panose="020B0604020202090204" pitchFamily="34" charset="0"/>
         <a:buChar char="•"/>
         <a:defRPr sz="2400" kern="1200">
           <a:solidFill>
@@ -12010,7 +10558,7 @@
         <a:spcBef>
           <a:spcPts val="500"/>
         </a:spcBef>
-        <a:buFont typeface="Arial" panose="020B0604020202020204" pitchFamily="34" charset="0"/>
+        <a:buFont typeface="Arial" panose="020B0604020202090204" pitchFamily="34" charset="0"/>
         <a:buChar char="•"/>
         <a:defRPr sz="2000" kern="1200">
           <a:solidFill>
@@ -12028,7 +10576,7 @@
         <a:spcBef>
           <a:spcPts val="500"/>
         </a:spcBef>
-        <a:buFont typeface="Arial" panose="020B0604020202020204" pitchFamily="34" charset="0"/>
+        <a:buFont typeface="Arial" panose="020B0604020202090204" pitchFamily="34" charset="0"/>
         <a:buChar char="•"/>
         <a:defRPr sz="1800" kern="1200">
           <a:solidFill>
@@ -12046,7 +10594,7 @@
         <a:spcBef>
           <a:spcPts val="500"/>
         </a:spcBef>
-        <a:buFont typeface="Arial" panose="020B0604020202020204" pitchFamily="34" charset="0"/>
+        <a:buFont typeface="Arial" panose="020B0604020202090204" pitchFamily="34" charset="0"/>
         <a:buChar char="•"/>
         <a:defRPr sz="1800" kern="1200">
           <a:solidFill>
@@ -12064,7 +10612,7 @@
         <a:spcBef>
           <a:spcPts val="500"/>
         </a:spcBef>
-        <a:buFont typeface="Arial" panose="020B0604020202020204" pitchFamily="34" charset="0"/>
+        <a:buFont typeface="Arial" panose="020B0604020202090204" pitchFamily="34" charset="0"/>
         <a:buChar char="•"/>
         <a:defRPr sz="1800" kern="1200">
           <a:solidFill>
@@ -12082,7 +10630,7 @@
         <a:spcBef>
           <a:spcPts val="500"/>
         </a:spcBef>
-        <a:buFont typeface="Arial" panose="020B0604020202020204" pitchFamily="34" charset="0"/>
+        <a:buFont typeface="Arial" panose="020B0604020202090204" pitchFamily="34" charset="0"/>
         <a:buChar char="•"/>
         <a:defRPr sz="1800" kern="1200">
           <a:solidFill>
@@ -12100,7 +10648,7 @@
         <a:spcBef>
           <a:spcPts val="500"/>
         </a:spcBef>
-        <a:buFont typeface="Arial" panose="020B0604020202020204" pitchFamily="34" charset="0"/>
+        <a:buFont typeface="Arial" panose="020B0604020202090204" pitchFamily="34" charset="0"/>
         <a:buChar char="•"/>
         <a:defRPr sz="1800" kern="1200">
           <a:solidFill>
@@ -12118,7 +10666,7 @@
         <a:spcBef>
           <a:spcPts val="500"/>
         </a:spcBef>
-        <a:buFont typeface="Arial" panose="020B0604020202020204" pitchFamily="34" charset="0"/>
+        <a:buFont typeface="Arial" panose="020B0604020202090204" pitchFamily="34" charset="0"/>
         <a:buChar char="•"/>
         <a:defRPr sz="1800" kern="1200">
           <a:solidFill>
@@ -12226,62 +10774,6 @@
       </a:lvl9pPr>
     </p:otherStyle>
   </p:txStyles>
-  <p:extLst>
-    <p:ext uri="{27BBF7A9-308A-43DC-89C8-2F10F3537804}">
-      <p15:sldGuideLst xmlns:p15="http://schemas.microsoft.com/office/powerpoint/2012/main">
-        <p15:guide id="1" orient="horz" pos="2160">
-          <p15:clr>
-            <a:srgbClr val="F26B43"/>
-          </p15:clr>
-        </p15:guide>
-        <p15:guide id="2" pos="240">
-          <p15:clr>
-            <a:srgbClr val="F26B43"/>
-          </p15:clr>
-        </p15:guide>
-        <p15:guide id="3" pos="7440">
-          <p15:clr>
-            <a:srgbClr val="F26B43"/>
-          </p15:clr>
-        </p15:guide>
-        <p15:guide id="4" orient="horz" pos="264">
-          <p15:clr>
-            <a:srgbClr val="F26B43"/>
-          </p15:clr>
-        </p15:guide>
-        <p15:guide id="5" pos="3840">
-          <p15:clr>
-            <a:srgbClr val="F26B43"/>
-          </p15:clr>
-        </p15:guide>
-        <p15:guide id="6" orient="horz" pos="1008">
-          <p15:clr>
-            <a:srgbClr val="F26B43"/>
-          </p15:clr>
-        </p15:guide>
-        <p15:guide id="7" pos="168">
-          <p15:clr>
-            <a:srgbClr val="F26B43"/>
-          </p15:clr>
-        </p15:guide>
-        <p15:guide id="8" pos="7512">
-          <p15:clr>
-            <a:srgbClr val="F26B43"/>
-          </p15:clr>
-        </p15:guide>
-        <p15:guide id="9" orient="horz" pos="3768">
-          <p15:clr>
-            <a:srgbClr val="F26B43"/>
-          </p15:clr>
-        </p15:guide>
-        <p15:guide id="10" orient="horz" pos="3696">
-          <p15:clr>
-            <a:srgbClr val="F26B43"/>
-          </p15:clr>
-        </p15:guide>
-      </p15:sldGuideLst>
-    </p:ext>
-  </p:extLst>
 </p:sldMaster>
 </file>
 
@@ -12328,7 +10820,7 @@
     </a:clrScheme>
     <a:fontScheme name="Arial">
       <a:majorFont>
-        <a:latin typeface="Arial" panose="020B0604020202020204"/>
+        <a:latin typeface="Arial"/>
         <a:ea typeface=""/>
         <a:cs typeface=""/>
         <a:font script="Jpan" typeface="ＭＳ Ｐゴシック"/>
@@ -12363,7 +10855,7 @@
         <a:font script="Geor" typeface="Sylfaen"/>
       </a:majorFont>
       <a:minorFont>
-        <a:latin typeface="Arial" panose="020B0604020202020204"/>
+        <a:latin typeface="Arial"/>
         <a:ea typeface=""/>
         <a:cs typeface=""/>
         <a:font script="Jpan" typeface="ＭＳ Ｐゴシック"/>
@@ -12536,11 +11028,9 @@
       </a:bgFillStyleLst>
     </a:fmtScheme>
   </a:themeElements>
-  <a:objectDefaults/>
-  <a:extraClrSchemeLst/>
   <a:extLst>
     <a:ext uri="{05A4C25C-085E-4340-85A3-A5531E510DB2}">
-      <thm15:themeFamily xmlns:thm15="http://schemas.microsoft.com/office/thememl/2012/main" name="Presentation2" id="{FB2711F6-328C-E245-95D1-571D2E11DBFD}" vid="{60A0540D-10A0-D74A-B1DC-915144F8C7B8}"/>
+      <thm15:themeFamily xmlns:thm15="http://schemas.microsoft.com/office/thememl/2012/main" name="Office Theme" id="{62F939B6-93AF-4DB8-9C6B-D6C7DFDC589F}" vid="{4A3C46E8-61CC-4603-A589-7422A47A8E4A}"/>
     </a:ext>
   </a:extLst>
 </a:theme>
@@ -12589,7 +11079,7 @@
     </a:clrScheme>
     <a:fontScheme name="Office">
       <a:majorFont>
-        <a:latin typeface="Calibri Light" panose="020F0302020204030204"/>
+        <a:latin typeface="Calibri Light"/>
         <a:ea typeface=""/>
         <a:cs typeface=""/>
         <a:font script="Jpan" typeface="游ゴシック Light"/>
@@ -12622,26 +11112,9 @@
         <a:font script="Viet" typeface="Times New Roman"/>
         <a:font script="Uigh" typeface="Microsoft Uighur"/>
         <a:font script="Geor" typeface="Sylfaen"/>
-        <a:font script="Armn" typeface="Arial"/>
-        <a:font script="Bugi" typeface="Leelawadee UI"/>
-        <a:font script="Bopo" typeface="Microsoft JhengHei"/>
-        <a:font script="Java" typeface="Javanese Text"/>
-        <a:font script="Lisu" typeface="Segoe UI"/>
-        <a:font script="Mymr" typeface="Myanmar Text"/>
-        <a:font script="Nkoo" typeface="Ebrima"/>
-        <a:font script="Olck" typeface="Nirmala UI"/>
-        <a:font script="Osma" typeface="Ebrima"/>
-        <a:font script="Phag" typeface="Phagspa"/>
-        <a:font script="Syrn" typeface="Estrangelo Edessa"/>
-        <a:font script="Syrj" typeface="Estrangelo Edessa"/>
-        <a:font script="Syre" typeface="Estrangelo Edessa"/>
-        <a:font script="Sora" typeface="Nirmala UI"/>
-        <a:font script="Tale" typeface="Microsoft Tai Le"/>
-        <a:font script="Talu" typeface="Microsoft New Tai Lue"/>
-        <a:font script="Tfng" typeface="Ebrima"/>
       </a:majorFont>
       <a:minorFont>
-        <a:latin typeface="Calibri" panose="020F0502020204030204"/>
+        <a:latin typeface="Calibri"/>
         <a:ea typeface=""/>
         <a:cs typeface=""/>
         <a:font script="Jpan" typeface="游ゴシック"/>
@@ -12674,23 +11147,6 @@
         <a:font script="Viet" typeface="Arial"/>
         <a:font script="Uigh" typeface="Microsoft Uighur"/>
         <a:font script="Geor" typeface="Sylfaen"/>
-        <a:font script="Armn" typeface="Arial"/>
-        <a:font script="Bugi" typeface="Leelawadee UI"/>
-        <a:font script="Bopo" typeface="Microsoft JhengHei"/>
-        <a:font script="Java" typeface="Javanese Text"/>
-        <a:font script="Lisu" typeface="Segoe UI"/>
-        <a:font script="Mymr" typeface="Myanmar Text"/>
-        <a:font script="Nkoo" typeface="Ebrima"/>
-        <a:font script="Olck" typeface="Nirmala UI"/>
-        <a:font script="Osma" typeface="Ebrima"/>
-        <a:font script="Phag" typeface="Phagspa"/>
-        <a:font script="Syrn" typeface="Estrangelo Edessa"/>
-        <a:font script="Syrj" typeface="Estrangelo Edessa"/>
-        <a:font script="Syre" typeface="Estrangelo Edessa"/>
-        <a:font script="Sora" typeface="Nirmala UI"/>
-        <a:font script="Tale" typeface="Microsoft Tai Le"/>
-        <a:font script="Talu" typeface="Microsoft New Tai Lue"/>
-        <a:font script="Tfng" typeface="Ebrima"/>
       </a:minorFont>
     </a:fontScheme>
     <a:fmtScheme name="Office">
@@ -12831,8 +11287,6 @@
       </a:bgFillStyleLst>
     </a:fmtScheme>
   </a:themeElements>
-  <a:objectDefaults/>
-  <a:extraClrSchemeLst/>
   <a:extLst>
     <a:ext uri="{05A4C25C-085E-4340-85A3-A5531E510DB2}">
       <thm15:themeFamily xmlns:thm15="http://schemas.microsoft.com/office/thememl/2012/main" name="Office Theme" id="{62F939B6-93AF-4DB8-9C6B-D6C7DFDC589F}" vid="{4A3C46E8-61CC-4603-A589-7422A47A8E4A}"/>
@@ -12842,8 +11296,8 @@
 </file>
 
 <file path=customXml/item1.xml><?xml version="1.0" encoding="utf-8"?>
-<ct:contentTypeSchema xmlns:ct="http://schemas.microsoft.com/office/2006/metadata/contentType" xmlns:ma="http://schemas.microsoft.com/office/2006/metadata/properties/metaAttributes" ct:_="" ma:_="" ma:contentTypeName="Document" ma:contentTypeID="0x010100121995FE60004149AC33DA6DFF6C6BB2" ma:contentTypeVersion="16" ma:contentTypeDescription="Create a new document." ma:contentTypeScope="" ma:versionID="8f6a584d48894ecd817324312fb1baf8">
-  <xsd:schema xmlns:xsd="http://www.w3.org/2001/XMLSchema" xmlns:xs="http://www.w3.org/2001/XMLSchema" xmlns:p="http://schemas.microsoft.com/office/2006/metadata/properties" xmlns:ns2="5cf76712-a068-4b30-90a4-91868e0ff842" xmlns:ns3="58b4b267-c04b-4b54-95ef-7c2295e60f7b" targetNamespace="http://schemas.microsoft.com/office/2006/metadata/properties" ma:root="true" ma:fieldsID="cd8ca10a37f472537ba03519be9b36cb" ns2:_="" ns3:_="">
+<ct:contentTypeSchema xmlns:ct="http://schemas.microsoft.com/office/2006/metadata/contentType" xmlns:ma="http://schemas.microsoft.com/office/2006/metadata/properties/metaAttributes" ma:contentTypeDescription="Create a new document." ma:contentTypeVersion="16" ct:_="" ma:_="" ma:contentTypeScope="" ma:contentTypeName="Document" ma:versionID="8f6a584d48894ecd817324312fb1baf8" ma:contentTypeID="0x010100121995FE60004149AC33DA6DFF6C6BB2">
+  <xsd:schema xmlns:p="http://schemas.microsoft.com/office/2006/metadata/properties" xmlns:ns2="5cf76712-a068-4b30-90a4-91868e0ff842" xmlns:ns3="58b4b267-c04b-4b54-95ef-7c2295e60f7b" xmlns:xs="http://www.w3.org/2001/XMLSchema" xmlns:xsd="http://www.w3.org/2001/XMLSchema" ns2:_="" ma:root="true" ma:fieldsID="cd8ca10a37f472537ba03519be9b36cb" ns3:_="" targetNamespace="http://schemas.microsoft.com/office/2006/metadata/properties">
     <xsd:import namespace="5cf76712-a068-4b30-90a4-91868e0ff842"/>
     <xsd:import namespace="58b4b267-c04b-4b54-95ef-7c2295e60f7b"/>
     <xsd:element name="properties">
@@ -12852,21 +11306,21 @@
           <xsd:element name="documentManagement">
             <xsd:complexType>
               <xsd:all>
-                <xsd:element ref="ns2:MediaServiceMetadata" minOccurs="0"/>
-                <xsd:element ref="ns2:MediaServiceFastMetadata" minOccurs="0"/>
-                <xsd:element ref="ns2:MediaServiceDateTaken" minOccurs="0"/>
-                <xsd:element ref="ns2:MediaServiceAutoTags" minOccurs="0"/>
-                <xsd:element ref="ns2:MediaServiceOCR" minOccurs="0"/>
-                <xsd:element ref="ns3:SharedWithUsers" minOccurs="0"/>
-                <xsd:element ref="ns3:SharedWithDetails" minOccurs="0"/>
-                <xsd:element ref="ns2:MediaServiceGenerationTime" minOccurs="0"/>
-                <xsd:element ref="ns2:MediaServiceEventHashCode" minOccurs="0"/>
-                <xsd:element ref="ns2:MediaServiceAutoKeyPoints" minOccurs="0"/>
-                <xsd:element ref="ns2:MediaServiceKeyPoints" minOccurs="0"/>
-                <xsd:element ref="ns2:MediaServiceLocation" minOccurs="0"/>
-                <xsd:element ref="ns2:MediaLengthInSeconds" minOccurs="0"/>
-                <xsd:element ref="ns2:lcf76f155ced4ddcb4097134ff3c332f" minOccurs="0"/>
-                <xsd:element ref="ns3:TaxCatchAll" minOccurs="0"/>
+                <xsd:element minOccurs="0" ref="ns2:MediaServiceMetadata"/>
+                <xsd:element minOccurs="0" ref="ns2:MediaServiceFastMetadata"/>
+                <xsd:element minOccurs="0" ref="ns2:MediaServiceDateTaken"/>
+                <xsd:element minOccurs="0" ref="ns2:MediaServiceAutoTags"/>
+                <xsd:element minOccurs="0" ref="ns2:MediaServiceOCR"/>
+                <xsd:element minOccurs="0" ref="ns3:SharedWithUsers"/>
+                <xsd:element minOccurs="0" ref="ns3:SharedWithDetails"/>
+                <xsd:element minOccurs="0" ref="ns2:MediaServiceGenerationTime"/>
+                <xsd:element minOccurs="0" ref="ns2:MediaServiceEventHashCode"/>
+                <xsd:element minOccurs="0" ref="ns2:MediaServiceAutoKeyPoints"/>
+                <xsd:element minOccurs="0" ref="ns2:MediaServiceKeyPoints"/>
+                <xsd:element minOccurs="0" ref="ns2:MediaServiceLocation"/>
+                <xsd:element minOccurs="0" ref="ns2:MediaLengthInSeconds"/>
+                <xsd:element minOccurs="0" ref="ns2:lcf76f155ced4ddcb4097134ff3c332f"/>
+                <xsd:element minOccurs="0" ref="ns3:TaxCatchAll"/>
               </xsd:all>
             </xsd:complexType>
           </xsd:element>
@@ -12874,90 +11328,90 @@
       </xsd:complexType>
     </xsd:element>
   </xsd:schema>
-  <xsd:schema xmlns:xsd="http://www.w3.org/2001/XMLSchema" xmlns:xs="http://www.w3.org/2001/XMLSchema" xmlns:dms="http://schemas.microsoft.com/office/2006/documentManagement/types" xmlns:pc="http://schemas.microsoft.com/office/infopath/2007/PartnerControls" targetNamespace="5cf76712-a068-4b30-90a4-91868e0ff842" elementFormDefault="qualified">
+  <xsd:schema xmlns:dms="http://schemas.microsoft.com/office/2006/documentManagement/types" xmlns:pc="http://schemas.microsoft.com/office/infopath/2007/PartnerControls" xmlns:xs="http://www.w3.org/2001/XMLSchema" xmlns:xsd="http://www.w3.org/2001/XMLSchema" elementFormDefault="qualified" targetNamespace="5cf76712-a068-4b30-90a4-91868e0ff842">
     <xsd:import namespace="http://schemas.microsoft.com/office/2006/documentManagement/types"/>
     <xsd:import namespace="http://schemas.microsoft.com/office/infopath/2007/PartnerControls"/>
-    <xsd:element name="MediaServiceMetadata" ma:index="8" nillable="true" ma:displayName="MediaServiceMetadata" ma:hidden="true" ma:internalName="MediaServiceMetadata" ma:readOnly="true">
+    <xsd:element nillable="true" ma:readOnly="true" name="MediaServiceMetadata" ma:index="8" ma:internalName="MediaServiceMetadata" ma:hidden="true" ma:displayName="MediaServiceMetadata">
       <xsd:simpleType>
         <xsd:restriction base="dms:Note"/>
       </xsd:simpleType>
     </xsd:element>
-    <xsd:element name="MediaServiceFastMetadata" ma:index="9" nillable="true" ma:displayName="MediaServiceFastMetadata" ma:hidden="true" ma:internalName="MediaServiceFastMetadata" ma:readOnly="true">
+    <xsd:element nillable="true" ma:readOnly="true" name="MediaServiceFastMetadata" ma:index="9" ma:internalName="MediaServiceFastMetadata" ma:hidden="true" ma:displayName="MediaServiceFastMetadata">
       <xsd:simpleType>
         <xsd:restriction base="dms:Note"/>
       </xsd:simpleType>
     </xsd:element>
-    <xsd:element name="MediaServiceDateTaken" ma:index="10" nillable="true" ma:displayName="MediaServiceDateTaken" ma:hidden="true" ma:internalName="MediaServiceDateTaken" ma:readOnly="true">
+    <xsd:element nillable="true" ma:readOnly="true" name="MediaServiceDateTaken" ma:index="10" ma:internalName="MediaServiceDateTaken" ma:hidden="true" ma:displayName="MediaServiceDateTaken">
       <xsd:simpleType>
         <xsd:restriction base="dms:Text"/>
       </xsd:simpleType>
     </xsd:element>
-    <xsd:element name="MediaServiceAutoTags" ma:index="11" nillable="true" ma:displayName="MediaServiceAutoTags" ma:internalName="MediaServiceAutoTags" ma:readOnly="true">
+    <xsd:element nillable="true" ma:readOnly="true" name="MediaServiceAutoTags" ma:index="11" ma:internalName="MediaServiceAutoTags" ma:displayName="MediaServiceAutoTags">
       <xsd:simpleType>
         <xsd:restriction base="dms:Text"/>
       </xsd:simpleType>
     </xsd:element>
-    <xsd:element name="MediaServiceOCR" ma:index="12" nillable="true" ma:displayName="MediaServiceOCR" ma:internalName="MediaServiceOCR" ma:readOnly="true">
+    <xsd:element nillable="true" ma:readOnly="true" name="MediaServiceOCR" ma:index="12" ma:internalName="MediaServiceOCR" ma:displayName="MediaServiceOCR">
       <xsd:simpleType>
         <xsd:restriction base="dms:Note">
           <xsd:maxLength value="255"/>
         </xsd:restriction>
       </xsd:simpleType>
     </xsd:element>
-    <xsd:element name="MediaServiceGenerationTime" ma:index="15" nillable="true" ma:displayName="MediaServiceGenerationTime" ma:hidden="true" ma:internalName="MediaServiceGenerationTime" ma:readOnly="true">
+    <xsd:element nillable="true" ma:readOnly="true" name="MediaServiceGenerationTime" ma:index="15" ma:internalName="MediaServiceGenerationTime" ma:hidden="true" ma:displayName="MediaServiceGenerationTime">
       <xsd:simpleType>
         <xsd:restriction base="dms:Text"/>
       </xsd:simpleType>
     </xsd:element>
-    <xsd:element name="MediaServiceEventHashCode" ma:index="16" nillable="true" ma:displayName="MediaServiceEventHashCode" ma:hidden="true" ma:internalName="MediaServiceEventHashCode" ma:readOnly="true">
+    <xsd:element nillable="true" ma:readOnly="true" name="MediaServiceEventHashCode" ma:index="16" ma:internalName="MediaServiceEventHashCode" ma:hidden="true" ma:displayName="MediaServiceEventHashCode">
       <xsd:simpleType>
         <xsd:restriction base="dms:Text"/>
       </xsd:simpleType>
     </xsd:element>
-    <xsd:element name="MediaServiceAutoKeyPoints" ma:index="17" nillable="true" ma:displayName="MediaServiceAutoKeyPoints" ma:hidden="true" ma:internalName="MediaServiceAutoKeyPoints" ma:readOnly="true">
+    <xsd:element nillable="true" ma:readOnly="true" name="MediaServiceAutoKeyPoints" ma:index="17" ma:internalName="MediaServiceAutoKeyPoints" ma:hidden="true" ma:displayName="MediaServiceAutoKeyPoints">
       <xsd:simpleType>
         <xsd:restriction base="dms:Note"/>
       </xsd:simpleType>
     </xsd:element>
-    <xsd:element name="MediaServiceKeyPoints" ma:index="18" nillable="true" ma:displayName="KeyPoints" ma:internalName="MediaServiceKeyPoints" ma:readOnly="true">
+    <xsd:element nillable="true" ma:readOnly="true" name="MediaServiceKeyPoints" ma:index="18" ma:internalName="MediaServiceKeyPoints" ma:displayName="KeyPoints">
       <xsd:simpleType>
         <xsd:restriction base="dms:Note">
           <xsd:maxLength value="255"/>
         </xsd:restriction>
       </xsd:simpleType>
     </xsd:element>
-    <xsd:element name="MediaServiceLocation" ma:index="19" nillable="true" ma:displayName="Location" ma:internalName="MediaServiceLocation" ma:readOnly="true">
+    <xsd:element nillable="true" ma:readOnly="true" name="MediaServiceLocation" ma:index="19" ma:internalName="MediaServiceLocation" ma:displayName="Location">
       <xsd:simpleType>
         <xsd:restriction base="dms:Text"/>
       </xsd:simpleType>
     </xsd:element>
-    <xsd:element name="MediaLengthInSeconds" ma:index="20" nillable="true" ma:displayName="Length (seconds)" ma:internalName="MediaLengthInSeconds" ma:readOnly="true">
+    <xsd:element nillable="true" ma:readOnly="true" name="MediaLengthInSeconds" ma:index="20" ma:internalName="MediaLengthInSeconds" ma:displayName="Length (seconds)">
       <xsd:simpleType>
         <xsd:restriction base="dms:Unknown"/>
       </xsd:simpleType>
     </xsd:element>
-    <xsd:element name="lcf76f155ced4ddcb4097134ff3c332f" ma:index="22" nillable="true" ma:taxonomy="true" ma:internalName="lcf76f155ced4ddcb4097134ff3c332f" ma:taxonomyFieldName="MediaServiceImageTags" ma:displayName="Image Tags" ma:readOnly="false" ma:fieldId="{5cf76f15-5ced-4ddc-b409-7134ff3c332f}" ma:taxonomyMulti="true" ma:sspId="123c1ae6-fb4c-46f0-9f45-decf50a53095" ma:termSetId="09814cd3-568e-fe90-9814-8d621ff8fb84" ma:anchorId="fba54fb3-c3e1-fe81-a776-ca4b69148c4d" ma:open="true" ma:isKeyword="false">
+    <xsd:element nillable="true" ma:anchorId="fba54fb3-c3e1-fe81-a776-ca4b69148c4d" ma:readOnly="false" ma:taxonomyMulti="true" ma:sspId="123c1ae6-fb4c-46f0-9f45-decf50a53095" name="lcf76f155ced4ddcb4097134ff3c332f" ma:index="22" ma:taxonomyFieldName="MediaServiceImageTags" ma:taxonomy="true" ma:internalName="lcf76f155ced4ddcb4097134ff3c332f" ma:fieldId="{5cf76f15-5ced-4ddc-b409-7134ff3c332f}" ma:isKeyword="false" ma:displayName="Image Tags" ma:open="true" ma:termSetId="09814cd3-568e-fe90-9814-8d621ff8fb84">
       <xsd:complexType>
         <xsd:sequence>
-          <xsd:element ref="pc:Terms" minOccurs="0" maxOccurs="1"/>
+          <xsd:element minOccurs="0" ref="pc:Terms" maxOccurs="1"/>
         </xsd:sequence>
       </xsd:complexType>
     </xsd:element>
   </xsd:schema>
-  <xsd:schema xmlns:xsd="http://www.w3.org/2001/XMLSchema" xmlns:xs="http://www.w3.org/2001/XMLSchema" xmlns:dms="http://schemas.microsoft.com/office/2006/documentManagement/types" xmlns:pc="http://schemas.microsoft.com/office/infopath/2007/PartnerControls" targetNamespace="58b4b267-c04b-4b54-95ef-7c2295e60f7b" elementFormDefault="qualified">
+  <xsd:schema xmlns:dms="http://schemas.microsoft.com/office/2006/documentManagement/types" xmlns:pc="http://schemas.microsoft.com/office/infopath/2007/PartnerControls" xmlns:xs="http://www.w3.org/2001/XMLSchema" xmlns:xsd="http://www.w3.org/2001/XMLSchema" elementFormDefault="qualified" targetNamespace="58b4b267-c04b-4b54-95ef-7c2295e60f7b">
     <xsd:import namespace="http://schemas.microsoft.com/office/2006/documentManagement/types"/>
     <xsd:import namespace="http://schemas.microsoft.com/office/infopath/2007/PartnerControls"/>
-    <xsd:element name="SharedWithUsers" ma:index="13" nillable="true" ma:displayName="Shared With" ma:internalName="SharedWithUsers" ma:readOnly="true">
+    <xsd:element nillable="true" ma:readOnly="true" name="SharedWithUsers" ma:index="13" ma:internalName="SharedWithUsers" ma:displayName="Shared With">
       <xsd:complexType>
         <xsd:complexContent>
           <xsd:extension base="dms:UserMulti">
             <xsd:sequence>
-              <xsd:element name="UserInfo" minOccurs="0" maxOccurs="unbounded">
+              <xsd:element minOccurs="0" name="UserInfo" maxOccurs="unbounded">
                 <xsd:complexType>
                   <xsd:sequence>
-                    <xsd:element name="DisplayName" type="xsd:string" minOccurs="0"/>
-                    <xsd:element name="AccountId" type="dms:UserId" minOccurs="0" nillable="true"/>
-                    <xsd:element name="AccountType" type="xsd:string" minOccurs="0"/>
+                    <xsd:element minOccurs="0" name="DisplayName" type="xsd:string"/>
+                    <xsd:element minOccurs="0" nillable="true" name="AccountId" type="dms:UserId"/>
+                    <xsd:element minOccurs="0" name="AccountType" type="xsd:string"/>
                   </xsd:sequence>
                 </xsd:complexType>
               </xsd:element>
@@ -12966,62 +11420,62 @@
         </xsd:complexContent>
       </xsd:complexType>
     </xsd:element>
-    <xsd:element name="SharedWithDetails" ma:index="14" nillable="true" ma:displayName="Shared With Details" ma:internalName="SharedWithDetails" ma:readOnly="true">
+    <xsd:element nillable="true" ma:readOnly="true" name="SharedWithDetails" ma:index="14" ma:internalName="SharedWithDetails" ma:displayName="Shared With Details">
       <xsd:simpleType>
         <xsd:restriction base="dms:Note">
           <xsd:maxLength value="255"/>
         </xsd:restriction>
       </xsd:simpleType>
     </xsd:element>
-    <xsd:element name="TaxCatchAll" ma:index="23" nillable="true" ma:displayName="Taxonomy Catch All Column" ma:hidden="true" ma:list="{89519d2e-07f9-4991-8472-6b52dc2354d7}" ma:internalName="TaxCatchAll" ma:showField="CatchAllData" ma:web="58b4b267-c04b-4b54-95ef-7c2295e60f7b">
+    <xsd:element nillable="true" ma:web="58b4b267-c04b-4b54-95ef-7c2295e60f7b" name="TaxCatchAll" ma:index="23" ma:internalName="TaxCatchAll" ma:hidden="true" ma:showField="CatchAllData" ma:displayName="Taxonomy Catch All Column" ma:list="{89519d2e-07f9-4991-8472-6b52dc2354d7}">
       <xsd:complexType>
         <xsd:complexContent>
           <xsd:extension base="dms:MultiChoiceLookup">
             <xsd:sequence>
-              <xsd:element name="Value" type="dms:Lookup" maxOccurs="unbounded" minOccurs="0" nillable="true"/>
+              <xsd:element minOccurs="0" nillable="true" name="Value" type="dms:Lookup" maxOccurs="unbounded"/>
             </xsd:sequence>
           </xsd:extension>
         </xsd:complexContent>
       </xsd:complexType>
     </xsd:element>
   </xsd:schema>
-  <xsd:schema xmlns="http://schemas.openxmlformats.org/package/2006/metadata/core-properties" xmlns:xsd="http://www.w3.org/2001/XMLSchema" xmlns:xsi="http://www.w3.org/2001/XMLSchema-instance" xmlns:dc="http://purl.org/dc/elements/1.1/" xmlns:dcterms="http://purl.org/dc/terms/" xmlns:odoc="http://schemas.microsoft.com/internal/obd" targetNamespace="http://schemas.openxmlformats.org/package/2006/metadata/core-properties" elementFormDefault="qualified" attributeFormDefault="unqualified" blockDefault="#all">
-    <xsd:import namespace="http://purl.org/dc/elements/1.1/" schemaLocation="http://dublincore.org/schemas/xmls/qdc/2003/04/02/dc.xsd"/>
-    <xsd:import namespace="http://purl.org/dc/terms/" schemaLocation="http://dublincore.org/schemas/xmls/qdc/2003/04/02/dcterms.xsd"/>
+  <xsd:schema xmlns:xsi="http://www.w3.org/2001/XMLSchema-instance" xmlns:dc="http://purl.org/dc/elements/1.1/" xmlns:dcterms="http://purl.org/dc/terms/" xmlns:odoc="http://schemas.microsoft.com/internal/obd" xmlns:xsd="http://www.w3.org/2001/XMLSchema" xmlns="http://schemas.openxmlformats.org/package/2006/metadata/core-properties" attributeFormDefault="unqualified" elementFormDefault="qualified" targetNamespace="http://schemas.openxmlformats.org/package/2006/metadata/core-properties" blockDefault="#all">
+    <xsd:import schemaLocation="http://dublincore.org/schemas/xmls/qdc/2003/04/02/dc.xsd" namespace="http://purl.org/dc/elements/1.1/"/>
+    <xsd:import schemaLocation="http://dublincore.org/schemas/xmls/qdc/2003/04/02/dcterms.xsd" namespace="http://purl.org/dc/terms/"/>
     <xsd:element name="coreProperties" type="CT_coreProperties"/>
     <xsd:complexType name="CT_coreProperties">
       <xsd:all>
-        <xsd:element ref="dc:creator" minOccurs="0" maxOccurs="1"/>
-        <xsd:element ref="dcterms:created" minOccurs="0" maxOccurs="1"/>
-        <xsd:element ref="dc:identifier" minOccurs="0" maxOccurs="1"/>
-        <xsd:element name="contentType" minOccurs="0" maxOccurs="1" type="xsd:string" ma:index="0" ma:displayName="Content Type"/>
-        <xsd:element ref="dc:title" minOccurs="0" maxOccurs="1" ma:index="4" ma:displayName="Title"/>
-        <xsd:element ref="dc:subject" minOccurs="0" maxOccurs="1"/>
-        <xsd:element ref="dc:description" minOccurs="0" maxOccurs="1"/>
-        <xsd:element name="keywords" minOccurs="0" maxOccurs="1" type="xsd:string"/>
-        <xsd:element ref="dc:language" minOccurs="0" maxOccurs="1"/>
-        <xsd:element name="category" minOccurs="0" maxOccurs="1" type="xsd:string"/>
-        <xsd:element name="version" minOccurs="0" maxOccurs="1" type="xsd:string"/>
-        <xsd:element name="revision" minOccurs="0" maxOccurs="1" type="xsd:string">
+        <xsd:element minOccurs="0" ref="dc:creator" maxOccurs="1"/>
+        <xsd:element minOccurs="0" ref="dcterms:created" maxOccurs="1"/>
+        <xsd:element minOccurs="0" ref="dc:identifier" maxOccurs="1"/>
+        <xsd:element minOccurs="0" name="contentType" ma:index="0" ma:displayName="Content Type" type="xsd:string" maxOccurs="1"/>
+        <xsd:element minOccurs="0" ma:index="4" ref="dc:title" ma:displayName="Title" maxOccurs="1"/>
+        <xsd:element minOccurs="0" ref="dc:subject" maxOccurs="1"/>
+        <xsd:element minOccurs="0" ref="dc:description" maxOccurs="1"/>
+        <xsd:element minOccurs="0" name="keywords" type="xsd:string" maxOccurs="1"/>
+        <xsd:element minOccurs="0" ref="dc:language" maxOccurs="1"/>
+        <xsd:element minOccurs="0" name="category" type="xsd:string" maxOccurs="1"/>
+        <xsd:element minOccurs="0" name="version" type="xsd:string" maxOccurs="1"/>
+        <xsd:element minOccurs="0" name="revision" type="xsd:string" maxOccurs="1">
           <xsd:annotation>
-            <xsd:documentation>
-                        This value indicates the number of saves or revisions. The application is responsible for updating this value after each revision.
+            <xsd:documentation>
+                        This value indicates the number of saves or revisions. The application is responsible for updating this value after each revision.
                     </xsd:documentation>
           </xsd:annotation>
         </xsd:element>
-        <xsd:element name="lastModifiedBy" minOccurs="0" maxOccurs="1" type="xsd:string"/>
-        <xsd:element ref="dcterms:modified" minOccurs="0" maxOccurs="1"/>
-        <xsd:element name="contentStatus" minOccurs="0" maxOccurs="1" type="xsd:string"/>
+        <xsd:element minOccurs="0" name="lastModifiedBy" type="xsd:string" maxOccurs="1"/>
+        <xsd:element minOccurs="0" ref="dcterms:modified" maxOccurs="1"/>
+        <xsd:element minOccurs="0" name="contentStatus" type="xsd:string" maxOccurs="1"/>
       </xsd:all>
     </xsd:complexType>
   </xsd:schema>
-  <xs:schema xmlns:pc="http://schemas.microsoft.com/office/infopath/2007/PartnerControls" xmlns:xs="http://www.w3.org/2001/XMLSchema" targetNamespace="http://schemas.microsoft.com/office/infopath/2007/PartnerControls" elementFormDefault="qualified" attributeFormDefault="unqualified">
+  <xs:schema xmlns:pc="http://schemas.microsoft.com/office/infopath/2007/PartnerControls" xmlns:xs="http://www.w3.org/2001/XMLSchema" attributeFormDefault="unqualified" elementFormDefault="qualified" targetNamespace="http://schemas.microsoft.com/office/infopath/2007/PartnerControls">
     <xs:element name="Person">
       <xs:complexType>
         <xs:sequence>
-          <xs:element ref="pc:DisplayName" minOccurs="0"/>
-          <xs:element ref="pc:AccountId" minOccurs="0"/>
-          <xs:element ref="pc:AccountType" minOccurs="0"/>
+          <xs:element minOccurs="0" ref="pc:DisplayName"/>
+          <xs:element minOccurs="0" ref="pc:AccountId"/>
+          <xs:element minOccurs="0" ref="pc:AccountType"/>
         </xs:sequence>
       </xs:complexType>
     </xs:element>
@@ -13031,7 +11485,7 @@
     <xs:element name="BDCAssociatedEntity">
       <xs:complexType>
         <xs:sequence>
-          <xs:element ref="pc:BDCEntity" minOccurs="0" maxOccurs="unbounded"/>
+          <xs:element minOccurs="0" ref="pc:BDCEntity" maxOccurs="unbounded"/>
         </xs:sequence>
         <xs:attribute ref="pc:EntityNamespace"/>
         <xs:attribute ref="pc:EntityName"/>
@@ -13046,13 +11500,13 @@
     <xs:element name="BDCEntity">
       <xs:complexType>
         <xs:sequence>
-          <xs:element ref="pc:EntityDisplayName" minOccurs="0"/>
-          <xs:element ref="pc:EntityInstanceReference" minOccurs="0"/>
-          <xs:element ref="pc:EntityId1" minOccurs="0"/>
-          <xs:element ref="pc:EntityId2" minOccurs="0"/>
-          <xs:element ref="pc:EntityId3" minOccurs="0"/>
-          <xs:element ref="pc:EntityId4" minOccurs="0"/>
-          <xs:element ref="pc:EntityId5" minOccurs="0"/>
+          <xs:element minOccurs="0" ref="pc:EntityDisplayName"/>
+          <xs:element minOccurs="0" ref="pc:EntityInstanceReference"/>
+          <xs:element minOccurs="0" ref="pc:EntityId1"/>
+          <xs:element minOccurs="0" ref="pc:EntityId2"/>
+          <xs:element minOccurs="0" ref="pc:EntityId3"/>
+          <xs:element minOccurs="0" ref="pc:EntityId4"/>
+          <xs:element minOccurs="0" ref="pc:EntityId5"/>
         </xs:sequence>
       </xs:complexType>
     </xs:element>
@@ -13066,15 +11520,15 @@
     <xs:element name="Terms">
       <xs:complexType>
         <xs:sequence>
-          <xs:element ref="pc:TermInfo" minOccurs="0" maxOccurs="unbounded"/>
+          <xs:element minOccurs="0" ref="pc:TermInfo" maxOccurs="unbounded"/>
         </xs:sequence>
       </xs:complexType>
     </xs:element>
     <xs:element name="TermInfo">
       <xs:complexType>
         <xs:sequence>
-          <xs:element ref="pc:TermName" minOccurs="0"/>
-          <xs:element ref="pc:TermId" minOccurs="0"/>
+          <xs:element minOccurs="0" ref="pc:TermName"/>
+          <xs:element minOccurs="0" ref="pc:TermId"/>
         </xs:sequence>
       </xs:complexType>
     </xs:element>
@@ -13106,44 +11560,18 @@
 
 <file path=customXml/itemProps1.xml><?xml version="1.0" encoding="utf-8"?>
 <ds:datastoreItem xmlns:ds="http://schemas.openxmlformats.org/officeDocument/2006/customXml" ds:itemID="{C09E73AD-A75C-432C-B7A2-F017F279192E}">
-  <ds:schemaRefs>
-    <ds:schemaRef ds:uri="http://schemas.microsoft.com/office/2006/metadata/contentType"/>
-    <ds:schemaRef ds:uri="http://schemas.microsoft.com/office/2006/metadata/properties/metaAttributes"/>
-    <ds:schemaRef ds:uri="http://www.w3.org/2001/XMLSchema"/>
-    <ds:schemaRef ds:uri="http://schemas.microsoft.com/office/2006/metadata/properties"/>
-    <ds:schemaRef ds:uri="5cf76712-a068-4b30-90a4-91868e0ff842"/>
-    <ds:schemaRef ds:uri="58b4b267-c04b-4b54-95ef-7c2295e60f7b"/>
-    <ds:schemaRef ds:uri="http://schemas.microsoft.com/office/2006/documentManagement/types"/>
-    <ds:schemaRef ds:uri="http://schemas.microsoft.com/office/infopath/2007/PartnerControls"/>
-    <ds:schemaRef ds:uri="http://schemas.openxmlformats.org/package/2006/metadata/core-properties"/>
-    <ds:schemaRef ds:uri="http://purl.org/dc/elements/1.1/"/>
-    <ds:schemaRef ds:uri="http://purl.org/dc/terms/"/>
-    <ds:schemaRef ds:uri="http://schemas.microsoft.com/internal/obd"/>
-  </ds:schemaRefs>
+  <ds:schemaRefs/>
 </ds:datastoreItem>
 </file>
 
 <file path=customXml/itemProps2.xml><?xml version="1.0" encoding="utf-8"?>
 <ds:datastoreItem xmlns:ds="http://schemas.openxmlformats.org/officeDocument/2006/customXml" ds:itemID="{A819AF1C-597D-4C53-A745-6803C5B1338D}">
-  <ds:schemaRefs>
-    <ds:schemaRef ds:uri="http://purl.org/dc/dcmitype/"/>
-    <ds:schemaRef ds:uri="http://purl.org/dc/terms/"/>
-    <ds:schemaRef ds:uri="http://schemas.microsoft.com/office/2006/metadata/properties"/>
-    <ds:schemaRef ds:uri="5cf76712-a068-4b30-90a4-91868e0ff842"/>
-    <ds:schemaRef ds:uri="http://schemas.openxmlformats.org/package/2006/metadata/core-properties"/>
-    <ds:schemaRef ds:uri="http://schemas.microsoft.com/office/2006/documentManagement/types"/>
-    <ds:schemaRef ds:uri="http://www.w3.org/XML/1998/namespace"/>
-    <ds:schemaRef ds:uri="http://purl.org/dc/elements/1.1/"/>
-    <ds:schemaRef ds:uri="http://schemas.microsoft.com/office/infopath/2007/PartnerControls"/>
-    <ds:schemaRef ds:uri="58b4b267-c04b-4b54-95ef-7c2295e60f7b"/>
-  </ds:schemaRefs>
+  <ds:schemaRefs/>
 </ds:datastoreItem>
 </file>
 
 <file path=customXml/itemProps3.xml><?xml version="1.0" encoding="utf-8"?>
 <ds:datastoreItem xmlns:ds="http://schemas.openxmlformats.org/officeDocument/2006/customXml" ds:itemID="{C1F79CE7-5996-4384-8FE6-E1FC5C68C6CF}">
-  <ds:schemaRefs>
-    <ds:schemaRef ds:uri="http://schemas.microsoft.com/sharepoint/v3/contenttype/forms"/>
-  </ds:schemaRefs>
+  <ds:schemaRefs/>
 </ds:datastoreItem>
 </file>